--- a/docs/[BI 분석가 과정] 발표자료_260914_최은혜.pptx
+++ b/docs/[BI 분석가 과정] 발표자료_260914_최은혜.pptx
@@ -313,342 +313,43 @@
           <a:lstStyle/>
           <a:p>
             <a:r>
-              <a:rPr dirty="0" err="1"/>
-              <a:t>인사와</a:t>
-            </a:r>
-            <a:r>
-              <a:rPr dirty="0"/>
-              <a:t> </a:t>
-            </a:r>
-            <a:r>
-              <a:rPr dirty="0" err="1"/>
-              <a:t>주제</a:t>
-            </a:r>
-            <a:r>
-              <a:rPr dirty="0"/>
-              <a:t> 한 줄 </a:t>
-            </a:r>
-            <a:r>
-              <a:rPr dirty="0" err="1"/>
-              <a:t>소개</a:t>
-            </a:r>
-            <a:r>
-              <a:rPr dirty="0"/>
-              <a:t>.</a:t>
-            </a:r>
-          </a:p>
-          <a:p>
-            <a:endParaRPr dirty="0"/>
-          </a:p>
-          <a:p>
-            <a:r>
-              <a:rPr dirty="0" err="1"/>
-              <a:t>말할</a:t>
-            </a:r>
-            <a:r>
-              <a:rPr dirty="0"/>
-              <a:t> 것: </a:t>
-            </a:r>
-            <a:r>
-              <a:rPr dirty="0" err="1"/>
-              <a:t>게임물과</a:t>
-            </a:r>
-            <a:r>
-              <a:rPr dirty="0"/>
-              <a:t> </a:t>
-            </a:r>
-            <a:r>
-              <a:rPr dirty="0" err="1"/>
-              <a:t>영상물의</a:t>
-            </a:r>
-            <a:r>
-              <a:rPr dirty="0"/>
-              <a:t> </a:t>
-            </a:r>
-            <a:r>
-              <a:rPr dirty="0" err="1"/>
-              <a:t>등급분류</a:t>
-            </a:r>
-            <a:r>
-              <a:rPr dirty="0"/>
-              <a:t> </a:t>
-            </a:r>
-            <a:r>
-              <a:rPr dirty="0" err="1"/>
-              <a:t>결과를</a:t>
-            </a:r>
-            <a:r>
-              <a:rPr dirty="0"/>
-              <a:t> 각 </a:t>
-            </a:r>
-            <a:r>
-              <a:rPr dirty="0" err="1"/>
-              <a:t>기관</a:t>
-            </a:r>
-            <a:r>
-              <a:rPr dirty="0"/>
-              <a:t> </a:t>
-            </a:r>
-            <a:r>
-              <a:rPr dirty="0" err="1"/>
-              <a:t>공개</a:t>
-            </a:r>
-            <a:r>
-              <a:rPr dirty="0"/>
-              <a:t> API 로 </a:t>
-            </a:r>
-            <a:r>
-              <a:rPr dirty="0" err="1"/>
-              <a:t>전량</a:t>
-            </a:r>
-            <a:r>
-              <a:rPr dirty="0"/>
-              <a:t> </a:t>
-            </a:r>
-            <a:r>
-              <a:rPr dirty="0" err="1"/>
-              <a:t>받아</a:t>
-            </a:r>
-            <a:r>
-              <a:rPr dirty="0"/>
-              <a:t>, </a:t>
-            </a:r>
-            <a:r>
-              <a:rPr dirty="0" err="1"/>
-              <a:t>청소년</a:t>
-            </a:r>
-            <a:r>
-              <a:rPr dirty="0"/>
-              <a:t> </a:t>
-            </a:r>
-            <a:r>
-              <a:rPr dirty="0" err="1"/>
-              <a:t>이용을</a:t>
-            </a:r>
-            <a:r>
-              <a:rPr dirty="0"/>
-              <a:t> </a:t>
-            </a:r>
-            <a:r>
-              <a:rPr dirty="0" err="1"/>
-              <a:t>제한하는</a:t>
-            </a:r>
-            <a:r>
-              <a:rPr dirty="0"/>
-              <a:t> </a:t>
-            </a:r>
-            <a:r>
-              <a:rPr dirty="0" err="1"/>
-              <a:t>등급이</a:t>
-            </a:r>
-            <a:r>
-              <a:rPr dirty="0"/>
-              <a:t> </a:t>
-            </a:r>
-            <a:r>
-              <a:rPr dirty="0" err="1"/>
-              <a:t>무엇으로</a:t>
-            </a:r>
-            <a:r>
-              <a:rPr dirty="0"/>
-              <a:t> </a:t>
-            </a:r>
-            <a:r>
-              <a:rPr dirty="0" err="1"/>
-              <a:t>결정되는지</a:t>
-            </a:r>
-            <a:r>
-              <a:rPr dirty="0"/>
-              <a:t> </a:t>
-            </a:r>
-            <a:r>
-              <a:rPr dirty="0" err="1"/>
-              <a:t>확인한</a:t>
-            </a:r>
-            <a:r>
-              <a:rPr dirty="0"/>
-              <a:t> </a:t>
-            </a:r>
-            <a:r>
-              <a:rPr dirty="0" err="1"/>
-              <a:t>프로젝트다</a:t>
-            </a:r>
-            <a:r>
-              <a:rPr dirty="0"/>
-              <a:t>. 두 </a:t>
-            </a:r>
-            <a:r>
-              <a:rPr dirty="0" err="1"/>
-              <a:t>매체를</a:t>
-            </a:r>
-            <a:r>
-              <a:rPr dirty="0"/>
-              <a:t> </a:t>
-            </a:r>
-            <a:r>
-              <a:rPr dirty="0" err="1"/>
-              <a:t>같은</a:t>
-            </a:r>
-            <a:r>
-              <a:rPr dirty="0"/>
-              <a:t> </a:t>
-            </a:r>
-            <a:r>
-              <a:rPr dirty="0" err="1"/>
-              <a:t>표에</a:t>
-            </a:r>
-            <a:r>
-              <a:rPr dirty="0"/>
-              <a:t> </a:t>
-            </a:r>
-            <a:r>
-              <a:rPr dirty="0" err="1"/>
-              <a:t>놓고</a:t>
-            </a:r>
-            <a:r>
-              <a:rPr dirty="0"/>
-              <a:t> </a:t>
-            </a:r>
-            <a:r>
-              <a:rPr dirty="0" err="1"/>
-              <a:t>비교한</a:t>
-            </a:r>
-            <a:r>
-              <a:rPr dirty="0"/>
-              <a:t> </a:t>
-            </a:r>
-            <a:r>
-              <a:rPr dirty="0" err="1"/>
-              <a:t>자료가</a:t>
-            </a:r>
-            <a:r>
-              <a:rPr dirty="0"/>
-              <a:t> </a:t>
-            </a:r>
-            <a:r>
-              <a:rPr dirty="0" err="1"/>
-              <a:t>드물어서</a:t>
-            </a:r>
-            <a:r>
-              <a:rPr dirty="0"/>
-              <a:t> 이 </a:t>
-            </a:r>
-            <a:r>
-              <a:rPr dirty="0" err="1"/>
-              <a:t>주제를</a:t>
-            </a:r>
-            <a:r>
-              <a:rPr dirty="0"/>
-              <a:t> </a:t>
-            </a:r>
-            <a:r>
-              <a:rPr dirty="0" err="1"/>
-              <a:t>골랐다</a:t>
-            </a:r>
-            <a:r>
-              <a:rPr dirty="0"/>
-              <a:t>.</a:t>
-            </a:r>
-          </a:p>
-          <a:p>
-            <a:endParaRPr dirty="0"/>
-          </a:p>
-          <a:p>
-            <a:r>
-              <a:rPr dirty="0" err="1"/>
-              <a:t>발표</a:t>
-            </a:r>
-            <a:r>
-              <a:rPr dirty="0"/>
-              <a:t> </a:t>
-            </a:r>
-            <a:r>
-              <a:rPr dirty="0" err="1"/>
-              <a:t>시간은</a:t>
-            </a:r>
-            <a:r>
-              <a:rPr dirty="0"/>
-              <a:t> 10~15분, </a:t>
-            </a:r>
-            <a:r>
-              <a:rPr dirty="0" err="1"/>
-              <a:t>마지막에</a:t>
-            </a:r>
-            <a:r>
-              <a:rPr dirty="0"/>
-              <a:t> </a:t>
-            </a:r>
-            <a:r>
-              <a:rPr dirty="0" err="1"/>
-              <a:t>대시보드를</a:t>
-            </a:r>
-            <a:r>
-              <a:rPr dirty="0"/>
-              <a:t> </a:t>
-            </a:r>
-            <a:r>
-              <a:rPr dirty="0" err="1"/>
-              <a:t>직접</a:t>
-            </a:r>
-            <a:r>
-              <a:rPr dirty="0"/>
-              <a:t> </a:t>
-            </a:r>
-            <a:r>
-              <a:rPr dirty="0" err="1"/>
-              <a:t>열어</a:t>
-            </a:r>
-            <a:r>
-              <a:rPr dirty="0"/>
-              <a:t> </a:t>
-            </a:r>
-            <a:r>
-              <a:rPr dirty="0" err="1"/>
-              <a:t>보여</a:t>
-            </a:r>
-            <a:r>
-              <a:rPr dirty="0"/>
-              <a:t> </a:t>
-            </a:r>
-            <a:r>
-              <a:rPr dirty="0" err="1"/>
-              <a:t>주는</a:t>
-            </a:r>
-            <a:r>
-              <a:rPr dirty="0"/>
-              <a:t> </a:t>
-            </a:r>
-            <a:r>
-              <a:rPr dirty="0" err="1"/>
-              <a:t>순서로</a:t>
-            </a:r>
-            <a:r>
-              <a:rPr dirty="0"/>
-              <a:t> </a:t>
-            </a:r>
-            <a:r>
-              <a:rPr dirty="0" err="1"/>
-              <a:t>진행한다고</a:t>
-            </a:r>
-            <a:r>
-              <a:rPr dirty="0"/>
-              <a:t> </a:t>
-            </a:r>
-            <a:r>
-              <a:rPr dirty="0" err="1"/>
-              <a:t>예고하면</a:t>
-            </a:r>
-            <a:r>
-              <a:rPr dirty="0"/>
-              <a:t> </a:t>
-            </a:r>
-            <a:r>
-              <a:rPr dirty="0" err="1"/>
-              <a:t>좋다</a:t>
-            </a:r>
-            <a:r>
-              <a:rPr dirty="0"/>
-              <a:t>.</a:t>
+              <a:t>[대본]</a:t>
+            </a:r>
+          </a:p>
+          <a:p>
+            <a:r>
+              <a:t>안녕하십니까. 게임물과 영상물의 등급분류 공공데이터를 분석한 개인 프로젝트를 발표하겠습니다.</a:t>
+            </a:r>
+          </a:p>
+          <a:p>
+            <a:r>
+              <a:t>주제는 청소년 이용을 제한하는 등급이 무엇을 기준으로 결정되는지 확인하는 것입니다.</a:t>
+            </a:r>
+          </a:p>
+          <a:p>
+            <a:r>
+              <a:t>두 기관이 공개하는 등급분류 결과 24만 290건을 전량 수집해 분석했습니다.</a:t>
+            </a:r>
+          </a:p>
+          <a:p>
+            <a:r>
+              <a:t>발표는 10분 정도 걸리고, 마지막에 대시보드를 직접 열어 보여 드리겠습니다.</a:t>
+            </a:r>
+          </a:p>
+          <a:p/>
+          <a:p>
+            <a:r>
+              <a:t>[보충]</a:t>
+            </a:r>
+          </a:p>
+          <a:p>
+            <a:r>
+              <a:t>· 24만 290건 = 영상물 134,464 + 게임물 위원회분류 29,417 + 게임물 자체등급분류 76,409</a:t>
+            </a:r>
+          </a:p>
+          <a:p>
+            <a:r>
+              <a:t>· 자체등급분류는 분석 대상이 아니라 비교군입니다. 뒤에서 다시 설명합니다.</a:t>
             </a:r>
           </a:p>
         </p:txBody>
@@ -718,31 +419,68 @@
           <a:lstStyle/>
           <a:p>
             <a:r>
-              <a:t>말할 것: 영상물은 항목마다 점수가 있으니, 그 점수와 등급의 관계를 보는 게 자연스러운 분석이다. 그런데 해 보니 관계가 아니라 항등식이었다.</a:t>
-            </a:r>
-          </a:p>
-          <a:p>
-            <a:endParaRPr/>
-          </a:p>
-          <a:p>
-            <a:r>
-              <a:t>가장 높은 점수가 1단계면 전부 전체관람가, 2단계면 전부 12세다. 99.93%가 그렇고, 표기 방식이 바뀐 2017년 5월 이후로는 예외가 하나도 없다.</a:t>
-            </a:r>
-          </a:p>
-          <a:p>
-            <a:endParaRPr/>
-          </a:p>
-          <a:p>
-            <a:r>
-              <a:t>이 발견의 의미: 원래 하려던 분석(내용정보로 등급 설명)이 무의미해졌다. 실제로 회귀분석을 돌렸더니 AUC 가 1.000 이 나왔는데, 모형이 좋아서가 아니라 정답을 미리 알려준 것이었다. 이걸 확인하고 분석 방향을 바꿨다.</a:t>
-            </a:r>
-          </a:p>
-          <a:p>
-            <a:endParaRPr/>
-          </a:p>
-          <a:p>
-            <a:r>
-              <a:t>AUC 설명이 필요하면: 1에 가까울수록 완벽히 맞힌다는 뜻이고, 1.000 은 현실 데이터에서 나올 수 없는 값이라 의심해야 한다고 말한다.</a:t>
+              <a:t>[대본]</a:t>
+            </a:r>
+          </a:p>
+          <a:p>
+            <a:r>
+              <a:t>영상물은 구조가 아예 다릅니다. 항목마다 1단계에서 5단계까지 수준이 있으니,</a:t>
+            </a:r>
+          </a:p>
+          <a:p>
+            <a:r>
+              <a:t>그 최고값과 실제 등급이 어떤 관계인지 보는 것이 자연스러운 분석입니다.</a:t>
+            </a:r>
+          </a:p>
+          <a:p>
+            <a:r>
+              <a:t>그런데 관계가 아니라 항등식이었습니다. 최고값이 1단계면 전체관람가, 2단계면 12세,</a:t>
+            </a:r>
+          </a:p>
+          <a:p>
+            <a:r>
+              <a:t>4단계면 청소년관람불가로 그대로 대응됩니다. 134,462건 중 134,364건, 99.93%가 이 규칙에 맞고,</a:t>
+            </a:r>
+          </a:p>
+          <a:p>
+            <a:r>
+              <a:t>표기 체계가 바뀐 2017년 5월 이후 94,516건에서는 예외가 하나도 없습니다.</a:t>
+            </a:r>
+          </a:p>
+          <a:p>
+            <a:r>
+              <a:t>즉 등급은 계산해서 나온 값이 아니라 최고값을 옮겨 적은 값입니다.</a:t>
+            </a:r>
+          </a:p>
+          <a:p>
+            <a:r>
+              <a:t>그래서 내용정보로 등급을 설명하는 분석은 성립하지 않습니다. 같은 값을 두 번 쓰는 것이기 때문입니다.</a:t>
+            </a:r>
+          </a:p>
+          <a:p/>
+          <a:p>
+            <a:r>
+              <a:t>[보충]</a:t>
+            </a:r>
+          </a:p>
+          <a:p>
+            <a:r>
+              <a:t>· 실제로 내용정보로 등급을 예측하는 회귀분석을 돌렸더니 AUC가 1.000이 나왔습니다.</a:t>
+            </a:r>
+          </a:p>
+          <a:p>
+            <a:r>
+              <a:t>  모형이 좋아서가 아니라 정답을 그대로 입력한 결과였습니다.</a:t>
+            </a:r>
+          </a:p>
+          <a:p>
+            <a:r>
+              <a:t>· AUC는 1에 가까울수록 잘 맞힌다는 지표인데, 1.000은 현실 데이터에서 나올 수 없는 값이라</a:t>
+            </a:r>
+          </a:p>
+          <a:p>
+            <a:r>
+              <a:t>  의심해야 하는 신호입니다.</a:t>
             </a:r>
           </a:p>
         </p:txBody>
@@ -812,23 +550,58 @@
           <a:lstStyle/>
           <a:p>
             <a:r>
-              <a:t>말할 것: 앞 장에서 등급은 옮겨 적은 값이라고 했다. 그러면 이 자료에서 사람의 판단은 어디에 남아 있나. 신청등급이다.</a:t>
-            </a:r>
-          </a:p>
-          <a:p>
-            <a:endParaRPr/>
-          </a:p>
-          <a:p>
-            <a:r>
-              <a:t>신청인이 스스로 매긴 등급과 위원회가 결정한 등급이 갈리는 지점, 그게 12.2%다. 여기만 내용정보로 설명되지 않는다.</a:t>
-            </a:r>
-          </a:p>
-          <a:p>
-            <a:endParaRPr/>
-          </a:p>
-          <a:p>
-            <a:r>
-              <a:t>질문 대비: '상향률을 모형으로 설명해 봤나' → 내용정보와 종별·연도로 상향 여부를 예측하면 AUC 0.825 가 나온다. 신청등급 자체는 변수로 넣지 않았다. 넣으면 다시 항등식이 되기 때문이다.</a:t>
+              <a:t>[대본]</a:t>
+            </a:r>
+          </a:p>
+          <a:p>
+            <a:r>
+              <a:t>그러면 이 자료에서 심의 판단은 어디에 남아 있는가. 신청등급입니다.</a:t>
+            </a:r>
+          </a:p>
+          <a:p>
+            <a:r>
+              <a:t>신청등급은 신청인이 스스로 판단해 적어 낸 값이라 결정등급과 같은 값이 아닙니다.</a:t>
+            </a:r>
+          </a:p>
+          <a:p>
+            <a:r>
+              <a:t>전체 건 중 12.2%에서 조정이 일어났고, 상향이 8.6%, 하향이 3.6%입니다.</a:t>
+            </a:r>
+          </a:p>
+          <a:p>
+            <a:r>
+              <a:t>특히 12세로 신청한 건의 28.2%가 상향됐습니다. 신청인이 등급을 가장 낮게 예측하는 구간입니다.</a:t>
+            </a:r>
+          </a:p>
+          <a:p>
+            <a:r>
+              <a:t>반대로 청소년관람불가로 신청하면 더 올라갈 자리가 없어 조정이 드뭅니다.</a:t>
+            </a:r>
+          </a:p>
+          <a:p>
+            <a:r>
+              <a:t>결국 이 12.2% 구간이 자료에서 심의 판단을 확인할 수 있는 유일한 영역입니다.</a:t>
+            </a:r>
+          </a:p>
+          <a:p/>
+          <a:p>
+            <a:r>
+              <a:t>[예상 질문]</a:t>
+            </a:r>
+          </a:p>
+          <a:p>
+            <a:r>
+              <a:t>· 상향을 모형으로 설명해 봤나 → 내용정보와 종별·연도로 상향 여부를 예측하면 AUC 0.825가 나왔습니다.</a:t>
+            </a:r>
+          </a:p>
+          <a:p>
+            <a:r>
+              <a:t>  신청등급 자체는 변수로 넣지 않았습니다. 상향은 '최고값이 신청등급보다 높다'와 같은 말이어서</a:t>
+            </a:r>
+          </a:p>
+          <a:p>
+            <a:r>
+              <a:t>  넣으면 다시 항등식이 되기 때문입니다.</a:t>
             </a:r>
           </a:p>
         </p:txBody>
@@ -898,31 +671,63 @@
           <a:lstStyle/>
           <a:p>
             <a:r>
-              <a:t>말할 것: 강사 피드백의 핵심 요구가 '같은 내용 수준에서 매체 간 차이를 보라'는 것이었다. 이 장이 그 답이다.</a:t>
-            </a:r>
-          </a:p>
-          <a:p>
-            <a:endParaRPr/>
-          </a:p>
-          <a:p>
-            <a:r>
-              <a:t>보유 조합이 완전히 같은 건끼리만 비교했다. 예를 들어 '선정성만 있는 건'끼리, '폭력성과 공포가 있는 건'끼리 비교한 것이다. 비교 가능한 10개 조합 전부에서 게임물이 더 높았고 평균 15.1%p 차이였다.</a:t>
-            </a:r>
-          </a:p>
-          <a:p>
-            <a:endParaRPr/>
-          </a:p>
-          <a:p>
-            <a:r>
-              <a:t>한계를 반드시 같이 말한다. 이 결론은 '3단계 이상을 보유로 본다'는 기준 위에서만 성립한다. 발표에서 이 단서를 빼면 과장이 된다.</a:t>
-            </a:r>
-          </a:p>
-          <a:p>
-            <a:endParaRPr/>
-          </a:p>
-          <a:p>
-            <a:r>
-              <a:t>질문 대비: '왜 사행성은 비교에서 뺐나' → 영상물에 대응 항목이 없어서다. 넣으면 사행성 때문에 청불이 된 게임이 '항목 없음' 칸에 섞여 결과가 뒤집힌다. 영상물 쪽도 대칭으로 주제·대사·모방위험을 뺐다.</a:t>
+              <a:t>[대본]</a:t>
+            </a:r>
+          </a:p>
+          <a:p>
+            <a:r>
+              <a:t>매체 비교입니다. 명칭이 같은 네 개 항목의 보유 조합이 완전히 같은 건끼리만 비교했습니다.</a:t>
+            </a:r>
+          </a:p>
+          <a:p>
+            <a:r>
+              <a:t>예를 들어 선정성만 있는 건끼리, 폭력성과 공포가 함께 있는 건끼리 비교한 것입니다.</a:t>
+            </a:r>
+          </a:p>
+          <a:p>
+            <a:r>
+              <a:t>비교 가능한 10개 조합 전부에서 게임물의 청소년 이용 제한 비율이 높았고, 평균 차이는 15.1%p입니다.</a:t>
+            </a:r>
+          </a:p>
+          <a:p>
+            <a:r>
+              <a:t>다만 한계를 함께 말씀드려야 합니다. 영상물의 5단계를 게임물의 보유·미보유에 맞추려면</a:t>
+            </a:r>
+          </a:p>
+          <a:p>
+            <a:r>
+              <a:t>어딘가에서 잘라야 하는데, 그 지점은 데이터가 정해 주지 않습니다.</a:t>
+            </a:r>
+          </a:p>
+          <a:p>
+            <a:r>
+              <a:t>3단계로 자르면 지금 보시는 결과이고, 4단계로 자르면 영상물이 정의상 100%가 되어 비교가 성립하지 않습니다.</a:t>
+            </a:r>
+          </a:p>
+          <a:p>
+            <a:r>
+              <a:t>그래서 '게임물이 더 엄격하다'는 결론은 절단 기준을 함께 적을 때만 쓸 수 있습니다.</a:t>
+            </a:r>
+          </a:p>
+          <a:p/>
+          <a:p>
+            <a:r>
+              <a:t>[예상 질문]</a:t>
+            </a:r>
+          </a:p>
+          <a:p>
+            <a:r>
+              <a:t>· 왜 사행성은 비교에서 뺐나 → 영상물에 대응하는 항목이 없기 때문입니다. 남겨 두면 사행성 때문에</a:t>
+            </a:r>
+          </a:p>
+          <a:p>
+            <a:r>
+              <a:t>  청불이 된 게임물이 '항목 없음' 칸에 섞여 결과가 뒤집힙니다. 영상물 쪽도 대칭으로</a:t>
+            </a:r>
+          </a:p>
+          <a:p>
+            <a:r>
+              <a:t>  주제·대사·모방위험을 제외했습니다.</a:t>
             </a:r>
           </a:p>
         </p:txBody>
@@ -992,23 +797,53 @@
           <a:lstStyle/>
           <a:p>
             <a:r>
-              <a:t>말할 것: 세 결론 밖에서 따로 정리한 분석이다. 청소년 이용 제한 콘텐츠만 떼어 규모·추이·분포·항목·조합을 본 것이고, 산출물 ③번에 해당한다.</a:t>
-            </a:r>
-          </a:p>
-          <a:p>
-            <a:endParaRPr/>
-          </a:p>
-          <a:p>
-            <a:r>
-              <a:t>가장 조심해야 할 숫자가 영상물 43.7%다. 이건 성인물이 만든 숫자여서 그대로 인용하면 오해를 부른다. 성인물을 빼면 10.7%다.</a:t>
-            </a:r>
-          </a:p>
-          <a:p>
-            <a:endParaRPr/>
-          </a:p>
-          <a:p>
-            <a:r>
-              <a:t>질문 대비: '자체등급분류 83건은 뭐냐' → 사업자는 청소년이용불가 게임물을 자체분류할 수 없다. 그런데 83건이 남아 있다는 건 이 데이터가 '분류 시점의 등급'이 아니라 '현재 등급'을 보여준다는 뜻이다. 사후 조정의 흔적으로 읽었다.</a:t>
+              <a:t>[대본]</a:t>
+            </a:r>
+          </a:p>
+          <a:p>
+            <a:r>
+              <a:t>청소년 이용 제한 콘텐츠만 따로 떼어 정리한 결과입니다.</a:t>
+            </a:r>
+          </a:p>
+          <a:p>
+            <a:r>
+              <a:t>표에서 가장 조심해야 할 숫자는 영상물 43.7%입니다. 이 값은 대부분 성인물이 만든 것이고,</a:t>
+            </a:r>
+          </a:p>
+          <a:p>
+            <a:r>
+              <a:t>성인물을 빼면 10.7%로 내려갑니다. 종별을 통제하지 않으면 결론이 반대로 나올 수 있습니다.</a:t>
+            </a:r>
+          </a:p>
+          <a:p>
+            <a:r>
+              <a:t>게임물에서는 보드게임 베팅성 장르가 99.7%로 가장 높고, 플랫폼에서는 온라인 게임이 74.9%입니다.</a:t>
+            </a:r>
+          </a:p>
+          <a:p>
+            <a:r>
+              <a:t>둘 다 웹보드 게임이 몰려 있는 영역입니다.</a:t>
+            </a:r>
+          </a:p>
+          <a:p>
+            <a:r>
+              <a:t>자체등급분류의 청소년이용불가 83건은, 제도상 사업자가 부여할 수 없는 등급입니다.</a:t>
+            </a:r>
+          </a:p>
+          <a:p>
+            <a:r>
+              <a:t>따라서 사후에 등급이 조정된 결과로 해석했습니다.</a:t>
+            </a:r>
+          </a:p>
+          <a:p/>
+          <a:p>
+            <a:r>
+              <a:t>[보충]</a:t>
+            </a:r>
+          </a:p>
+          <a:p>
+            <a:r>
+              <a:t>· 이 분석이 산출물 세 번째 항목인 '청소년 이용 제한 콘텐츠 주요 특성 분석'입니다.</a:t>
             </a:r>
           </a:p>
         </p:txBody>
@@ -1078,23 +913,48 @@
           <a:lstStyle/>
           <a:p>
             <a:r>
-              <a:t>말할 것: 산출물은 다섯 가지다. 화면에 URL 이 있으니 다음 장에서 직접 열어 보여 준다.</a:t>
-            </a:r>
-          </a:p>
-          <a:p>
-            <a:endParaRPr/>
-          </a:p>
-          <a:p>
-            <a:r>
-              <a:t>강조할 점: 손으로 옮겨 적은 숫자가 없다는 것. 리포트든 대시보드든 발표자료든 모두 같은 계산 결과를 읽어 오게 만들었다. 수집이 늘어나도 숫자가 어긋나지 않는다.</a:t>
-            </a:r>
-          </a:p>
-          <a:p>
-            <a:endParaRPr/>
-          </a:p>
-          <a:p>
-            <a:r>
-              <a:t>질문 대비: '데이터는 어디서 볼 수 있나' → 통합 Dataset 은 parquet 과 csv 로 있고, 열 정의를 적은 데이터 사전을 HTML 로 함께 만들어 두었다.</a:t>
+              <a:t>[대본]</a:t>
+            </a:r>
+          </a:p>
+          <a:p>
+            <a:r>
+              <a:t>산출물은 다섯 가지입니다. 통합 데이터셋, EDA 두 종, 청소년 이용 제한 특성 분석,</a:t>
+            </a:r>
+          </a:p>
+          <a:p>
+            <a:r>
+              <a:t>대시보드, 그리고 인사이트 리포트입니다.</a:t>
+            </a:r>
+          </a:p>
+          <a:p>
+            <a:r>
+              <a:t>강조하고 싶은 점은 손으로 옮겨 적은 숫자가 없다는 것입니다.</a:t>
+            </a:r>
+          </a:p>
+          <a:p>
+            <a:r>
+              <a:t>리포트와 대시보드, 이 발표자료까지 모두 같은 계산 결과를 읽어 오도록 만들었습니다.</a:t>
+            </a:r>
+          </a:p>
+          <a:p>
+            <a:r>
+              <a:t>원자료가 갱신되면 수치가 자동으로 따라갑니다.</a:t>
+            </a:r>
+          </a:p>
+          <a:p/>
+          <a:p>
+            <a:r>
+              <a:t>[예상 질문]</a:t>
+            </a:r>
+          </a:p>
+          <a:p>
+            <a:r>
+              <a:t>· 데이터는 어디서 보나 → 통합 데이터셋은 parquet과 csv로 있고, 열 정의를 적은 데이터 사전을</a:t>
+            </a:r>
+          </a:p>
+          <a:p>
+            <a:r>
+              <a:t>  HTML로 함께 만들어 두었습니다.</a:t>
             </a:r>
           </a:p>
         </p:txBody>
@@ -1164,31 +1024,64 @@
           <a:lstStyle/>
           <a:p>
             <a:r>
-              <a:t>여기서 실제로 브라우저를 열어 보여 주는 것이 가장 효과적이다.</a:t>
-            </a:r>
-          </a:p>
-          <a:p>
-            <a:endParaRPr/>
-          </a:p>
-          <a:p>
-            <a:r>
-              <a:t>시연 순서 추천: ① 화면에서 대각선만 채워진 교차표를 보여 주고(결론 3), ④ 화면으로 넘어가 이진화 기준을 4단계로 바꿔 경고 문구가 뜨는 것을 보여 준다. '이 기준으로는 비교가 성립하지 않는다'는 것을 화면이 스스로 경고하도록 만들어 두었다.</a:t>
-            </a:r>
-          </a:p>
-          <a:p>
-            <a:endParaRPr/>
-          </a:p>
-          <a:p>
-            <a:r>
-              <a:t>주의: 무료 요금제라 한동안 접속이 없으면 앱이 대기 상태로 들어간다. 발표 시작 전에 미리 한 번 열어 두어야 한다. 첫 접속은 십여 초 걸린다.</a:t>
-            </a:r>
-          </a:p>
-          <a:p>
-            <a:endParaRPr/>
-          </a:p>
-          <a:p>
-            <a:r>
-              <a:t>질문 대비: '어떻게 배포했나' → GitHub 비공개 저장소에 올리고 Streamlit Cloud 에 연결했다. 화면이 쓰는 열만 남긴 사본을 따로 만들어 저장소에 넣었다.</a:t>
+              <a:t>[대본]</a:t>
+            </a:r>
+          </a:p>
+          <a:p>
+            <a:r>
+              <a:t>대시보드는 화면 하나가 분석 질문 하나에 답하도록 구성했습니다. 모두 여섯 화면입니다.</a:t>
+            </a:r>
+          </a:p>
+          <a:p>
+            <a:r>
+              <a:t>왼쪽 필터로 기간, 영상물 종별, 게임물 플랫폼, 성인물 제외를 바꿀 수 있고,</a:t>
+            </a:r>
+          </a:p>
+          <a:p>
+            <a:r>
+              <a:t>필터를 바꾸면 화면 위쪽의 해석 문장도 다시 계산됩니다.</a:t>
+            </a:r>
+          </a:p>
+          <a:p>
+            <a:r>
+              <a:t>지금 직접 열어 보겠습니다.</a:t>
+            </a:r>
+          </a:p>
+          <a:p/>
+          <a:p>
+            <a:r>
+              <a:t>[시연 순서]</a:t>
+            </a:r>
+          </a:p>
+          <a:p>
+            <a:r>
+              <a:t>1) 1번 화면에서 대각선만 채워진 교차표를 보여 줍니다. 결론 3의 근거입니다.</a:t>
+            </a:r>
+          </a:p>
+          <a:p>
+            <a:r>
+              <a:t>2) 4번 화면으로 옮겨 이진화 기준을 4단계로 바꿉니다. 화면이 '이 기준으로는 비교가 성립하지 않는다'고</a:t>
+            </a:r>
+          </a:p>
+          <a:p>
+            <a:r>
+              <a:t>   스스로 경고합니다. 한계를 화면에 박아 둔 것을 보여 주는 장면입니다.</a:t>
+            </a:r>
+          </a:p>
+          <a:p/>
+          <a:p>
+            <a:r>
+              <a:t>[주의]</a:t>
+            </a:r>
+          </a:p>
+          <a:p>
+            <a:r>
+              <a:t>· 무료 요금제라 접속이 없으면 앱이 대기 상태로 들어갑니다. 발표 시작 전에 미리 한 번 열어 두십시오.</a:t>
+            </a:r>
+          </a:p>
+          <a:p>
+            <a:r>
+              <a:t>  첫 접속은 십여 초 걸립니다.</a:t>
             </a:r>
           </a:p>
         </p:txBody>
@@ -1258,23 +1151,53 @@
           <a:lstStyle/>
           <a:p>
             <a:r>
-              <a:t>말할 것: 한계를 숨기지 않는 게 이 발표의 신뢰도를 만든다. 네 가지를 짚는다.</a:t>
-            </a:r>
-          </a:p>
-          <a:p>
-            <a:endParaRPr/>
-          </a:p>
-          <a:p>
-            <a:r>
-              <a:t>특히 첫 번째(0.27%)와 세 번째(3단계 절단)는 결론을 인용할 때 반드시 따라붙어야 하는 단서다.</a:t>
-            </a:r>
-          </a:p>
-          <a:p>
-            <a:endParaRPr/>
-          </a:p>
-          <a:p>
-            <a:r>
-              <a:t>후속 과제는 '다음에 뭘 할 거냐'는 질문에 대한 답으로 준비해 둔 것이다. 두 자료 모두 사람이 쓴 설명문 칸이 있어서 텍스트 분석으로 이어갈 수 있다.</a:t>
+              <a:t>[대본]</a:t>
+            </a:r>
+          </a:p>
+          <a:p>
+            <a:r>
+              <a:t>한계는 네 가지입니다.</a:t>
+            </a:r>
+          </a:p>
+          <a:p>
+            <a:r>
+              <a:t>첫째, 게임물 결과는 위원회가 직접 심의한 분류분에 한정됩니다. 공개 범위가 전체의 0.27%입니다.</a:t>
+            </a:r>
+          </a:p>
+          <a:p>
+            <a:r>
+              <a:t>둘째, 영상물은 성인물이 37%를 차지해 종별을 통제하지 않으면 결론이 달라집니다.</a:t>
+            </a:r>
+          </a:p>
+          <a:p>
+            <a:r>
+              <a:t>셋째, 매체 비교는 3단계 절단 기준 위에서만 성립합니다.</a:t>
+            </a:r>
+          </a:p>
+          <a:p>
+            <a:r>
+              <a:t>넷째, 자체등급분류 비교군은 약 7주치가 전부이고 재수집이 불가능합니다.</a:t>
+            </a:r>
+          </a:p>
+          <a:p>
+            <a:r>
+              <a:t>후속 과제로는 두 자료에 모두 들어 있는 서술형 설명 필드가 있습니다.</a:t>
+            </a:r>
+          </a:p>
+          <a:p>
+            <a:r>
+              <a:t>게임물 개요는 97.4%, 영상물 작품 내용은 2018년 이후 100% 기록돼 있어 텍스트 분석으로 이어 갈 수 있습니다.</a:t>
+            </a:r>
+          </a:p>
+          <a:p/>
+          <a:p>
+            <a:r>
+              <a:t>[보충]</a:t>
+            </a:r>
+          </a:p>
+          <a:p>
+            <a:r>
+              <a:t>· 첫 번째와 세 번째 한계는 결론을 인용할 때 반드시 따라붙어야 하는 조건입니다.</a:t>
             </a:r>
           </a:p>
         </p:txBody>
@@ -1344,31 +1267,68 @@
           <a:lstStyle/>
           <a:p>
             <a:r>
-              <a:t>이 장이 발표의 인상을 결정한다. 실패를 숨기지 않고 원인을 설명하는 장이다.</a:t>
-            </a:r>
-          </a:p>
-          <a:p>
-            <a:endParaRPr/>
-          </a:p>
-          <a:p>
-            <a:r>
-              <a:t>첫 번째: 처음에는 내용정보로 등급을 예측하는 모형을 만들려고 했다. AUC 가 1.000 이 나왔고, 좋아하기 전에 이상하다고 생각해서 교차표를 찍어 봤더니 두 값이 같은 값이었다.</a:t>
-            </a:r>
-          </a:p>
-          <a:p>
-            <a:endParaRPr/>
-          </a:p>
-          <a:p>
-            <a:r>
-              <a:t>두 번째: 항목이 여러 개 겹칠수록 등급이 올라가는데 5개에서 꺾이는 결과가 나왔다. 성인물이 4개 구간에 89% 몰려 있어 생긴 착시였다. 심슨의 역설 사례다.</a:t>
-            </a:r>
-          </a:p>
-          <a:p>
-            <a:endParaRPr/>
-          </a:p>
-          <a:p>
-            <a:r>
-              <a:t>질문 대비: '심슨의 역설이 뭐냐' → 전체를 합쳐서 보면 한 방향인데 집단을 나눠 보면 반대 방향이 나오는 현상이라고 짧게 답한다.</a:t>
+              <a:t>[대본]</a:t>
+            </a:r>
+          </a:p>
+          <a:p>
+            <a:r>
+              <a:t>마지막으로, 분석 도중 폐기한 결론 두 가지를 말씀드리겠습니다. 가장 많이 배운 부분입니다.</a:t>
+            </a:r>
+          </a:p>
+          <a:p>
+            <a:r>
+              <a:t>첫째는 내용정보로 등급을 설명할 수 있다는 결론입니다. 회귀분석에서 AUC가 1.000이 나왔는데,</a:t>
+            </a:r>
+          </a:p>
+          <a:p>
+            <a:r>
+              <a:t>모형이 좋아서가 아니라 등급이 곧 내용정보의 최고값이어서 같은 값을 두 번 쓴 것이었습니다.</a:t>
+            </a:r>
+          </a:p>
+          <a:p>
+            <a:r>
+              <a:t>교차표를 확인하고 나서야 항등식임을 알았습니다.</a:t>
+            </a:r>
+          </a:p>
+          <a:p>
+            <a:r>
+              <a:t>둘째는 항목이 여러 개 겹칠수록 등급이 올라간다는 결론입니다. 항목 4개에서 93.4%였다가</a:t>
+            </a:r>
+          </a:p>
+          <a:p>
+            <a:r>
+              <a:t>5개에서 71.5%로 꺾이는 결과가 나왔는데, 성인물이 특정 구간에 몰려 생긴 착시였습니다.</a:t>
+            </a:r>
+          </a:p>
+          <a:p>
+            <a:r>
+              <a:t>성인물을 제외하니 꺾임이 사라지고 단조 증가로 바뀌었습니다.</a:t>
+            </a:r>
+          </a:p>
+          <a:p>
+            <a:r>
+              <a:t>여기서 얻은 시사점은 두 가지입니다. 결과가 지나치게 정연하면 모형이 아니라 데이터 구조를 먼저</a:t>
+            </a:r>
+          </a:p>
+          <a:p>
+            <a:r>
+              <a:t>의심해야 한다는 것, 그리고 비율을 비교하기 전에 대상 집단의 구성을 먼저 맞춰야 한다는 것입니다.</a:t>
+            </a:r>
+          </a:p>
+          <a:p/>
+          <a:p>
+            <a:r>
+              <a:t>[예상 질문]</a:t>
+            </a:r>
+          </a:p>
+          <a:p>
+            <a:r>
+              <a:t>· 심슨의 역설이 무엇인가 → 전체를 합쳐서 보면 한 방향인데 집단을 나눠 보면 반대 방향이 나오는</a:t>
+            </a:r>
+          </a:p>
+          <a:p>
+            <a:r>
+              <a:t>  현상입니다. 두 번째 사례가 여기 해당합니다.</a:t>
             </a:r>
           </a:p>
         </p:txBody>
@@ -1438,35 +1398,68 @@
           <a:lstStyle/>
           <a:p>
             <a:r>
-              <a:t>네 문장으로 정리하고 마친다.</a:t>
-            </a:r>
-          </a:p>
-          <a:p>
-            <a:endParaRPr/>
-          </a:p>
-          <a:p>
-            <a:r>
-              <a:t>질의응답에서 자주 나올 만한 것 정리:</a:t>
-            </a:r>
-          </a:p>
-          <a:p>
-            <a:r>
-              <a:t>· 데이터는 어떻게 받았나 → 두 기관 공개 API, 전량, 기관 총 건수와 일치.</a:t>
-            </a:r>
-          </a:p>
-          <a:p>
-            <a:r>
-              <a:t>· 왜 두 매체를 비교했나 → 강사 피드백에서 나온 요구이자, 두 기관이 같은 이름의 항목을 쓰고 있어 비교 가능성이 있었다.</a:t>
-            </a:r>
-          </a:p>
-          <a:p>
-            <a:r>
-              <a:t>· 실무에 어떻게 쓰나 → 등급분류 결과를 인용할 때 '어느 경로의 분류분인지'를 함께 밝혀야 한다는 점, 그리고 공개 데이터만으로 게임물 전체를 말할 수 없다는 점.</a:t>
-            </a:r>
-          </a:p>
-          <a:p>
-            <a:r>
-              <a:t>· 가장 어려웠던 점 → 수집 자체보다, 결과가 너무 깨끗해서 의심해야 했던 지점들.</a:t>
+              <a:t>[대본]</a:t>
+            </a:r>
+          </a:p>
+          <a:p>
+            <a:r>
+              <a:t>정리하겠습니다.</a:t>
+            </a:r>
+          </a:p>
+          <a:p>
+            <a:r>
+              <a:t>첫째, 게임물의 청소년이용불가를 결정하는 요인은 폭력성이나 선정성이 아니라 사행성입니다.</a:t>
+            </a:r>
+          </a:p>
+          <a:p>
+            <a:r>
+              <a:t>둘째, 다만 공개 데이터로 확인할 수 있는 범위는 게임물 등급분류 전체의 0.27%입니다.</a:t>
+            </a:r>
+          </a:p>
+          <a:p>
+            <a:r>
+              <a:t>셋째, 영상물의 등급은 내용정보의 최고값과 동일하며, 판단이 개입하는 영역은 12.2%뿐입니다.</a:t>
+            </a:r>
+          </a:p>
+          <a:p>
+            <a:r>
+              <a:t>넷째, 같은 조건에서 비교하면 게임물의 판정이 더 엄격합니다. 단, 절단 기준을 전제로 합니다.</a:t>
+            </a:r>
+          </a:p>
+          <a:p>
+            <a:r>
+              <a:t>산출물은 화면의 주소에서 모두 확인하실 수 있습니다. 감사합니다.</a:t>
+            </a:r>
+          </a:p>
+          <a:p/>
+          <a:p>
+            <a:r>
+              <a:t>[질의응답 대비]</a:t>
+            </a:r>
+          </a:p>
+          <a:p>
+            <a:r>
+              <a:t>· 데이터는 어떻게 받았나 → 두 기관 공개 API로 전량 수집, 기관 제공 총 건수와 일치.</a:t>
+            </a:r>
+          </a:p>
+          <a:p>
+            <a:r>
+              <a:t>· 실무에 어떻게 쓰나 → 등급분류 결과를 인용할 때 어느 경로의 분류분인지 함께 밝혀야 하고,</a:t>
+            </a:r>
+          </a:p>
+          <a:p>
+            <a:r>
+              <a:t>  공개 데이터만으로 게임물 전체를 말할 수 없다는 점입니다.</a:t>
+            </a:r>
+          </a:p>
+          <a:p>
+            <a:r>
+              <a:t>· 가장 어려웠던 점 → 수집보다, 결과가 지나치게 깨끗해서 의심해야 했던 지점들입니다.</a:t>
+            </a:r>
+          </a:p>
+          <a:p>
+            <a:r>
+              <a:t>· 분석 기간 → 2026년 8월 31일 기획, 9월 14일 완료입니다.</a:t>
             </a:r>
           </a:p>
         </p:txBody>
@@ -1536,15 +1529,33 @@
           <a:lstStyle/>
           <a:p>
             <a:r>
-              <a:t>순서만 짧게 읽고 넘어간다. 30초를 넘기지 않는다.</a:t>
-            </a:r>
-          </a:p>
-          <a:p>
-            <a:endParaRPr/>
-          </a:p>
-          <a:p>
-            <a:r>
-              <a:t>강조할 점: 결론이 세 가지이고, 각 결론마다 근거 수치를 하나씩 들고 왔다는 것.</a:t>
+              <a:t>[대본]</a:t>
+            </a:r>
+          </a:p>
+          <a:p>
+            <a:r>
+              <a:t>순서는 이렇습니다. 먼저 주제와 데이터를 말씀드리고, 결론 세 가지를 하나씩 근거와 함께 보여 드립니다.</a:t>
+            </a:r>
+          </a:p>
+          <a:p>
+            <a:r>
+              <a:t>그다음 매체 비교 결과와 산출물을 소개하고, 한계와 폐기한 결론으로 마치겠습니다.</a:t>
+            </a:r>
+          </a:p>
+          <a:p/>
+          <a:p>
+            <a:r>
+              <a:t>[보충]</a:t>
+            </a:r>
+          </a:p>
+          <a:p>
+            <a:r>
+              <a:t>· 30초 이내로 짧게 넘어갑니다.</a:t>
+            </a:r>
+          </a:p>
+          <a:p>
+            <a:r>
+              <a:t>· 오른쪽 열의 숫자가 각 결론의 근거 수치입니다. 이 네 개만 기억하셔도 됩니다.</a:t>
             </a:r>
           </a:p>
         </p:txBody>
@@ -1614,23 +1625,53 @@
           <a:lstStyle/>
           <a:p>
             <a:r>
-              <a:t>말할 것: 세 가지 질문으로 시작했다. 특히 두 번째 질문(매체 비교)은 강사 피드백에서 나온 요구였다.</a:t>
-            </a:r>
-          </a:p>
-          <a:p>
-            <a:endParaRPr/>
-          </a:p>
-          <a:p>
-            <a:r>
-              <a:t>마지막 줄이 이 발표의 예고편이다. 여기서 한 박자 쉬고 다음 장으로 넘어가면 좋다.</a:t>
-            </a:r>
-          </a:p>
-          <a:p>
-            <a:endParaRPr/>
-          </a:p>
-          <a:p>
-            <a:r>
-              <a:t>질문 대비: '왜 이 주제냐'고 물으면, 등급분류 데이터는 공개돼 있는데 매체를 가로지르는 비교가 없었고, 두 기관이 항목 이름을 비슷하게 쓰고 있어 비교 가능성이 있어 보였다고 답한다.</a:t>
+              <a:t>[대본]</a:t>
+            </a:r>
+          </a:p>
+          <a:p>
+            <a:r>
+              <a:t>게임물은 게임물관리위원회가, 영상물은 영상물등급위원회가 등급을 매기고 그 결과를 공개합니다.</a:t>
+            </a:r>
+          </a:p>
+          <a:p>
+            <a:r>
+              <a:t>두 자료 모두 공개돼 있지만, 한 표에 놓고 비교한 분석은 찾기 어려웠습니다.</a:t>
+            </a:r>
+          </a:p>
+          <a:p>
+            <a:r>
+              <a:t>그래서 세 가지 질문을 세웠습니다. 등급은 무엇을 근거로 결정되는가, 매체에 따라 판정이 달라지는가,</a:t>
+            </a:r>
+          </a:p>
+          <a:p>
+            <a:r>
+              <a:t>그리고 공개된 데이터로 게임물 전체를 말할 수 있는가입니다.</a:t>
+            </a:r>
+          </a:p>
+          <a:p>
+            <a:r>
+              <a:t>통상 게임물 규제의 사유로는 폭력성과 선정성이 언급되는데, 분석 결과는 달랐습니다.</a:t>
+            </a:r>
+          </a:p>
+          <a:p/>
+          <a:p>
+            <a:r>
+              <a:t>[예상 질문]</a:t>
+            </a:r>
+          </a:p>
+          <a:p>
+            <a:r>
+              <a:t>· 왜 이 주제인가 → 두 기관이 내용정보 항목의 이름을 상당 부분 같게 쓰고 있어 비교 가능성이 있었고,</a:t>
+            </a:r>
+          </a:p>
+          <a:p>
+            <a:r>
+              <a:t>  실제로 비교한 선행 자료가 없었습니다.</a:t>
+            </a:r>
+          </a:p>
+          <a:p>
+            <a:r>
+              <a:t>· 두 번째 질문은 강사님 피드백에서 나온 요구사항이기도 합니다.</a:t>
             </a:r>
           </a:p>
         </p:txBody>
@@ -1700,23 +1741,63 @@
           <a:lstStyle/>
           <a:p>
             <a:r>
-              <a:t>말할 것: 표본이 아니라 전량이다. 기관이 알려주는 총 건수와 정확히 맞는 것을 확인했다.</a:t>
-            </a:r>
-          </a:p>
-          <a:p>
-            <a:endParaRPr/>
-          </a:p>
-          <a:p>
-            <a:r>
-              <a:t>자체등급분류 76,409건은 이 프로젝트에서 수집한 것이 아니라 다른 일을 하다 확보해 둔 파일이고, 약 7주치가 전부여서 추세 분석에는 쓰지 않고 규모 비교에만 썼다.</a:t>
-            </a:r>
-          </a:p>
-          <a:p>
-            <a:endParaRPr/>
-          </a:p>
-          <a:p>
-            <a:r>
-              <a:t>질문 대비: '왜 집에서 수집했나' → 사무실 회선에서 해당 기관 서버로 접속이 되지 않았다. 인증키 문제가 아니라 회선 문제였고, 집에서는 정상 수집되었다.</a:t>
+              <a:t>[대본]</a:t>
+            </a:r>
+          </a:p>
+          <a:p>
+            <a:r>
+              <a:t>데이터는 표본이 아니라 전량입니다. 영상물 134,464건, 게임물 29,417건이고, 두 매체 모두</a:t>
+            </a:r>
+          </a:p>
+          <a:p>
+            <a:r>
+              <a:t>기관이 제공하는 총 건수와 수집 건수가 정확히 일치합니다.</a:t>
+            </a:r>
+          </a:p>
+          <a:p>
+            <a:r>
+              <a:t>세 번째 줄의 자체등급분류 76,409건은 이 프로젝트에서 수집한 것이 아니라 별도 업무에서 확보한 파일이고,</a:t>
+            </a:r>
+          </a:p>
+          <a:p>
+            <a:r>
+              <a:t>약 7주치가 전부입니다. 그래서 추세 분석에는 쓰지 않고 규모 비교에만 사용했습니다.</a:t>
+            </a:r>
+          </a:p>
+          <a:p>
+            <a:r>
+              <a:t>수집 과정에서 두 번 막혔습니다. 영상물은 9만 9천 건 지점부터 조회가 거부돼, 페이지 단위가 아니라</a:t>
+            </a:r>
+          </a:p>
+          <a:p>
+            <a:r>
+              <a:t>기간 단위로 나눠 요청하는 방식으로 바꿔 전량을 받았습니다.</a:t>
+            </a:r>
+          </a:p>
+          <a:p>
+            <a:r>
+              <a:t>게임물은 사무실 회선에서 기관 서버에 접속되지 않아 자택에서 수집했고, 순차 호출과 요청 상한 등</a:t>
+            </a:r>
+          </a:p>
+          <a:p>
+            <a:r>
+              <a:t>안전장치를 걸고 월 단위로 나눠 받았습니다.</a:t>
+            </a:r>
+          </a:p>
+          <a:p/>
+          <a:p>
+            <a:r>
+              <a:t>[예상 질문]</a:t>
+            </a:r>
+          </a:p>
+          <a:p>
+            <a:r>
+              <a:t>· 왜 집에서 수집했나 → 인증키 문제가 아니라 회선 문제였습니다. 다른 회선에서는 정상 수집되었습니다.</a:t>
+            </a:r>
+          </a:p>
+          <a:p>
+            <a:r>
+              <a:t>· 수집이 정확한지 → 응답에 들어 있는 총 건수 값과 실제 수집 건수를 대조해 확인했습니다.</a:t>
             </a:r>
           </a:p>
         </p:txBody>
@@ -1786,31 +1867,63 @@
           <a:lstStyle/>
           <a:p>
             <a:r>
-              <a:t>이 장이 분석의 전제다. 천천히 설명한다.</a:t>
-            </a:r>
-          </a:p>
-          <a:p>
-            <a:endParaRPr/>
-          </a:p>
-          <a:p>
-            <a:r>
-              <a:t>말할 것: 두 기관이 내용정보를 주는 방식이 아예 다르다. 영상물은 항목마다 점수가 있고, 게임물은 해당하는 항목 이름만 나열한다. 그래서 그대로는 비교가 안 된다.</a:t>
-            </a:r>
-          </a:p>
-          <a:p>
-            <a:endParaRPr/>
-          </a:p>
-          <a:p>
-            <a:r>
-              <a:t>핵심은 '이름이 같은 4개만 합쳤다'는 것. 대사와 언어는 이름이 비슷하지만 재는 대상이 달라서 합치지 않았다. 이건 강사 피드백에서 지적받은 부분이기도 하다.</a:t>
-            </a:r>
-          </a:p>
-          <a:p>
-            <a:endParaRPr/>
-          </a:p>
-          <a:p>
-            <a:r>
-              <a:t>질문 대비: '왜 3단계에서 잘랐나' → 4단계로 자르면 영상물은 4단계가 곧 청소년관람불가라 정의상 100%가 나와 비교가 성립하지 않는다. 3단계라는 선택 자체에 근거가 있는 것은 아니며, 이 한계는 뒤에서 다시 말한다.</a:t>
+              <a:t>[대본]</a:t>
+            </a:r>
+          </a:p>
+          <a:p>
+            <a:r>
+              <a:t>이 장이 분석의 전제입니다. 두 기관은 내용정보를 주는 방식이 다릅니다.</a:t>
+            </a:r>
+          </a:p>
+          <a:p>
+            <a:r>
+              <a:t>영상물은 항목마다 1단계에서 5단계까지 수준을 주고, 게임물은 수준 없이 해당하는 항목의 이름만 줍니다.</a:t>
+            </a:r>
+          </a:p>
+          <a:p>
+            <a:r>
+              <a:t>그래서 그대로는 비교가 되지 않습니다.</a:t>
+            </a:r>
+          </a:p>
+          <a:p>
+            <a:r>
+              <a:t>통합은 명칭이 완전히 같은 네 개, 선정성·폭력성·공포·약물만 했습니다.</a:t>
+            </a:r>
+          </a:p>
+          <a:p>
+            <a:r>
+              <a:t>대사와 언어처럼 비슷해 보이는 항목도 측정 대상이 달라 합치지 않았습니다. 합치면 없는 값을 만들게 됩니다.</a:t>
+            </a:r>
+          </a:p>
+          <a:p>
+            <a:r>
+              <a:t>영상물의 5단계는 3단계 이상을 보유로 간주해 게임물 체계에 맞췄고, 원래 단계값도 함께 보관했습니다.</a:t>
+            </a:r>
+          </a:p>
+          <a:p>
+            <a:r>
+              <a:t>이렇게 해서 비교에 쓸 수 있는 건이 154,328건입니다.</a:t>
+            </a:r>
+          </a:p>
+          <a:p/>
+          <a:p>
+            <a:r>
+              <a:t>[예상 질문]</a:t>
+            </a:r>
+          </a:p>
+          <a:p>
+            <a:r>
+              <a:t>· 왜 3단계에서 잘랐나 → 4단계로 자르면 영상물은 4단계가 곧 청소년관람불가여서 정의상 100%가 나옵니다.</a:t>
+            </a:r>
+          </a:p>
+          <a:p>
+            <a:r>
+              <a:t>  비교가 아니라 정의를 다시 보는 셈이 됩니다. 다만 3단계라는 기준 자체에 근거가 있는 것은 아니고,</a:t>
+            </a:r>
+          </a:p>
+          <a:p>
+            <a:r>
+              <a:t>  이 한계는 12쪽에서 다시 말씀드립니다.</a:t>
             </a:r>
           </a:p>
         </p:txBody>
@@ -1880,23 +1993,58 @@
           <a:lstStyle/>
           <a:p>
             <a:r>
-              <a:t>발표의 뼈대. 이 장에서 세 문장을 또박또박 말하고, 뒤 장에서 하나씩 근거를 댄다.</a:t>
-            </a:r>
-          </a:p>
-          <a:p>
-            <a:endParaRPr/>
-          </a:p>
-          <a:p>
-            <a:r>
-              <a:t>세 결론이 이어지는 순서가 중요하다. 1번은 '게임 규제의 실체가 무엇이냐', 2번은 '그런데 그 이야기가 게임물 전체에 해당하느냐', 3번은 '영상물은 아예 구조가 다르다' 로 이어진다.</a:t>
-            </a:r>
-          </a:p>
-          <a:p>
-            <a:endParaRPr/>
-          </a:p>
-          <a:p>
-            <a:r>
-              <a:t>청중이 한 문장만 기억한다면 결론 1이다.</a:t>
+              <a:t>[대본]</a:t>
+            </a:r>
+          </a:p>
+          <a:p>
+            <a:r>
+              <a:t>결론은 세 가지입니다.</a:t>
+            </a:r>
+          </a:p>
+          <a:p>
+            <a:r>
+              <a:t>첫째, 게임물의 청소년이용불가를 결정하는 요인은 폭력성이나 선정성이 아니라 사행성입니다.</a:t>
+            </a:r>
+          </a:p>
+          <a:p>
+            <a:r>
+              <a:t>청소년이용불가 게임물의 76.3%가 사행성을 갖고 있습니다.</a:t>
+            </a:r>
+          </a:p>
+          <a:p>
+            <a:r>
+              <a:t>둘째, 그런데 위원회 심의 대상은 게임물 등급분류 전체의 0.27%에 불과합니다.</a:t>
+            </a:r>
+          </a:p>
+          <a:p>
+            <a:r>
+              <a:t>셋째, 영상물의 등급은 내용정보 일곱 개 항목의 최고값과 사실상 같습니다. 일치율이 99.93%입니다.</a:t>
+            </a:r>
+          </a:p>
+          <a:p>
+            <a:r>
+              <a:t>지금부터 하나씩 근거를 보여 드리겠습니다.</a:t>
+            </a:r>
+          </a:p>
+          <a:p/>
+          <a:p>
+            <a:r>
+              <a:t>[보충]</a:t>
+            </a:r>
+          </a:p>
+          <a:p>
+            <a:r>
+              <a:t>· 세 결론은 순서대로 이어집니다. 1번이 '게임 규제의 실질이 무엇인가', 2번이 '그 이야기가 게임물</a:t>
+            </a:r>
+          </a:p>
+          <a:p>
+            <a:r>
+              <a:t>  전체에 해당하는가', 3번이 '영상물은 구조 자체가 다르다'입니다.</a:t>
+            </a:r>
+          </a:p>
+          <a:p>
+            <a:r>
+              <a:t>· 하나만 기억하신다면 결론 1입니다.</a:t>
             </a:r>
           </a:p>
         </p:txBody>
@@ -1966,23 +2114,48 @@
           <a:lstStyle/>
           <a:p>
             <a:r>
-              <a:t>말할 것: 청소년이용불가를 받은 게임물이 실제로 어떤 항목을 갖고 있었는지 센 것이다. 약 4분의 3이 사행성을 갖고 있다.</a:t>
-            </a:r>
-          </a:p>
-          <a:p>
-            <a:endParaRPr/>
-          </a:p>
-          <a:p>
-            <a:r>
-              <a:t>아래 줄이 더 중요하다. 사행성이 붙으면 95.3%가 청소년이용불가이고, 없으면 8.9%다. 다른 어떤 항목에서도 이만한 차이가 나지 않는다.</a:t>
-            </a:r>
-          </a:p>
-          <a:p>
-            <a:endParaRPr/>
-          </a:p>
-          <a:p>
-            <a:r>
-              <a:t>용어 설명이 필요하면: 사행성은 도박성, 즉 베팅 요소를 말한다. 웹보드 게임(고스톱·포커류)이 여기 해당한다.</a:t>
+              <a:t>[대본]</a:t>
+            </a:r>
+          </a:p>
+          <a:p>
+            <a:r>
+              <a:t>청소년이용불가를 받은 게임물 8,223건이 실제로 어떤 내용정보를 갖고 있었는지 센 결과입니다.</a:t>
+            </a:r>
+          </a:p>
+          <a:p>
+            <a:r>
+              <a:t>사행성이 76.3%로 가장 많고, 폭력성 18.3%, 선정성 17.0%입니다. 한 건이 여러 항목을 가질 수 있어</a:t>
+            </a:r>
+          </a:p>
+          <a:p>
+            <a:r>
+              <a:t>합계는 100%를 넘습니다.</a:t>
+            </a:r>
+          </a:p>
+          <a:p>
+            <a:r>
+              <a:t>아래 줄이 더 중요합니다. 사행성이 부여된 게임물은 95.3%가 청소년이용불가이고, 없으면 8.9%입니다.</a:t>
+            </a:r>
+          </a:p>
+          <a:p>
+            <a:r>
+              <a:t>다른 어떤 항목에서도 이만한 차이는 나오지 않습니다.</a:t>
+            </a:r>
+          </a:p>
+          <a:p/>
+          <a:p>
+            <a:r>
+              <a:t>[보충]</a:t>
+            </a:r>
+          </a:p>
+          <a:p>
+            <a:r>
+              <a:t>· 사행성은 베팅 요소를 말하며, 웹보드 게임인 고스톱·포커류가 여기 해당합니다.</a:t>
+            </a:r>
+          </a:p>
+          <a:p>
+            <a:r>
+              <a:t>· 8,223건은 등급취소 건을 제외한 수치입니다.</a:t>
             </a:r>
           </a:p>
         </p:txBody>
@@ -2052,23 +2225,58 @@
           <a:lstStyle/>
           <a:p>
             <a:r>
-              <a:t>말할 것: 앞 장은 '청불 게임이 무엇을 갖고 있었나'였고, 이 장은 반대 방향이다. '그 항목 하나만 가진 게임은 어떤 등급을 받았나'를 본 것이다.</a:t>
-            </a:r>
-          </a:p>
-          <a:p>
-            <a:endParaRPr/>
-          </a:p>
-          <a:p>
-            <a:r>
-              <a:t>사행성만 붙으면 97.1%가 청소년이용불가인데, 폭력성만 붙은 게임은 11.1%뿐이다. 열 개 중 아홉은 청소년도 이용할 수 있다는 뜻이다.</a:t>
-            </a:r>
-          </a:p>
-          <a:p>
-            <a:endParaRPr/>
-          </a:p>
-          <a:p>
-            <a:r>
-              <a:t>아래 문장은 데이터 품질 이야기다. 내용정보 칸이 빈 게 절반 가까이 되는데, 그 건들의 청불률이 0.06%라서 '기록을 안 한 것'이 아니라 '해당 요소가 없는 것'으로 판단했다.</a:t>
+              <a:t>[대본]</a:t>
+            </a:r>
+          </a:p>
+          <a:p>
+            <a:r>
+              <a:t>앞 장이 '청불 게임물이 무엇을 갖고 있었나'였다면, 이 장은 반대 방향입니다.</a:t>
+            </a:r>
+          </a:p>
+          <a:p>
+            <a:r>
+              <a:t>그 항목 하나만 가진 게임물이 어떤 등급을 받았는지 본 것입니다.</a:t>
+            </a:r>
+          </a:p>
+          <a:p>
+            <a:r>
+              <a:t>사행성만 있는 경우 97.1%가 청소년이용불가인데, 폭력성만 있는 경우는 11.1%입니다.</a:t>
+            </a:r>
+          </a:p>
+          <a:p>
+            <a:r>
+              <a:t>같은 '항목 하나'인데 결과가 전혀 다릅니다.</a:t>
+            </a:r>
+          </a:p>
+          <a:p>
+            <a:r>
+              <a:t>즉 게임물은 수준이 올라가서 등급이 올라가는 구조가 아니라, 어떤 항목이 붙었는지로 갈리는 구조입니다.</a:t>
+            </a:r>
+          </a:p>
+          <a:p>
+            <a:r>
+              <a:t>참고로 내용정보가 비어 있는 13,993건은 청소년이용불가 비율이 0.06%였습니다.</a:t>
+            </a:r>
+          </a:p>
+          <a:p>
+            <a:r>
+              <a:t>기록을 빠뜨린 것이 아니라 실제로 해당 요소가 없는 것으로 판단했습니다.</a:t>
+            </a:r>
+          </a:p>
+          <a:p/>
+          <a:p>
+            <a:r>
+              <a:t>[예상 질문]</a:t>
+            </a:r>
+          </a:p>
+          <a:p>
+            <a:r>
+              <a:t>· 단독 보유 건이 적지 않나 → 사행성 단독 6,093건, 폭력성 단독 4,683건, 선정성 단독 906건으로</a:t>
+            </a:r>
+          </a:p>
+          <a:p>
+            <a:r>
+              <a:t>  비교에 충분한 규모입니다.</a:t>
             </a:r>
           </a:p>
         </p:txBody>
@@ -2138,31 +2346,58 @@
           <a:lstStyle/>
           <a:p>
             <a:r>
-              <a:t>말할 것: 결론 1은 위원회가 직접 심의한 게임물 이야기다. 그런데 게임물 등급분류는 두 경로로 이뤄진다. 위원회 심의와, 구글·애플 같은 사업자의 자체등급분류다.</a:t>
-            </a:r>
-          </a:p>
-          <a:p>
-            <a:endParaRPr/>
-          </a:p>
-          <a:p>
-            <a:r>
-              <a:t>같은 기간으로 맞춰 보니 위원회 207건 대 자체등급분류 76,409건, 약 369배 차이였다. 공개 API 로 볼 수 있는 건 전체의 0.27%뿐이다.</a:t>
-            </a:r>
-          </a:p>
-          <a:p>
-            <a:endParaRPr/>
-          </a:p>
-          <a:p>
-            <a:r>
-              <a:t>중요: 이 차이를 '사업자가 느슨하다'로 읽으면 안 된다. 자체등급분류에는 사행성 게임이 거의 없다(0.05% 대 23.2%). 애초에 들어오는 게임이 다르다.</a:t>
-            </a:r>
-          </a:p>
-          <a:p>
-            <a:endParaRPr/>
-          </a:p>
-          <a:p>
-            <a:r>
-              <a:t>질문 대비: '그럼 결론 1은 의미가 없나' → 아니다. 다만 '위원회가 직접 심의한 게임물'이라는 조건을 반드시 붙여야 한다는 뜻이고, 그 조건을 대시보드와 리포트에 모두 적어 두었다.</a:t>
+              <a:t>[대본]</a:t>
+            </a:r>
+          </a:p>
+          <a:p>
+            <a:r>
+              <a:t>여기서 조건을 하나 붙여야 합니다. 앞의 결론은 위원회가 직접 심의한 게임물 이야기입니다.</a:t>
+            </a:r>
+          </a:p>
+          <a:p>
+            <a:r>
+              <a:t>게임물 등급분류는 두 경로로 이뤄집니다. 위원회 심의와, 구글·애플 같은 사업자의 자체등급분류입니다.</a:t>
+            </a:r>
+          </a:p>
+          <a:p>
+            <a:r>
+              <a:t>같은 기간으로 맞춰 보면 위원회 207건, 자체등급분류 76,409건으로 약 369배 차이입니다.</a:t>
+            </a:r>
+          </a:p>
+          <a:p>
+            <a:r>
+              <a:t>공개 API로 볼 수 있는 범위는 전체의 0.27%뿐입니다.</a:t>
+            </a:r>
+          </a:p>
+          <a:p>
+            <a:r>
+              <a:t>19년간의 위원회 분류 건수보다 7주간의 자체등급분류 건수가 더 많습니다.</a:t>
+            </a:r>
+          </a:p>
+          <a:p>
+            <a:r>
+              <a:t>다만 이 차이를 심의가 느슨하다는 뜻으로 읽으면 안 됩니다. 자체등급분류에는 사행성 게임물이</a:t>
+            </a:r>
+          </a:p>
+          <a:p>
+            <a:r>
+              <a:t>사실상 없습니다. 보유율이 0.05% 대 23.2%로, 애초에 들어오는 게임물이 다릅니다.</a:t>
+            </a:r>
+          </a:p>
+          <a:p/>
+          <a:p>
+            <a:r>
+              <a:t>[예상 질문]</a:t>
+            </a:r>
+          </a:p>
+          <a:p>
+            <a:r>
+              <a:t>· 그럼 결론 1은 의미가 없나 → 아닙니다. '위원회가 직접 심의한 게임물'이라는 조건을 반드시 붙여야</a:t>
+            </a:r>
+          </a:p>
+          <a:p>
+            <a:r>
+              <a:t>  한다는 뜻이고, 그 조건을 대시보드와 리포트에 모두 적어 두었습니다.</a:t>
             </a:r>
           </a:p>
         </p:txBody>

--- a/docs/[BI 분석가 과정] 발표자료_260914_최은혜.pptx
+++ b/docs/[BI 분석가 과정] 발표자료_260914_최은혜.pptx
@@ -19,9 +19,11 @@
     <p:sldId id="264" r:id="rId10"/>
     <p:sldId id="265" r:id="rId11"/>
     <p:sldId id="266" r:id="rId12"/>
+    <p:sldId id="274" r:id="rId25"/>
     <p:sldId id="267" r:id="rId13"/>
     <p:sldId id="268" r:id="rId14"/>
     <p:sldId id="269" r:id="rId15"/>
+    <p:sldId id="275" r:id="rId26"/>
     <p:sldId id="270" r:id="rId16"/>
     <p:sldId id="271" r:id="rId17"/>
     <p:sldId id="272" r:id="rId18"/>
@@ -591,7 +593,7 @@
           </a:p>
           <a:p>
             <a:r>
-              <a:t>· 상향을 모형으로 설명해 봤나 → 내용정보와 종별·연도로 상향 여부를 예측하면 AUC 0.825가 나왔습니다.</a:t>
+              <a:t>· 상향을 모형으로 설명해 봤나 → 내용정보와 종별·연도로 상향 여부를 예측하면 AUC 0.818, 설명력 0.170이 나왔습니다.</a:t>
             </a:r>
           </a:p>
           <a:p>
@@ -1484,6 +1486,159 @@
 </p:notes>
 </file>
 
+<file path=ppt/notesSlides/notesSlide19.xml><?xml version="1.0" encoding="utf-8"?>
+<p:notes xmlns:a="http://schemas.openxmlformats.org/drawingml/2006/main" xmlns:p="http://schemas.openxmlformats.org/presentationml/2006/main" xmlns:r="http://schemas.openxmlformats.org/officeDocument/2006/relationships">
+  <p:cSld>
+    <p:spTree>
+      <p:nvGrpSpPr>
+        <p:cNvPr id="1" name=""/>
+        <p:cNvGrpSpPr/>
+        <p:nvPr/>
+      </p:nvGrpSpPr>
+      <p:grpSpPr>
+        <a:xfrm>
+          <a:off x="0" y="0"/>
+          <a:ext cx="0" cy="0"/>
+          <a:chOff x="0" y="0"/>
+          <a:chExt cx="0" cy="0"/>
+        </a:xfrm>
+      </p:grpSpPr>
+      <p:sp>
+        <p:nvSpPr>
+          <p:cNvPr id="3" name="Notes Placeholder 2"/>
+          <p:cNvSpPr>
+            <a:spLocks noGrp="1"/>
+          </p:cNvSpPr>
+          <p:nvPr>
+            <p:ph type="body" sz="quarter" idx="3"/>
+          </p:nvPr>
+        </p:nvSpPr>
+        <p:spPr/>
+        <p:txBody>
+          <a:bodyPr/>
+          <a:lstStyle/>
+          <a:p>
+            <a:r>
+              <a:t>[대본]</a:t>
+            </a:r>
+          </a:p>
+          <a:p>
+            <a:r>
+              <a:t>분석 방식을 정리하고 넘어가겠습니다.</a:t>
+            </a:r>
+          </a:p>
+          <a:p>
+            <a:r>
+              <a:t>이 프로젝트는 등급을 예측하는 모형을 만드는 것이 목적이 아닙니다. 앞에서 보신 대로 등급이 이미</a:t>
+            </a:r>
+          </a:p>
+          <a:p>
+            <a:r>
+              <a:t>규칙으로 정해지는 구조여서 예측 모형이 성립하지 않기 때문입니다.</a:t>
+            </a:r>
+          </a:p>
+          <a:p>
+            <a:r>
+              <a:t>그래서 교차표와 조건을 맞춘 비교를 주로 썼고, 모형은 두 번만 사용했습니다.</a:t>
+            </a:r>
+          </a:p>
+          <a:p>
+            <a:r>
+              <a:t>한 번은 검증용입니다. 내용정보로 등급을 예측했더니 AUC가 1.000이 나왔고, 이것을 성능이 아니라</a:t>
+            </a:r>
+          </a:p>
+          <a:p>
+            <a:r>
+              <a:t>항등식의 근거로 해석하고 결과는 폐기했습니다.</a:t>
+            </a:r>
+          </a:p>
+          <a:p>
+            <a:r>
+              <a:t>다른 하나는 상향 조정 여부를 설명하는 분류 모형입니다. 상향인지 아닌지를 맞히는 이진 분류라</a:t>
+            </a:r>
+          </a:p>
+          <a:p>
+            <a:r>
+              <a:t>로지스틱 회귀를 썼고, 5겹 교차검증으로 AUC 0.818, 설명력 0.170이 나왔습니다.</a:t>
+            </a:r>
+          </a:p>
+          <a:p>
+            <a:r>
+              <a:t>매체 비교는 모형 없이, 조건이 완전히 같은 건끼리만 비교하는 방식으로 했습니다.</a:t>
+            </a:r>
+          </a:p>
+          <a:p/>
+          <a:p>
+            <a:r>
+              <a:t>[보충]</a:t>
+            </a:r>
+          </a:p>
+          <a:p>
+            <a:r>
+              <a:t>· AUC는 0.5가 아무 정보 없이 찍는 수준이고 1에 가까울수록 잘 맞힙니다. 0.818은 일정한 경향이</a:t>
+            </a:r>
+          </a:p>
+          <a:p>
+            <a:r>
+              <a:t>  있다는 뜻이고, 설명력 0.170은 설명되지 않는 부분이 더 크다는 뜻입니다. 개별 판단의 여지가 넓습니다.</a:t>
+            </a:r>
+          </a:p>
+          <a:p>
+            <a:r>
+              <a:t>· 로지스틱 회귀를 쓴 이유는 답이 '상향/비상향' 두 가지이고, 어떤 항목이 얼마나 영향을 주는지를</a:t>
+            </a:r>
+          </a:p>
+          <a:p>
+            <a:r>
+              <a:t>  숫자로 확인해야 했기 때문입니다.</a:t>
+            </a:r>
+          </a:p>
+          <a:p>
+            <a:r>
+              <a:t>· 5겹 교차검증은 데이터를 다섯 조각으로 나눠 네 조각으로 학습하고 한 조각으로 채점하기를</a:t>
+            </a:r>
+          </a:p>
+          <a:p>
+            <a:r>
+              <a:t>  다섯 번 반복하는 방식입니다. 한 번만 나눠서 생기는 우연을 줄입니다.</a:t>
+            </a:r>
+          </a:p>
+          <a:p/>
+          <a:p>
+            <a:r>
+              <a:t>[예상 질문]</a:t>
+            </a:r>
+          </a:p>
+          <a:p>
+            <a:r>
+              <a:t>· 왜 딥러닝이나 복잡한 모형을 쓰지 않았나 → 목적이 예측이 아니라 구조 확인이었고, 규칙이 이미</a:t>
+            </a:r>
+          </a:p>
+          <a:p>
+            <a:r>
+              <a:t>  드러난 상태라 복잡한 모형을 쓸 이유가 없었습니다.</a:t>
+            </a:r>
+          </a:p>
+          <a:p>
+            <a:r>
+              <a:t>· 표본이 부족한 구간은 어떻게 했나 → 종별 100건, 조합 50건, 신청등급 200건 미만은 화면과</a:t>
+            </a:r>
+          </a:p>
+          <a:p>
+            <a:r>
+              <a:t>  리포트에 제시하지 않았습니다.</a:t>
+            </a:r>
+          </a:p>
+        </p:txBody>
+      </p:sp>
+    </p:spTree>
+  </p:cSld>
+  <p:clrMapOvr>
+    <a:masterClrMapping/>
+  </p:clrMapOvr>
+</p:notes>
+</file>
+
 <file path=ppt/notesSlides/notesSlide2.xml><?xml version="1.0" encoding="utf-8"?>
 <p:notes xmlns:a="http://schemas.openxmlformats.org/drawingml/2006/main" xmlns:r="http://schemas.openxmlformats.org/officeDocument/2006/relationships" xmlns:p="http://schemas.openxmlformats.org/presentationml/2006/main">
   <p:cSld>
@@ -1571,6 +1726,129 @@
           </p:nvPr>
         </p:nvSpPr>
         <p:spPr/>
+      </p:sp>
+    </p:spTree>
+  </p:cSld>
+  <p:clrMapOvr>
+    <a:masterClrMapping/>
+  </p:clrMapOvr>
+</p:notes>
+</file>
+
+<file path=ppt/notesSlides/notesSlide20.xml><?xml version="1.0" encoding="utf-8"?>
+<p:notes xmlns:a="http://schemas.openxmlformats.org/drawingml/2006/main" xmlns:p="http://schemas.openxmlformats.org/presentationml/2006/main" xmlns:r="http://schemas.openxmlformats.org/officeDocument/2006/relationships">
+  <p:cSld>
+    <p:spTree>
+      <p:nvGrpSpPr>
+        <p:cNvPr id="1" name=""/>
+        <p:cNvGrpSpPr/>
+        <p:nvPr/>
+      </p:nvGrpSpPr>
+      <p:grpSpPr>
+        <a:xfrm>
+          <a:off x="0" y="0"/>
+          <a:ext cx="0" cy="0"/>
+          <a:chOff x="0" y="0"/>
+          <a:chExt cx="0" cy="0"/>
+        </a:xfrm>
+      </p:grpSpPr>
+      <p:sp>
+        <p:nvSpPr>
+          <p:cNvPr id="3" name="Notes Placeholder 2"/>
+          <p:cNvSpPr>
+            <a:spLocks noGrp="1"/>
+          </p:cNvSpPr>
+          <p:nvPr>
+            <p:ph type="body" sz="quarter" idx="3"/>
+          </p:nvPr>
+        </p:nvSpPr>
+        <p:spPr/>
+        <p:txBody>
+          <a:bodyPr/>
+          <a:lstStyle/>
+          <a:p>
+            <a:r>
+              <a:t>[대본]</a:t>
+            </a:r>
+          </a:p>
+          <a:p>
+            <a:r>
+              <a:t>산출물 가운데 대시보드를 왜 만들었는지 말씀드리겠습니다.</a:t>
+            </a:r>
+          </a:p>
+          <a:p>
+            <a:r>
+              <a:t>리포트는 제가 정해 둔 조건에서 나온 결과만 보여 줍니다. 그런데 이 분석의 결론에는 조건이 붙어</a:t>
+            </a:r>
+          </a:p>
+          <a:p>
+            <a:r>
+              <a:t>있습니다. 성인물을 뺐는지, 기간을 어디까지 봤는지, 이진화 기준을 몇 단계로 잡았는지에 따라</a:t>
+            </a:r>
+          </a:p>
+          <a:p>
+            <a:r>
+              <a:t>숫자가 달라집니다.</a:t>
+            </a:r>
+          </a:p>
+          <a:p>
+            <a:r>
+              <a:t>그래서 보는 사람이 조건을 직접 바꿔 가며 결론이 유지되는지 확인할 수 있어야 한다고 판단했습니다.</a:t>
+            </a:r>
+          </a:p>
+          <a:p>
+            <a:r>
+              <a:t>필터를 바꾸면 수치뿐 아니라 화면 위쪽의 해석 문장도 다시 계산됩니다.</a:t>
+            </a:r>
+          </a:p>
+          <a:p>
+            <a:r>
+              <a:t>한계도 화면에 넣었습니다. 이진화 기준을 4단계로 고르면 비교가 성립하지 않는다는 경고가 뜨고,</a:t>
+            </a:r>
+          </a:p>
+          <a:p>
+            <a:r>
+              <a:t>표본이 부족한 구간은 아예 표시하지 않습니다.</a:t>
+            </a:r>
+          </a:p>
+          <a:p>
+            <a:r>
+              <a:t>마지막 화면에서는 조건에 맞는 개별 건을 직접 확인하고 전건을 내려받을 수 있습니다.</a:t>
+            </a:r>
+          </a:p>
+          <a:p/>
+          <a:p>
+            <a:r>
+              <a:t>[보충]</a:t>
+            </a:r>
+          </a:p>
+          <a:p>
+            <a:r>
+              <a:t>· 리포트·대시보드·발표자료가 모두 같은 계산부를 읽으므로 서로 다른 숫자가 나올 수 없습니다.</a:t>
+            </a:r>
+          </a:p>
+          <a:p>
+            <a:r>
+              <a:t>· 다음 장에서 실제 화면을 보여 드립니다.</a:t>
+            </a:r>
+          </a:p>
+          <a:p/>
+          <a:p>
+            <a:r>
+              <a:t>[예상 질문]</a:t>
+            </a:r>
+          </a:p>
+          <a:p>
+            <a:r>
+              <a:t>· 누가 쓰는 것을 상정했나 → 등급분류 결과를 인용하려는 사람입니다. 어느 경로의 분류분인지,</a:t>
+            </a:r>
+          </a:p>
+          <a:p>
+            <a:r>
+              <a:t>  종별을 통제했는지에 따라 값이 달라지므로 그것을 직접 확인할 수 있게 만들었습니다.</a:t>
+            </a:r>
+          </a:p>
+        </p:txBody>
       </p:sp>
     </p:spTree>
   </p:cSld>
@@ -7771,6 +8049,639 @@
 </file>
 
 <file path=ppt/slides/slide12.xml><?xml version="1.0" encoding="utf-8"?>
+<p:sld xmlns:a="http://schemas.openxmlformats.org/drawingml/2006/main" xmlns:p="http://schemas.openxmlformats.org/presentationml/2006/main" xmlns:r="http://schemas.openxmlformats.org/officeDocument/2006/relationships">
+  <p:cSld>
+    <p:spTree>
+      <p:nvGrpSpPr>
+        <p:cNvPr id="1" name=""/>
+        <p:cNvGrpSpPr/>
+        <p:nvPr/>
+      </p:nvGrpSpPr>
+      <p:grpSpPr/>
+      <p:sp>
+        <p:nvSpPr>
+          <p:cNvPr id="2" name="TextBox 1"/>
+          <p:cNvSpPr txBox="1"/>
+          <p:nvPr/>
+        </p:nvSpPr>
+        <p:spPr>
+          <a:xfrm>
+            <a:off x="457200" y="310896"/>
+            <a:ext cx="5486400" cy="293350"/>
+          </a:xfrm>
+          <a:prstGeom prst="rect">
+            <a:avLst/>
+          </a:prstGeom>
+          <a:noFill/>
+        </p:spPr>
+        <p:txBody>
+          <a:bodyPr wrap="square">
+            <a:spAutoFit/>
+          </a:bodyPr>
+          <a:lstStyle/>
+          <a:p>
+            <a:pPr algn="l">
+              <a:lnSpc>
+                <a:spcPct val="125000"/>
+              </a:lnSpc>
+              <a:spcAft>
+                <a:spcPts val="600"/>
+              </a:spcAft>
+            </a:pPr>
+            <a:r>
+              <a:rPr sz="1100" b="0" dirty="0">
+                <a:solidFill>
+                  <a:srgbClr val="6B7280"/>
+                </a:solidFill>
+                <a:latin typeface="나눔고딕OTF" panose="020D0604000000000000" pitchFamily="34" charset="-127"/>
+                <a:ea typeface="나눔고딕OTF" panose="020D0604000000000000" pitchFamily="34" charset="-127"/>
+              </a:rPr>
+              <a:t>4. 결론 3 · 영상물</a:t>
+            </a:r>
+          </a:p>
+        </p:txBody>
+      </p:sp>
+      <p:sp>
+        <p:nvSpPr>
+          <p:cNvPr id="3" name="TextBox 2"/>
+          <p:cNvSpPr txBox="1"/>
+          <p:nvPr/>
+        </p:nvSpPr>
+        <p:spPr>
+          <a:xfrm>
+            <a:off x="457200" y="530352"/>
+            <a:ext cx="11247120" cy="547458"/>
+          </a:xfrm>
+          <a:prstGeom prst="rect">
+            <a:avLst/>
+          </a:prstGeom>
+          <a:noFill/>
+        </p:spPr>
+        <p:txBody>
+          <a:bodyPr wrap="square">
+            <a:spAutoFit/>
+          </a:bodyPr>
+          <a:lstStyle/>
+          <a:p>
+            <a:pPr algn="l">
+              <a:lnSpc>
+                <a:spcPct val="125000"/>
+              </a:lnSpc>
+              <a:spcAft>
+                <a:spcPts val="600"/>
+              </a:spcAft>
+            </a:pPr>
+            <a:r>
+              <a:rPr sz="2600" b="1">
+                <a:solidFill>
+                  <a:srgbClr val="1F3864"/>
+                </a:solidFill>
+                <a:latin typeface="경기천년제목 Bold" panose="02020803020101020101" pitchFamily="18" charset="-127"/>
+                <a:ea typeface="경기천년제목 Bold" panose="02020803020101020101" pitchFamily="18" charset="-127"/>
+              </a:rPr>
+              <a:t>분석 방식과 성능 지표</a:t>
+            </a:r>
+          </a:p>
+        </p:txBody>
+      </p:sp>
+      <p:sp>
+        <p:nvSpPr>
+          <p:cNvPr id="4" name="Rectangle 3"/>
+          <p:cNvSpPr/>
+          <p:nvPr/>
+        </p:nvSpPr>
+        <p:spPr>
+          <a:xfrm>
+            <a:off x="457200" y="1024128"/>
+            <a:ext cx="11274552" cy="32004"/>
+          </a:xfrm>
+          <a:prstGeom prst="rect">
+            <a:avLst/>
+          </a:prstGeom>
+          <a:solidFill>
+            <a:srgbClr val="1F3864"/>
+          </a:solidFill>
+          <a:ln>
+            <a:noFill/>
+          </a:ln>
+          <a:effectLst/>
+        </p:spPr>
+        <p:style>
+          <a:lnRef idx="1">
+            <a:schemeClr val="accent1"/>
+          </a:lnRef>
+          <a:fillRef idx="3">
+            <a:schemeClr val="accent1"/>
+          </a:fillRef>
+          <a:effectRef idx="2">
+            <a:schemeClr val="accent1"/>
+          </a:effectRef>
+          <a:fontRef idx="minor">
+            <a:schemeClr val="lt1"/>
+          </a:fontRef>
+        </p:style>
+        <p:txBody>
+          <a:bodyPr rtlCol="0" anchor="ctr"/>
+          <a:lstStyle/>
+          <a:p>
+            <a:pPr algn="ctr"/>
+            <a:endParaRPr>
+              <a:latin typeface="경기천년제목 Bold" panose="02020803020101020101" pitchFamily="18" charset="-127"/>
+              <a:ea typeface="경기천년제목 Bold" panose="02020803020101020101" pitchFamily="18" charset="-127"/>
+            </a:endParaRPr>
+          </a:p>
+        </p:txBody>
+      </p:sp>
+      <p:graphicFrame>
+        <p:nvGraphicFramePr>
+          <p:cNvPr id="5" name="Table 4"/>
+          <p:cNvGraphicFramePr>
+            <a:graphicFrameLocks noGrp="1"/>
+          </p:cNvGraphicFramePr>
+          <p:nvPr>
+            <p:extLst>
+              <p:ext uri="{D42A27DB-BD31-4B8C-83A1-F6EECF244321}">
+                <p14:modId xmlns:p14="http://schemas.microsoft.com/office/powerpoint/2010/main" val="745327631"/>
+              </p:ext>
+            </p:extLst>
+          </p:nvPr>
+        </p:nvGraphicFramePr>
+        <p:xfrm>
+          <a:off x="548640" y="1417320"/>
+          <a:ext cx="11064239" cy="3218688"/>
+        </p:xfrm>
+        <a:graphic>
+          <a:graphicData uri="http://schemas.openxmlformats.org/drawingml/2006/table">
+            <a:tbl>
+              <a:tblPr>
+                <a:tableStyleId>{5C22544A-7EE6-4342-B048-85BDC9FD1C3A}</a:tableStyleId>
+              </a:tblPr>
+              <a:tblGrid>
+                <a:gridCol w="2194560">
+                  <a:extLst>
+                    <a:ext uri="{9D8B030D-6E8A-4147-A177-3AD203B41FA5}">
+                      <a16:colId xmlns:a16="http://schemas.microsoft.com/office/drawing/2014/main" val="20000"/>
+                    </a:ext>
+                  </a:extLst>
+                </a:gridCol>
+                <a:gridCol w="8869679">
+                  <a:extLst>
+                    <a:ext uri="{9D8B030D-6E8A-4147-A177-3AD203B41FA5}">
+                      <a16:colId xmlns:a16="http://schemas.microsoft.com/office/drawing/2014/main" val="20001"/>
+                    </a:ext>
+                  </a:extLst>
+                </a:gridCol>
+              </a:tblGrid>
+              <a:tr h="384048">
+                <a:tc>
+                  <a:txBody>
+                    <a:bodyPr/>
+                    <a:lstStyle/>
+                    <a:p>
+                      <a:pPr algn="l">
+                        <a:lnSpc>
+                          <a:spcPct val="120000"/>
+                        </a:lnSpc>
+                      </a:pPr>
+                      <a:r>
+                        <a:rPr sz="1250" b="1">
+                          <a:solidFill>
+                            <a:srgbClr val="1F3864"/>
+                          </a:solidFill>
+                          <a:latin typeface="나눔고딕OTF" panose="020D0604000000000000" pitchFamily="34" charset="-127"/>
+                          <a:ea typeface="나눔고딕OTF" panose="020D0604000000000000" pitchFamily="34" charset="-127"/>
+                        </a:rPr>
+                        <a:t>분석 단계</a:t>
+                      </a:r>
+                    </a:p>
+                  </a:txBody>
+                  <a:tcPr>
+                    <a:solidFill>
+                      <a:srgbClr val="EEF1F6"/>
+                    </a:solidFill>
+                  </a:tcPr>
+                </a:tc>
+                <a:tc>
+                  <a:txBody>
+                    <a:bodyPr/>
+                    <a:lstStyle/>
+                    <a:p>
+                      <a:pPr algn="l">
+                        <a:lnSpc>
+                          <a:spcPct val="120000"/>
+                        </a:lnSpc>
+                      </a:pPr>
+                      <a:r>
+                        <a:rPr sz="1250" b="1">
+                          <a:solidFill>
+                            <a:srgbClr val="1F3864"/>
+                          </a:solidFill>
+                          <a:latin typeface="나눔고딕OTF" panose="020D0604000000000000" pitchFamily="34" charset="-127"/>
+                          <a:ea typeface="나눔고딕OTF" panose="020D0604000000000000" pitchFamily="34" charset="-127"/>
+                        </a:rPr>
+                        <a:t>방식과 결과</a:t>
+                      </a:r>
+                    </a:p>
+                  </a:txBody>
+                  <a:tcPr>
+                    <a:solidFill>
+                      <a:srgbClr val="EEF1F6"/>
+                    </a:solidFill>
+                  </a:tcPr>
+                </a:tc>
+                <a:extLst>
+                  <a:ext uri="{0D108BD9-81ED-4DB2-BD59-A6C34878D82A}">
+                    <a16:rowId xmlns:a16="http://schemas.microsoft.com/office/drawing/2014/main" val="10000"/>
+                  </a:ext>
+                </a:extLst>
+              </a:tr>
+              <a:tr h="566928">
+                <a:tc>
+                  <a:txBody>
+                    <a:bodyPr/>
+                    <a:lstStyle/>
+                    <a:p>
+                      <a:pPr algn="l">
+                        <a:lnSpc>
+                          <a:spcPct val="120000"/>
+                        </a:lnSpc>
+                      </a:pPr>
+                      <a:r>
+                        <a:rPr sz="1250" b="0">
+                          <a:solidFill>
+                            <a:srgbClr val="1F2328"/>
+                          </a:solidFill>
+                          <a:latin typeface="나눔고딕OTF" panose="020D0604000000000000" pitchFamily="34" charset="-127"/>
+                          <a:ea typeface="나눔고딕OTF" panose="020D0604000000000000" pitchFamily="34" charset="-127"/>
+                        </a:rPr>
+                        <a:t>방법 선택 기준</a:t>
+                      </a:r>
+                    </a:p>
+                  </a:txBody>
+                  <a:tcPr>
+                    <a:solidFill>
+                      <a:srgbClr val="FFFFFF"/>
+                    </a:solidFill>
+                  </a:tcPr>
+                </a:tc>
+                <a:tc>
+                  <a:txBody>
+                    <a:bodyPr/>
+                    <a:lstStyle/>
+                    <a:p>
+                      <a:pPr algn="l">
+                        <a:lnSpc>
+                          <a:spcPct val="120000"/>
+                        </a:lnSpc>
+                      </a:pPr>
+                      <a:r>
+                        <a:rPr sz="1250" b="0">
+                          <a:solidFill>
+                            <a:srgbClr val="1F2328"/>
+                          </a:solidFill>
+                          <a:latin typeface="나눔고딕OTF" panose="020D0604000000000000" pitchFamily="34" charset="-127"/>
+                          <a:ea typeface="나눔고딕OTF" panose="020D0604000000000000" pitchFamily="34" charset="-127"/>
+                        </a:rPr>
+                        <a:t>등급이 규칙으로 결정되는 구조여서 예측 모형은 성립하지 않음. 구조를 드러내는 교차표와 조건 통제 비교를 주로 사용</a:t>
+                      </a:r>
+                    </a:p>
+                  </a:txBody>
+                  <a:tcPr>
+                    <a:solidFill>
+                      <a:srgbClr val="FFFFFF"/>
+                    </a:solidFill>
+                  </a:tcPr>
+                </a:tc>
+                <a:extLst>
+                  <a:ext uri="{0D108BD9-81ED-4DB2-BD59-A6C34878D82A}">
+                    <a16:rowId xmlns:a16="http://schemas.microsoft.com/office/drawing/2014/main" val="10001"/>
+                  </a:ext>
+                </a:extLst>
+              </a:tr>
+              <a:tr h="566928">
+                <a:tc>
+                  <a:txBody>
+                    <a:bodyPr/>
+                    <a:lstStyle/>
+                    <a:p>
+                      <a:pPr algn="l">
+                        <a:lnSpc>
+                          <a:spcPct val="120000"/>
+                        </a:lnSpc>
+                      </a:pPr>
+                      <a:r>
+                        <a:rPr sz="1250" b="0">
+                          <a:solidFill>
+                            <a:srgbClr val="1F2328"/>
+                          </a:solidFill>
+                          <a:latin typeface="나눔고딕OTF" panose="020D0604000000000000" pitchFamily="34" charset="-127"/>
+                          <a:ea typeface="나눔고딕OTF" panose="020D0604000000000000" pitchFamily="34" charset="-127"/>
+                        </a:rPr>
+                        <a:t>등급 결정 규칙</a:t>
+                      </a:r>
+                    </a:p>
+                  </a:txBody>
+                  <a:tcPr>
+                    <a:solidFill>
+                      <a:srgbClr val="FAFAF8"/>
+                    </a:solidFill>
+                  </a:tcPr>
+                </a:tc>
+                <a:tc>
+                  <a:txBody>
+                    <a:bodyPr/>
+                    <a:lstStyle/>
+                    <a:p>
+                      <a:pPr algn="l">
+                        <a:lnSpc>
+                          <a:spcPct val="120000"/>
+                        </a:lnSpc>
+                      </a:pPr>
+                      <a:r>
+                        <a:rPr sz="1250" b="0">
+                          <a:solidFill>
+                            <a:srgbClr val="1F2328"/>
+                          </a:solidFill>
+                          <a:latin typeface="나눔고딕OTF" panose="020D0604000000000000" pitchFamily="34" charset="-127"/>
+                          <a:ea typeface="나눔고딕OTF" panose="020D0604000000000000" pitchFamily="34" charset="-127"/>
+                        </a:rPr>
+                        <a:t>모형이 아니라 교차표로 확인. 내용정보 최고값과 결정등급의 일치율 99.93%(134,462건), 2017년 5월 이후 94,516건은 예외 0건</a:t>
+                      </a:r>
+                    </a:p>
+                  </a:txBody>
+                  <a:tcPr>
+                    <a:solidFill>
+                      <a:srgbClr val="FAFAF8"/>
+                    </a:solidFill>
+                  </a:tcPr>
+                </a:tc>
+                <a:extLst>
+                  <a:ext uri="{0D108BD9-81ED-4DB2-BD59-A6C34878D82A}">
+                    <a16:rowId xmlns:a16="http://schemas.microsoft.com/office/drawing/2014/main" val="10002"/>
+                  </a:ext>
+                </a:extLst>
+              </a:tr>
+              <a:tr h="566928">
+                <a:tc>
+                  <a:txBody>
+                    <a:bodyPr/>
+                    <a:lstStyle/>
+                    <a:p>
+                      <a:pPr algn="l">
+                        <a:lnSpc>
+                          <a:spcPct val="120000"/>
+                        </a:lnSpc>
+                      </a:pPr>
+                      <a:r>
+                        <a:rPr sz="1250" b="0">
+                          <a:solidFill>
+                            <a:srgbClr val="1F2328"/>
+                          </a:solidFill>
+                          <a:latin typeface="나눔고딕OTF" panose="020D0604000000000000" pitchFamily="34" charset="-127"/>
+                          <a:ea typeface="나눔고딕OTF" panose="020D0604000000000000" pitchFamily="34" charset="-127"/>
+                        </a:rPr>
+                        <a:t>예측 모형 (검증용)</a:t>
+                      </a:r>
+                    </a:p>
+                  </a:txBody>
+                  <a:tcPr>
+                    <a:solidFill>
+                      <a:srgbClr val="FFFFFF"/>
+                    </a:solidFill>
+                  </a:tcPr>
+                </a:tc>
+                <a:tc>
+                  <a:txBody>
+                    <a:bodyPr/>
+                    <a:lstStyle/>
+                    <a:p>
+                      <a:pPr algn="l">
+                        <a:lnSpc>
+                          <a:spcPct val="120000"/>
+                        </a:lnSpc>
+                      </a:pPr>
+                      <a:r>
+                        <a:rPr sz="1250" b="0">
+                          <a:solidFill>
+                            <a:srgbClr val="1F2328"/>
+                          </a:solidFill>
+                          <a:latin typeface="나눔고딕OTF" panose="020D0604000000000000" pitchFamily="34" charset="-127"/>
+                          <a:ea typeface="나눔고딕OTF" panose="020D0604000000000000" pitchFamily="34" charset="-127"/>
+                        </a:rPr>
+                        <a:t>내용정보로 등급을 예측하면 AUC 1.000. 성능이 아니라 항등식의 근거이므로 결과는 폐기</a:t>
+                      </a:r>
+                    </a:p>
+                  </a:txBody>
+                  <a:tcPr>
+                    <a:solidFill>
+                      <a:srgbClr val="FFFFFF"/>
+                    </a:solidFill>
+                  </a:tcPr>
+                </a:tc>
+                <a:extLst>
+                  <a:ext uri="{0D108BD9-81ED-4DB2-BD59-A6C34878D82A}">
+                    <a16:rowId xmlns:a16="http://schemas.microsoft.com/office/drawing/2014/main" val="10003"/>
+                  </a:ext>
+                </a:extLst>
+              </a:tr>
+              <a:tr h="566928">
+                <a:tc>
+                  <a:txBody>
+                    <a:bodyPr/>
+                    <a:lstStyle/>
+                    <a:p>
+                      <a:pPr algn="l">
+                        <a:lnSpc>
+                          <a:spcPct val="120000"/>
+                        </a:lnSpc>
+                      </a:pPr>
+                      <a:r>
+                        <a:rPr sz="1250" b="0">
+                          <a:solidFill>
+                            <a:srgbClr val="1F2328"/>
+                          </a:solidFill>
+                          <a:latin typeface="나눔고딕OTF" panose="020D0604000000000000" pitchFamily="34" charset="-127"/>
+                          <a:ea typeface="나눔고딕OTF" panose="020D0604000000000000" pitchFamily="34" charset="-127"/>
+                        </a:rPr>
+                        <a:t>상향 조정 분류 모형</a:t>
+                      </a:r>
+                    </a:p>
+                  </a:txBody>
+                  <a:tcPr>
+                    <a:solidFill>
+                      <a:srgbClr val="FAFAF8"/>
+                    </a:solidFill>
+                  </a:tcPr>
+                </a:tc>
+                <a:tc>
+                  <a:txBody>
+                    <a:bodyPr/>
+                    <a:lstStyle/>
+                    <a:p>
+                      <a:pPr algn="l">
+                        <a:lnSpc>
+                          <a:spcPct val="120000"/>
+                        </a:lnSpc>
+                      </a:pPr>
+                      <a:r>
+                        <a:rPr sz="1250" b="0">
+                          <a:solidFill>
+                            <a:srgbClr val="1F2328"/>
+                          </a:solidFill>
+                          <a:latin typeface="나눔고딕OTF" panose="020D0604000000000000" pitchFamily="34" charset="-127"/>
+                          <a:ea typeface="나눔고딕OTF" panose="020D0604000000000000" pitchFamily="34" charset="-127"/>
+                        </a:rPr>
+                        <a:t>로지스틱 회귀 · 5겹 교차검증. 설명 변수는 내용정보 7항목·종별·연도. AUC 0.818, 설명력 0.170</a:t>
+                      </a:r>
+                    </a:p>
+                  </a:txBody>
+                  <a:tcPr>
+                    <a:solidFill>
+                      <a:srgbClr val="FAFAF8"/>
+                    </a:solidFill>
+                  </a:tcPr>
+                </a:tc>
+                <a:extLst>
+                  <a:ext uri="{0D108BD9-81ED-4DB2-BD59-A6C34878D82A}">
+                    <a16:rowId xmlns:a16="http://schemas.microsoft.com/office/drawing/2014/main" val="10004"/>
+                  </a:ext>
+                </a:extLst>
+              </a:tr>
+              <a:tr h="566928">
+                <a:tc>
+                  <a:txBody>
+                    <a:bodyPr/>
+                    <a:lstStyle/>
+                    <a:p>
+                      <a:pPr algn="l">
+                        <a:lnSpc>
+                          <a:spcPct val="120000"/>
+                        </a:lnSpc>
+                      </a:pPr>
+                      <a:r>
+                        <a:rPr sz="1250" b="0" dirty="0" err="1">
+                          <a:solidFill>
+                            <a:srgbClr val="1F2328"/>
+                          </a:solidFill>
+                          <a:latin typeface="나눔고딕OTF" panose="020D0604000000000000" pitchFamily="34" charset="-127"/>
+                          <a:ea typeface="나눔고딕OTF" panose="020D0604000000000000" pitchFamily="34" charset="-127"/>
+                        </a:rPr>
+                        <a:t>매체 간 비교</a:t>
+                      </a:r>
+                      <a:endParaRPr sz="1250" b="0" dirty="0">
+                        <a:solidFill>
+                          <a:srgbClr val="1F2328"/>
+                        </a:solidFill>
+                        <a:latin typeface="나눔고딕OTF" panose="020D0604000000000000" pitchFamily="34" charset="-127"/>
+                        <a:ea typeface="나눔고딕OTF" panose="020D0604000000000000" pitchFamily="34" charset="-127"/>
+                      </a:endParaRPr>
+                    </a:p>
+                  </a:txBody>
+                  <a:tcPr>
+                    <a:solidFill>
+                      <a:srgbClr val="FFFFFF"/>
+                    </a:solidFill>
+                  </a:tcPr>
+                </a:tc>
+                <a:tc>
+                  <a:txBody>
+                    <a:bodyPr/>
+                    <a:lstStyle/>
+                    <a:p>
+                      <a:pPr algn="l">
+                        <a:lnSpc>
+                          <a:spcPct val="120000"/>
+                        </a:lnSpc>
+                      </a:pPr>
+                      <a:r>
+                        <a:rPr sz="1250" b="0" dirty="0">
+                          <a:solidFill>
+                            <a:srgbClr val="1F2328"/>
+                          </a:solidFill>
+                          <a:latin typeface="나눔고딕OTF" panose="020D0604000000000000" pitchFamily="34" charset="-127"/>
+                          <a:ea typeface="나눔고딕OTF" panose="020D0604000000000000" pitchFamily="34" charset="-127"/>
+                        </a:rPr>
+                        <a:t>보유 조합이 완전히 동일한 건만, 양측 50건 이상인 조합만 사용. 10개 조합 평균 차이 +15.1%p</a:t>
+                      </a:r>
+                    </a:p>
+                  </a:txBody>
+                  <a:tcPr>
+                    <a:solidFill>
+                      <a:srgbClr val="FFFFFF"/>
+                    </a:solidFill>
+                  </a:tcPr>
+                </a:tc>
+                <a:extLst>
+                  <a:ext uri="{0D108BD9-81ED-4DB2-BD59-A6C34878D82A}">
+                    <a16:rowId xmlns:a16="http://schemas.microsoft.com/office/drawing/2014/main" val="10005"/>
+                  </a:ext>
+                </a:extLst>
+              </a:tr>
+            </a:tbl>
+          </a:graphicData>
+        </a:graphic>
+      </p:graphicFrame>
+      <p:sp>
+        <p:nvSpPr>
+          <p:cNvPr id="7" name="TextBox 6"/>
+          <p:cNvSpPr txBox="1"/>
+          <p:nvPr/>
+        </p:nvSpPr>
+        <p:spPr>
+          <a:xfrm>
+            <a:off x="548640" y="4892040"/>
+            <a:ext cx="11064240" cy="861774"/>
+          </a:xfrm>
+          <a:prstGeom prst="rect">
+            <a:avLst/>
+          </a:prstGeom>
+          <a:noFill/>
+        </p:spPr>
+        <p:txBody>
+          <a:bodyPr wrap="square">
+            <a:spAutoFit/>
+          </a:bodyPr>
+          <a:lstStyle/>
+          <a:p>
+            <a:pPr algn="l">
+              <a:lnSpc>
+                <a:spcPct val="125000"/>
+              </a:lnSpc>
+              <a:spcAft>
+                <a:spcPts val="600"/>
+              </a:spcAft>
+            </a:pPr>
+            <a:r>
+              <a:rPr sz="2000" b="1" dirty="0" err="1">
+                <a:solidFill>
+                  <a:srgbClr val="1F3864"/>
+                </a:solidFill>
+                <a:latin typeface="나눔고딕OTF" panose="020D0604000000000000" pitchFamily="34" charset="-127"/>
+                <a:ea typeface="나눔고딕OTF" panose="020D0604000000000000" pitchFamily="34" charset="-127"/>
+              </a:rPr>
+              <a:t>예측이 목적이 아니라 구조 확인이 목적이므로, 성능 지표는 결론의 근거가 아니라 참고값으로만 사용</a:t>
+            </a:r>
+            <a:br>
+              <a:rPr sz="2000" b="1" dirty="0" err="1">
+                <a:solidFill>
+                  <a:srgbClr val="1F3864"/>
+                </a:solidFill>
+                <a:latin typeface="나눔고딕OTF" panose="020D0604000000000000" pitchFamily="34" charset="-127"/>
+                <a:ea typeface="나눔고딕OTF" panose="020D0604000000000000" pitchFamily="34" charset="-127"/>
+              </a:rPr>
+            </a:br>
+          </a:p>
+        </p:txBody>
+      </p:sp>
+    </p:spTree>
+  </p:cSld>
+  <p:clrMapOvr>
+    <a:masterClrMapping/>
+  </p:clrMapOvr>
+</p:sld>
+</file>
+
+<file path=ppt/slides/slide13.xml><?xml version="1.0" encoding="utf-8"?>
 <p:sld xmlns:a="http://schemas.openxmlformats.org/drawingml/2006/main" xmlns:r="http://schemas.openxmlformats.org/officeDocument/2006/relationships" xmlns:p="http://schemas.openxmlformats.org/presentationml/2006/main">
   <p:cSld>
     <p:spTree>
@@ -8793,7 +9704,7 @@
 </p:sld>
 </file>
 
-<file path=ppt/slides/slide13.xml><?xml version="1.0" encoding="utf-8"?>
+<file path=ppt/slides/slide14.xml><?xml version="1.0" encoding="utf-8"?>
 <p:sld xmlns:a="http://schemas.openxmlformats.org/drawingml/2006/main" xmlns:r="http://schemas.openxmlformats.org/officeDocument/2006/relationships" xmlns:p="http://schemas.openxmlformats.org/presentationml/2006/main">
   <p:cSld>
     <p:spTree>
@@ -10019,7 +10930,7 @@
 </p:sld>
 </file>
 
-<file path=ppt/slides/slide14.xml><?xml version="1.0" encoding="utf-8"?>
+<file path=ppt/slides/slide15.xml><?xml version="1.0" encoding="utf-8"?>
 <p:sld xmlns:a="http://schemas.openxmlformats.org/drawingml/2006/main" xmlns:r="http://schemas.openxmlformats.org/officeDocument/2006/relationships" xmlns:p="http://schemas.openxmlformats.org/presentationml/2006/main">
   <p:cSld>
     <p:spTree>
@@ -11232,8 +12143,8 @@
 </p:sld>
 </file>
 
-<file path=ppt/slides/slide15.xml><?xml version="1.0" encoding="utf-8"?>
-<p:sld xmlns:a="http://schemas.openxmlformats.org/drawingml/2006/main" xmlns:r="http://schemas.openxmlformats.org/officeDocument/2006/relationships" xmlns:p="http://schemas.openxmlformats.org/presentationml/2006/main">
+<file path=ppt/slides/slide16.xml><?xml version="1.0" encoding="utf-8"?>
+<p:sld xmlns:a="http://schemas.openxmlformats.org/drawingml/2006/main" xmlns:p="http://schemas.openxmlformats.org/presentationml/2006/main" xmlns:r="http://schemas.openxmlformats.org/officeDocument/2006/relationships">
   <p:cSld>
     <p:spTree>
       <p:nvGrpSpPr>
@@ -11241,1029 +12152,7 @@
         <p:cNvGrpSpPr/>
         <p:nvPr/>
       </p:nvGrpSpPr>
-      <p:grpSpPr>
-        <a:xfrm>
-          <a:off x="0" y="0"/>
-          <a:ext cx="0" cy="0"/>
-          <a:chOff x="0" y="0"/>
-          <a:chExt cx="0" cy="0"/>
-        </a:xfrm>
-      </p:grpSpPr>
-      <p:sp>
-        <p:nvSpPr>
-          <p:cNvPr id="2" name="TextBox 1"/>
-          <p:cNvSpPr txBox="1"/>
-          <p:nvPr/>
-        </p:nvSpPr>
-        <p:spPr>
-          <a:xfrm>
-            <a:off x="457200" y="310896"/>
-            <a:ext cx="5486400" cy="303929"/>
-          </a:xfrm>
-          <a:prstGeom prst="rect">
-            <a:avLst/>
-          </a:prstGeom>
-          <a:noFill/>
-        </p:spPr>
-        <p:txBody>
-          <a:bodyPr wrap="square">
-            <a:spAutoFit/>
-          </a:bodyPr>
-          <a:lstStyle/>
-          <a:p>
-            <a:pPr algn="l">
-              <a:lnSpc>
-                <a:spcPct val="125000"/>
-              </a:lnSpc>
-              <a:spcAft>
-                <a:spcPts val="600"/>
-              </a:spcAft>
-            </a:pPr>
-            <a:r>
-              <a:rPr sz="1100" b="0">
-                <a:solidFill>
-                  <a:srgbClr val="6B7280"/>
-                </a:solidFill>
-                <a:latin typeface="나눔고딕OTF" panose="020D0604000000000000" pitchFamily="34" charset="-127"/>
-                <a:ea typeface="나눔고딕OTF" panose="020D0604000000000000" pitchFamily="34" charset="-127"/>
-              </a:rPr>
-              <a:t>6. 산출물</a:t>
-            </a:r>
-          </a:p>
-        </p:txBody>
-      </p:sp>
-      <p:sp>
-        <p:nvSpPr>
-          <p:cNvPr id="3" name="TextBox 2"/>
-          <p:cNvSpPr txBox="1"/>
-          <p:nvPr/>
-        </p:nvSpPr>
-        <p:spPr>
-          <a:xfrm>
-            <a:off x="457200" y="530352"/>
-            <a:ext cx="11247120" cy="592470"/>
-          </a:xfrm>
-          <a:prstGeom prst="rect">
-            <a:avLst/>
-          </a:prstGeom>
-          <a:noFill/>
-        </p:spPr>
-        <p:txBody>
-          <a:bodyPr wrap="square">
-            <a:spAutoFit/>
-          </a:bodyPr>
-          <a:lstStyle/>
-          <a:p>
-            <a:pPr algn="l">
-              <a:lnSpc>
-                <a:spcPct val="125000"/>
-              </a:lnSpc>
-              <a:spcAft>
-                <a:spcPts val="600"/>
-              </a:spcAft>
-            </a:pPr>
-            <a:r>
-              <a:rPr sz="2600" b="1">
-                <a:solidFill>
-                  <a:srgbClr val="1F3864"/>
-                </a:solidFill>
-                <a:latin typeface="경기천년제목 Bold" panose="02020803020101020101" pitchFamily="18" charset="-127"/>
-                <a:ea typeface="경기천년제목 Bold" panose="02020803020101020101" pitchFamily="18" charset="-127"/>
-              </a:rPr>
-              <a:t>대시보드: 화면 하나당 분석 질문 하나</a:t>
-            </a:r>
-          </a:p>
-        </p:txBody>
-      </p:sp>
-      <p:sp>
-        <p:nvSpPr>
-          <p:cNvPr id="4" name="Rectangle 3"/>
-          <p:cNvSpPr/>
-          <p:nvPr/>
-        </p:nvSpPr>
-        <p:spPr>
-          <a:xfrm>
-            <a:off x="457200" y="1024128"/>
-            <a:ext cx="11274552" cy="32004"/>
-          </a:xfrm>
-          <a:prstGeom prst="rect">
-            <a:avLst/>
-          </a:prstGeom>
-          <a:solidFill>
-            <a:srgbClr val="1F3864"/>
-          </a:solidFill>
-          <a:ln>
-            <a:noFill/>
-          </a:ln>
-          <a:effectLst/>
-        </p:spPr>
-        <p:style>
-          <a:lnRef idx="1">
-            <a:schemeClr val="accent1"/>
-          </a:lnRef>
-          <a:fillRef idx="3">
-            <a:schemeClr val="accent1"/>
-          </a:fillRef>
-          <a:effectRef idx="2">
-            <a:schemeClr val="accent1"/>
-          </a:effectRef>
-          <a:fontRef idx="minor">
-            <a:schemeClr val="lt1"/>
-          </a:fontRef>
-        </p:style>
-        <p:txBody>
-          <a:bodyPr rtlCol="0" anchor="ctr"/>
-          <a:lstStyle/>
-          <a:p>
-            <a:pPr algn="ctr"/>
-            <a:endParaRPr>
-              <a:latin typeface="경기천년제목 Bold" panose="02020803020101020101" pitchFamily="18" charset="-127"/>
-              <a:ea typeface="경기천년제목 Bold" panose="02020803020101020101" pitchFamily="18" charset="-127"/>
-            </a:endParaRPr>
-          </a:p>
-        </p:txBody>
-      </p:sp>
-      <p:pic>
-        <p:nvPicPr>
-          <p:cNvPr id="5" name="Picture 4" descr="dashboard.jpg"/>
-          <p:cNvPicPr>
-            <a:picLocks noChangeAspect="1"/>
-          </p:cNvPicPr>
-          <p:nvPr/>
-        </p:nvPicPr>
-        <p:blipFill>
-          <a:blip r:embed="rId3"/>
-          <a:stretch>
-            <a:fillRect/>
-          </a:stretch>
-        </p:blipFill>
-        <p:spPr>
-          <a:xfrm>
-            <a:off x="548640" y="1371600"/>
-            <a:ext cx="7589520" cy="4209488"/>
-          </a:xfrm>
-          <a:prstGeom prst="rect">
-            <a:avLst/>
-          </a:prstGeom>
-        </p:spPr>
-      </p:pic>
-      <p:sp>
-        <p:nvSpPr>
-          <p:cNvPr id="6" name="TextBox 5"/>
-          <p:cNvSpPr txBox="1"/>
-          <p:nvPr/>
-        </p:nvSpPr>
-        <p:spPr>
-          <a:xfrm>
-            <a:off x="8412480" y="1463040"/>
-            <a:ext cx="3383280" cy="4054956"/>
-          </a:xfrm>
-          <a:prstGeom prst="rect">
-            <a:avLst/>
-          </a:prstGeom>
-          <a:noFill/>
-        </p:spPr>
-        <p:txBody>
-          <a:bodyPr wrap="square">
-            <a:spAutoFit/>
-          </a:bodyPr>
-          <a:lstStyle/>
-          <a:p>
-            <a:pPr algn="l">
-              <a:lnSpc>
-                <a:spcPct val="125000"/>
-              </a:lnSpc>
-              <a:spcAft>
-                <a:spcPts val="600"/>
-              </a:spcAft>
-            </a:pPr>
-            <a:r>
-              <a:rPr sz="1350" b="0" dirty="0">
-                <a:solidFill>
-                  <a:srgbClr val="1F2328"/>
-                </a:solidFill>
-                <a:latin typeface="나눔고딕OTF" panose="020D0604000000000000" pitchFamily="34" charset="-127"/>
-                <a:ea typeface="나눔고딕OTF" panose="020D0604000000000000" pitchFamily="34" charset="-127"/>
-              </a:rPr>
-              <a:t>① </a:t>
-            </a:r>
-            <a:r>
-              <a:rPr sz="1350" b="0" dirty="0" err="1">
-                <a:solidFill>
-                  <a:srgbClr val="1F2328"/>
-                </a:solidFill>
-                <a:latin typeface="나눔고딕OTF" panose="020D0604000000000000" pitchFamily="34" charset="-127"/>
-                <a:ea typeface="나눔고딕OTF" panose="020D0604000000000000" pitchFamily="34" charset="-127"/>
-              </a:rPr>
-              <a:t>등급</a:t>
-            </a:r>
-            <a:r>
-              <a:rPr sz="1350" b="0" dirty="0">
-                <a:solidFill>
-                  <a:srgbClr val="1F2328"/>
-                </a:solidFill>
-                <a:latin typeface="나눔고딕OTF" panose="020D0604000000000000" pitchFamily="34" charset="-127"/>
-                <a:ea typeface="나눔고딕OTF" panose="020D0604000000000000" pitchFamily="34" charset="-127"/>
-              </a:rPr>
-              <a:t> </a:t>
-            </a:r>
-            <a:r>
-              <a:rPr sz="1350" b="0" dirty="0" err="1">
-                <a:solidFill>
-                  <a:srgbClr val="1F2328"/>
-                </a:solidFill>
-                <a:latin typeface="나눔고딕OTF" panose="020D0604000000000000" pitchFamily="34" charset="-127"/>
-                <a:ea typeface="나눔고딕OTF" panose="020D0604000000000000" pitchFamily="34" charset="-127"/>
-              </a:rPr>
-              <a:t>결정</a:t>
-            </a:r>
-            <a:r>
-              <a:rPr sz="1350" b="0" dirty="0">
-                <a:solidFill>
-                  <a:srgbClr val="1F2328"/>
-                </a:solidFill>
-                <a:latin typeface="나눔고딕OTF" panose="020D0604000000000000" pitchFamily="34" charset="-127"/>
-                <a:ea typeface="나눔고딕OTF" panose="020D0604000000000000" pitchFamily="34" charset="-127"/>
-              </a:rPr>
-              <a:t> </a:t>
-            </a:r>
-            <a:r>
-              <a:rPr sz="1350" b="0" dirty="0" err="1">
-                <a:solidFill>
-                  <a:srgbClr val="1F2328"/>
-                </a:solidFill>
-                <a:latin typeface="나눔고딕OTF" panose="020D0604000000000000" pitchFamily="34" charset="-127"/>
-                <a:ea typeface="나눔고딕OTF" panose="020D0604000000000000" pitchFamily="34" charset="-127"/>
-              </a:rPr>
-              <a:t>기준</a:t>
-            </a:r>
-            <a:endParaRPr sz="1350" b="0" dirty="0">
-              <a:solidFill>
-                <a:srgbClr val="1F2328"/>
-              </a:solidFill>
-              <a:latin typeface="나눔고딕OTF" panose="020D0604000000000000" pitchFamily="34" charset="-127"/>
-              <a:ea typeface="나눔고딕OTF" panose="020D0604000000000000" pitchFamily="34" charset="-127"/>
-            </a:endParaRPr>
-          </a:p>
-          <a:p>
-            <a:pPr algn="l">
-              <a:lnSpc>
-                <a:spcPct val="125000"/>
-              </a:lnSpc>
-              <a:spcAft>
-                <a:spcPts val="600"/>
-              </a:spcAft>
-            </a:pPr>
-            <a:r>
-              <a:rPr sz="1350" b="0" dirty="0">
-                <a:solidFill>
-                  <a:srgbClr val="1F2328"/>
-                </a:solidFill>
-                <a:latin typeface="나눔고딕OTF" panose="020D0604000000000000" pitchFamily="34" charset="-127"/>
-                <a:ea typeface="나눔고딕OTF" panose="020D0604000000000000" pitchFamily="34" charset="-127"/>
-              </a:rPr>
-              <a:t>② </a:t>
-            </a:r>
-            <a:r>
-              <a:rPr sz="1350" b="0" dirty="0" err="1">
-                <a:solidFill>
-                  <a:srgbClr val="1F2328"/>
-                </a:solidFill>
-                <a:latin typeface="나눔고딕OTF" panose="020D0604000000000000" pitchFamily="34" charset="-127"/>
-                <a:ea typeface="나눔고딕OTF" panose="020D0604000000000000" pitchFamily="34" charset="-127"/>
-              </a:rPr>
-              <a:t>등급</a:t>
-            </a:r>
-            <a:r>
-              <a:rPr sz="1350" b="0" dirty="0">
-                <a:solidFill>
-                  <a:srgbClr val="1F2328"/>
-                </a:solidFill>
-                <a:latin typeface="나눔고딕OTF" panose="020D0604000000000000" pitchFamily="34" charset="-127"/>
-                <a:ea typeface="나눔고딕OTF" panose="020D0604000000000000" pitchFamily="34" charset="-127"/>
-              </a:rPr>
-              <a:t> </a:t>
-            </a:r>
-            <a:r>
-              <a:rPr sz="1350" b="0" dirty="0" err="1">
-                <a:solidFill>
-                  <a:srgbClr val="1F2328"/>
-                </a:solidFill>
-                <a:latin typeface="나눔고딕OTF" panose="020D0604000000000000" pitchFamily="34" charset="-127"/>
-                <a:ea typeface="나눔고딕OTF" panose="020D0604000000000000" pitchFamily="34" charset="-127"/>
-              </a:rPr>
-              <a:t>상향</a:t>
-            </a:r>
-            <a:r>
-              <a:rPr sz="1350" b="0" dirty="0">
-                <a:solidFill>
-                  <a:srgbClr val="1F2328"/>
-                </a:solidFill>
-                <a:latin typeface="나눔고딕OTF" panose="020D0604000000000000" pitchFamily="34" charset="-127"/>
-                <a:ea typeface="나눔고딕OTF" panose="020D0604000000000000" pitchFamily="34" charset="-127"/>
-              </a:rPr>
-              <a:t> </a:t>
-            </a:r>
-            <a:r>
-              <a:rPr sz="1350" b="0" dirty="0" err="1">
-                <a:solidFill>
-                  <a:srgbClr val="1F2328"/>
-                </a:solidFill>
-                <a:latin typeface="나눔고딕OTF" panose="020D0604000000000000" pitchFamily="34" charset="-127"/>
-                <a:ea typeface="나눔고딕OTF" panose="020D0604000000000000" pitchFamily="34" charset="-127"/>
-              </a:rPr>
-              <a:t>요인</a:t>
-            </a:r>
-            <a:endParaRPr sz="1350" b="0" dirty="0">
-              <a:solidFill>
-                <a:srgbClr val="1F2328"/>
-              </a:solidFill>
-              <a:latin typeface="나눔고딕OTF" panose="020D0604000000000000" pitchFamily="34" charset="-127"/>
-              <a:ea typeface="나눔고딕OTF" panose="020D0604000000000000" pitchFamily="34" charset="-127"/>
-            </a:endParaRPr>
-          </a:p>
-          <a:p>
-            <a:pPr algn="l">
-              <a:lnSpc>
-                <a:spcPct val="125000"/>
-              </a:lnSpc>
-              <a:spcAft>
-                <a:spcPts val="600"/>
-              </a:spcAft>
-            </a:pPr>
-            <a:r>
-              <a:rPr sz="1350" b="0" dirty="0">
-                <a:solidFill>
-                  <a:srgbClr val="1F2328"/>
-                </a:solidFill>
-                <a:latin typeface="나눔고딕OTF" panose="020D0604000000000000" pitchFamily="34" charset="-127"/>
-                <a:ea typeface="나눔고딕OTF" panose="020D0604000000000000" pitchFamily="34" charset="-127"/>
-              </a:rPr>
-              <a:t>③ </a:t>
-            </a:r>
-            <a:r>
-              <a:rPr sz="1350" b="0" dirty="0" err="1">
-                <a:solidFill>
-                  <a:srgbClr val="1F2328"/>
-                </a:solidFill>
-                <a:latin typeface="나눔고딕OTF" panose="020D0604000000000000" pitchFamily="34" charset="-127"/>
-                <a:ea typeface="나눔고딕OTF" panose="020D0604000000000000" pitchFamily="34" charset="-127"/>
-              </a:rPr>
-              <a:t>신청등급</a:t>
-            </a:r>
-            <a:r>
-              <a:rPr sz="1350" b="0" dirty="0">
-                <a:solidFill>
-                  <a:srgbClr val="1F2328"/>
-                </a:solidFill>
-                <a:latin typeface="나눔고딕OTF" panose="020D0604000000000000" pitchFamily="34" charset="-127"/>
-                <a:ea typeface="나눔고딕OTF" panose="020D0604000000000000" pitchFamily="34" charset="-127"/>
-              </a:rPr>
-              <a:t> </a:t>
-            </a:r>
-            <a:r>
-              <a:rPr sz="1350" b="0" dirty="0" err="1">
-                <a:solidFill>
-                  <a:srgbClr val="1F2328"/>
-                </a:solidFill>
-                <a:latin typeface="나눔고딕OTF" panose="020D0604000000000000" pitchFamily="34" charset="-127"/>
-                <a:ea typeface="나눔고딕OTF" panose="020D0604000000000000" pitchFamily="34" charset="-127"/>
-              </a:rPr>
-              <a:t>대비</a:t>
-            </a:r>
-            <a:r>
-              <a:rPr sz="1350" b="0" dirty="0">
-                <a:solidFill>
-                  <a:srgbClr val="1F2328"/>
-                </a:solidFill>
-                <a:latin typeface="나눔고딕OTF" panose="020D0604000000000000" pitchFamily="34" charset="-127"/>
-                <a:ea typeface="나눔고딕OTF" panose="020D0604000000000000" pitchFamily="34" charset="-127"/>
-              </a:rPr>
-              <a:t> </a:t>
-            </a:r>
-            <a:r>
-              <a:rPr sz="1350" b="0" dirty="0" err="1">
-                <a:solidFill>
-                  <a:srgbClr val="1F2328"/>
-                </a:solidFill>
-                <a:latin typeface="나눔고딕OTF" panose="020D0604000000000000" pitchFamily="34" charset="-127"/>
-                <a:ea typeface="나눔고딕OTF" panose="020D0604000000000000" pitchFamily="34" charset="-127"/>
-              </a:rPr>
-              <a:t>조정</a:t>
-            </a:r>
-            <a:endParaRPr sz="1350" b="0" dirty="0">
-              <a:solidFill>
-                <a:srgbClr val="1F2328"/>
-              </a:solidFill>
-              <a:latin typeface="나눔고딕OTF" panose="020D0604000000000000" pitchFamily="34" charset="-127"/>
-              <a:ea typeface="나눔고딕OTF" panose="020D0604000000000000" pitchFamily="34" charset="-127"/>
-            </a:endParaRPr>
-          </a:p>
-          <a:p>
-            <a:pPr algn="l">
-              <a:lnSpc>
-                <a:spcPct val="125000"/>
-              </a:lnSpc>
-              <a:spcAft>
-                <a:spcPts val="600"/>
-              </a:spcAft>
-            </a:pPr>
-            <a:r>
-              <a:rPr sz="1350" b="0" dirty="0">
-                <a:solidFill>
-                  <a:srgbClr val="1F2328"/>
-                </a:solidFill>
-                <a:latin typeface="나눔고딕OTF" panose="020D0604000000000000" pitchFamily="34" charset="-127"/>
-                <a:ea typeface="나눔고딕OTF" panose="020D0604000000000000" pitchFamily="34" charset="-127"/>
-              </a:rPr>
-              <a:t>④ </a:t>
-            </a:r>
-            <a:r>
-              <a:rPr sz="1350" b="0" dirty="0" err="1">
-                <a:solidFill>
-                  <a:srgbClr val="1F2328"/>
-                </a:solidFill>
-                <a:latin typeface="나눔고딕OTF" panose="020D0604000000000000" pitchFamily="34" charset="-127"/>
-                <a:ea typeface="나눔고딕OTF" panose="020D0604000000000000" pitchFamily="34" charset="-127"/>
-              </a:rPr>
-              <a:t>매체</a:t>
-            </a:r>
-            <a:r>
-              <a:rPr sz="1350" b="0" dirty="0">
-                <a:solidFill>
-                  <a:srgbClr val="1F2328"/>
-                </a:solidFill>
-                <a:latin typeface="나눔고딕OTF" panose="020D0604000000000000" pitchFamily="34" charset="-127"/>
-                <a:ea typeface="나눔고딕OTF" panose="020D0604000000000000" pitchFamily="34" charset="-127"/>
-              </a:rPr>
-              <a:t> 간 </a:t>
-            </a:r>
-            <a:r>
-              <a:rPr sz="1350" b="0" dirty="0" err="1">
-                <a:solidFill>
-                  <a:srgbClr val="1F2328"/>
-                </a:solidFill>
-                <a:latin typeface="나눔고딕OTF" panose="020D0604000000000000" pitchFamily="34" charset="-127"/>
-                <a:ea typeface="나눔고딕OTF" panose="020D0604000000000000" pitchFamily="34" charset="-127"/>
-              </a:rPr>
-              <a:t>판정</a:t>
-            </a:r>
-            <a:r>
-              <a:rPr sz="1350" b="0" dirty="0">
-                <a:solidFill>
-                  <a:srgbClr val="1F2328"/>
-                </a:solidFill>
-                <a:latin typeface="나눔고딕OTF" panose="020D0604000000000000" pitchFamily="34" charset="-127"/>
-                <a:ea typeface="나눔고딕OTF" panose="020D0604000000000000" pitchFamily="34" charset="-127"/>
-              </a:rPr>
-              <a:t> </a:t>
-            </a:r>
-            <a:r>
-              <a:rPr sz="1350" b="0" dirty="0" err="1">
-                <a:solidFill>
-                  <a:srgbClr val="1F2328"/>
-                </a:solidFill>
-                <a:latin typeface="나눔고딕OTF" panose="020D0604000000000000" pitchFamily="34" charset="-127"/>
-                <a:ea typeface="나눔고딕OTF" panose="020D0604000000000000" pitchFamily="34" charset="-127"/>
-              </a:rPr>
-              <a:t>차이</a:t>
-            </a:r>
-            <a:endParaRPr sz="1350" b="0" dirty="0">
-              <a:solidFill>
-                <a:srgbClr val="1F2328"/>
-              </a:solidFill>
-              <a:latin typeface="나눔고딕OTF" panose="020D0604000000000000" pitchFamily="34" charset="-127"/>
-              <a:ea typeface="나눔고딕OTF" panose="020D0604000000000000" pitchFamily="34" charset="-127"/>
-            </a:endParaRPr>
-          </a:p>
-          <a:p>
-            <a:pPr algn="l">
-              <a:lnSpc>
-                <a:spcPct val="125000"/>
-              </a:lnSpc>
-              <a:spcAft>
-                <a:spcPts val="600"/>
-              </a:spcAft>
-            </a:pPr>
-            <a:r>
-              <a:rPr sz="1350" b="0" dirty="0">
-                <a:solidFill>
-                  <a:srgbClr val="1F2328"/>
-                </a:solidFill>
-                <a:latin typeface="나눔고딕OTF" panose="020D0604000000000000" pitchFamily="34" charset="-127"/>
-                <a:ea typeface="나눔고딕OTF" panose="020D0604000000000000" pitchFamily="34" charset="-127"/>
-              </a:rPr>
-              <a:t>⑤ </a:t>
-            </a:r>
-            <a:r>
-              <a:rPr sz="1350" b="0" dirty="0" err="1">
-                <a:solidFill>
-                  <a:srgbClr val="1F2328"/>
-                </a:solidFill>
-                <a:latin typeface="나눔고딕OTF" panose="020D0604000000000000" pitchFamily="34" charset="-127"/>
-                <a:ea typeface="나눔고딕OTF" panose="020D0604000000000000" pitchFamily="34" charset="-127"/>
-              </a:rPr>
-              <a:t>공개</a:t>
-            </a:r>
-            <a:r>
-              <a:rPr sz="1350" b="0" dirty="0">
-                <a:solidFill>
-                  <a:srgbClr val="1F2328"/>
-                </a:solidFill>
-                <a:latin typeface="나눔고딕OTF" panose="020D0604000000000000" pitchFamily="34" charset="-127"/>
-                <a:ea typeface="나눔고딕OTF" panose="020D0604000000000000" pitchFamily="34" charset="-127"/>
-              </a:rPr>
-              <a:t> </a:t>
-            </a:r>
-            <a:r>
-              <a:rPr sz="1350" b="0" dirty="0" err="1">
-                <a:solidFill>
-                  <a:srgbClr val="1F2328"/>
-                </a:solidFill>
-                <a:latin typeface="나눔고딕OTF" panose="020D0604000000000000" pitchFamily="34" charset="-127"/>
-                <a:ea typeface="나눔고딕OTF" panose="020D0604000000000000" pitchFamily="34" charset="-127"/>
-              </a:rPr>
-              <a:t>데이터</a:t>
-            </a:r>
-            <a:r>
-              <a:rPr sz="1350" b="0" dirty="0">
-                <a:solidFill>
-                  <a:srgbClr val="1F2328"/>
-                </a:solidFill>
-                <a:latin typeface="나눔고딕OTF" panose="020D0604000000000000" pitchFamily="34" charset="-127"/>
-                <a:ea typeface="나눔고딕OTF" panose="020D0604000000000000" pitchFamily="34" charset="-127"/>
-              </a:rPr>
-              <a:t> </a:t>
-            </a:r>
-            <a:r>
-              <a:rPr sz="1350" b="0" dirty="0" err="1">
-                <a:solidFill>
-                  <a:srgbClr val="1F2328"/>
-                </a:solidFill>
-                <a:latin typeface="나눔고딕OTF" panose="020D0604000000000000" pitchFamily="34" charset="-127"/>
-                <a:ea typeface="나눔고딕OTF" panose="020D0604000000000000" pitchFamily="34" charset="-127"/>
-              </a:rPr>
-              <a:t>포괄</a:t>
-            </a:r>
-            <a:r>
-              <a:rPr sz="1350" b="0" dirty="0">
-                <a:solidFill>
-                  <a:srgbClr val="1F2328"/>
-                </a:solidFill>
-                <a:latin typeface="나눔고딕OTF" panose="020D0604000000000000" pitchFamily="34" charset="-127"/>
-                <a:ea typeface="나눔고딕OTF" panose="020D0604000000000000" pitchFamily="34" charset="-127"/>
-              </a:rPr>
-              <a:t> </a:t>
-            </a:r>
-            <a:r>
-              <a:rPr sz="1350" b="0" dirty="0" err="1">
-                <a:solidFill>
-                  <a:srgbClr val="1F2328"/>
-                </a:solidFill>
-                <a:latin typeface="나눔고딕OTF" panose="020D0604000000000000" pitchFamily="34" charset="-127"/>
-                <a:ea typeface="나눔고딕OTF" panose="020D0604000000000000" pitchFamily="34" charset="-127"/>
-              </a:rPr>
-              <a:t>범위</a:t>
-            </a:r>
-            <a:endParaRPr sz="1350" b="0" dirty="0">
-              <a:solidFill>
-                <a:srgbClr val="1F2328"/>
-              </a:solidFill>
-              <a:latin typeface="나눔고딕OTF" panose="020D0604000000000000" pitchFamily="34" charset="-127"/>
-              <a:ea typeface="나눔고딕OTF" panose="020D0604000000000000" pitchFamily="34" charset="-127"/>
-            </a:endParaRPr>
-          </a:p>
-          <a:p>
-            <a:pPr algn="l">
-              <a:lnSpc>
-                <a:spcPct val="125000"/>
-              </a:lnSpc>
-              <a:spcAft>
-                <a:spcPts val="600"/>
-              </a:spcAft>
-            </a:pPr>
-            <a:r>
-              <a:rPr sz="1350" b="0" dirty="0">
-                <a:solidFill>
-                  <a:srgbClr val="1F2328"/>
-                </a:solidFill>
-                <a:latin typeface="나눔고딕OTF" panose="020D0604000000000000" pitchFamily="34" charset="-127"/>
-                <a:ea typeface="나눔고딕OTF" panose="020D0604000000000000" pitchFamily="34" charset="-127"/>
-              </a:rPr>
-              <a:t>⑥ </a:t>
-            </a:r>
-            <a:r>
-              <a:rPr sz="1350" b="0" dirty="0" err="1">
-                <a:solidFill>
-                  <a:srgbClr val="1F2328"/>
-                </a:solidFill>
-                <a:latin typeface="나눔고딕OTF" panose="020D0604000000000000" pitchFamily="34" charset="-127"/>
-                <a:ea typeface="나눔고딕OTF" panose="020D0604000000000000" pitchFamily="34" charset="-127"/>
-              </a:rPr>
-              <a:t>개별</a:t>
-            </a:r>
-            <a:r>
-              <a:rPr sz="1350" b="0" dirty="0">
-                <a:solidFill>
-                  <a:srgbClr val="1F2328"/>
-                </a:solidFill>
-                <a:latin typeface="나눔고딕OTF" panose="020D0604000000000000" pitchFamily="34" charset="-127"/>
-                <a:ea typeface="나눔고딕OTF" panose="020D0604000000000000" pitchFamily="34" charset="-127"/>
-              </a:rPr>
-              <a:t> 건 </a:t>
-            </a:r>
-            <a:r>
-              <a:rPr sz="1350" b="0" dirty="0" err="1">
-                <a:solidFill>
-                  <a:srgbClr val="1F2328"/>
-                </a:solidFill>
-                <a:latin typeface="나눔고딕OTF" panose="020D0604000000000000" pitchFamily="34" charset="-127"/>
-                <a:ea typeface="나눔고딕OTF" panose="020D0604000000000000" pitchFamily="34" charset="-127"/>
-              </a:rPr>
-              <a:t>조회</a:t>
-            </a:r>
-            <a:endParaRPr sz="1350" b="0" dirty="0">
-              <a:solidFill>
-                <a:srgbClr val="1F2328"/>
-              </a:solidFill>
-              <a:latin typeface="나눔고딕OTF" panose="020D0604000000000000" pitchFamily="34" charset="-127"/>
-              <a:ea typeface="나눔고딕OTF" panose="020D0604000000000000" pitchFamily="34" charset="-127"/>
-            </a:endParaRPr>
-          </a:p>
-          <a:p>
-            <a:pPr algn="l">
-              <a:lnSpc>
-                <a:spcPct val="125000"/>
-              </a:lnSpc>
-              <a:spcAft>
-                <a:spcPts val="600"/>
-              </a:spcAft>
-            </a:pPr>
-            <a:endParaRPr sz="1350" b="0" dirty="0">
-              <a:solidFill>
-                <a:srgbClr val="1F2328"/>
-              </a:solidFill>
-              <a:latin typeface="나눔고딕OTF" panose="020D0604000000000000" pitchFamily="34" charset="-127"/>
-              <a:ea typeface="나눔고딕OTF" panose="020D0604000000000000" pitchFamily="34" charset="-127"/>
-            </a:endParaRPr>
-          </a:p>
-          <a:p>
-            <a:pPr algn="l">
-              <a:lnSpc>
-                <a:spcPct val="125000"/>
-              </a:lnSpc>
-              <a:spcAft>
-                <a:spcPts val="600"/>
-              </a:spcAft>
-            </a:pPr>
-            <a:r>
-              <a:rPr sz="1350" b="0" dirty="0" err="1">
-                <a:solidFill>
-                  <a:srgbClr val="1F2328"/>
-                </a:solidFill>
-                <a:latin typeface="나눔고딕OTF" panose="020D0604000000000000" pitchFamily="34" charset="-127"/>
-                <a:ea typeface="나눔고딕OTF" panose="020D0604000000000000" pitchFamily="34" charset="-127"/>
-              </a:rPr>
-              <a:t>공통</a:t>
-            </a:r>
-            <a:r>
-              <a:rPr sz="1350" b="0" dirty="0">
-                <a:solidFill>
-                  <a:srgbClr val="1F2328"/>
-                </a:solidFill>
-                <a:latin typeface="나눔고딕OTF" panose="020D0604000000000000" pitchFamily="34" charset="-127"/>
-                <a:ea typeface="나눔고딕OTF" panose="020D0604000000000000" pitchFamily="34" charset="-127"/>
-              </a:rPr>
-              <a:t> </a:t>
-            </a:r>
-            <a:r>
-              <a:rPr sz="1350" b="0" dirty="0" err="1">
-                <a:solidFill>
-                  <a:srgbClr val="1F2328"/>
-                </a:solidFill>
-                <a:latin typeface="나눔고딕OTF" panose="020D0604000000000000" pitchFamily="34" charset="-127"/>
-                <a:ea typeface="나눔고딕OTF" panose="020D0604000000000000" pitchFamily="34" charset="-127"/>
-              </a:rPr>
-              <a:t>필터</a:t>
-            </a:r>
-            <a:r>
-              <a:rPr sz="1350" b="0" dirty="0">
-                <a:solidFill>
-                  <a:srgbClr val="1F2328"/>
-                </a:solidFill>
-                <a:latin typeface="나눔고딕OTF" panose="020D0604000000000000" pitchFamily="34" charset="-127"/>
-                <a:ea typeface="나눔고딕OTF" panose="020D0604000000000000" pitchFamily="34" charset="-127"/>
-              </a:rPr>
-              <a:t>: </a:t>
-            </a:r>
-            <a:r>
-              <a:rPr sz="1350" b="0" dirty="0" err="1">
-                <a:solidFill>
-                  <a:srgbClr val="1F2328"/>
-                </a:solidFill>
-                <a:latin typeface="나눔고딕OTF" panose="020D0604000000000000" pitchFamily="34" charset="-127"/>
-                <a:ea typeface="나눔고딕OTF" panose="020D0604000000000000" pitchFamily="34" charset="-127"/>
-              </a:rPr>
-              <a:t>기간</a:t>
-            </a:r>
-            <a:r>
-              <a:rPr sz="1350" b="0" dirty="0">
-                <a:solidFill>
-                  <a:srgbClr val="1F2328"/>
-                </a:solidFill>
-                <a:latin typeface="나눔고딕OTF" panose="020D0604000000000000" pitchFamily="34" charset="-127"/>
-                <a:ea typeface="나눔고딕OTF" panose="020D0604000000000000" pitchFamily="34" charset="-127"/>
-              </a:rPr>
-              <a:t> · </a:t>
-            </a:r>
-            <a:r>
-              <a:rPr sz="1350" b="0" dirty="0" err="1">
-                <a:solidFill>
-                  <a:srgbClr val="1F2328"/>
-                </a:solidFill>
-                <a:latin typeface="나눔고딕OTF" panose="020D0604000000000000" pitchFamily="34" charset="-127"/>
-                <a:ea typeface="나눔고딕OTF" panose="020D0604000000000000" pitchFamily="34" charset="-127"/>
-              </a:rPr>
-              <a:t>영상물</a:t>
-            </a:r>
-            <a:r>
-              <a:rPr sz="1350" b="0" dirty="0">
-                <a:solidFill>
-                  <a:srgbClr val="1F2328"/>
-                </a:solidFill>
-                <a:latin typeface="나눔고딕OTF" panose="020D0604000000000000" pitchFamily="34" charset="-127"/>
-                <a:ea typeface="나눔고딕OTF" panose="020D0604000000000000" pitchFamily="34" charset="-127"/>
-              </a:rPr>
-              <a:t> </a:t>
-            </a:r>
-            <a:r>
-              <a:rPr sz="1350" b="0" dirty="0" err="1">
-                <a:solidFill>
-                  <a:srgbClr val="1F2328"/>
-                </a:solidFill>
-                <a:latin typeface="나눔고딕OTF" panose="020D0604000000000000" pitchFamily="34" charset="-127"/>
-                <a:ea typeface="나눔고딕OTF" panose="020D0604000000000000" pitchFamily="34" charset="-127"/>
-              </a:rPr>
-              <a:t>종별</a:t>
-            </a:r>
-            <a:r>
-              <a:rPr sz="1350" b="0" dirty="0">
-                <a:solidFill>
-                  <a:srgbClr val="1F2328"/>
-                </a:solidFill>
-                <a:latin typeface="나눔고딕OTF" panose="020D0604000000000000" pitchFamily="34" charset="-127"/>
-                <a:ea typeface="나눔고딕OTF" panose="020D0604000000000000" pitchFamily="34" charset="-127"/>
-              </a:rPr>
-              <a:t> ·</a:t>
-            </a:r>
-          </a:p>
-          <a:p>
-            <a:pPr algn="l">
-              <a:lnSpc>
-                <a:spcPct val="125000"/>
-              </a:lnSpc>
-              <a:spcAft>
-                <a:spcPts val="600"/>
-              </a:spcAft>
-            </a:pPr>
-            <a:r>
-              <a:rPr sz="1350" b="0" dirty="0" err="1">
-                <a:solidFill>
-                  <a:srgbClr val="1F2328"/>
-                </a:solidFill>
-                <a:latin typeface="나눔고딕OTF" panose="020D0604000000000000" pitchFamily="34" charset="-127"/>
-                <a:ea typeface="나눔고딕OTF" panose="020D0604000000000000" pitchFamily="34" charset="-127"/>
-              </a:rPr>
-              <a:t>게임물</a:t>
-            </a:r>
-            <a:r>
-              <a:rPr sz="1350" b="0" dirty="0">
-                <a:solidFill>
-                  <a:srgbClr val="1F2328"/>
-                </a:solidFill>
-                <a:latin typeface="나눔고딕OTF" panose="020D0604000000000000" pitchFamily="34" charset="-127"/>
-                <a:ea typeface="나눔고딕OTF" panose="020D0604000000000000" pitchFamily="34" charset="-127"/>
-              </a:rPr>
-              <a:t> </a:t>
-            </a:r>
-            <a:r>
-              <a:rPr sz="1350" b="0" dirty="0" err="1">
-                <a:solidFill>
-                  <a:srgbClr val="1F2328"/>
-                </a:solidFill>
-                <a:latin typeface="나눔고딕OTF" panose="020D0604000000000000" pitchFamily="34" charset="-127"/>
-                <a:ea typeface="나눔고딕OTF" panose="020D0604000000000000" pitchFamily="34" charset="-127"/>
-              </a:rPr>
-              <a:t>플랫폼</a:t>
-            </a:r>
-            <a:r>
-              <a:rPr sz="1350" b="0" dirty="0">
-                <a:solidFill>
-                  <a:srgbClr val="1F2328"/>
-                </a:solidFill>
-                <a:latin typeface="나눔고딕OTF" panose="020D0604000000000000" pitchFamily="34" charset="-127"/>
-                <a:ea typeface="나눔고딕OTF" panose="020D0604000000000000" pitchFamily="34" charset="-127"/>
-              </a:rPr>
-              <a:t> · </a:t>
-            </a:r>
-            <a:r>
-              <a:rPr sz="1350" b="0" dirty="0" err="1">
-                <a:solidFill>
-                  <a:srgbClr val="1F2328"/>
-                </a:solidFill>
-                <a:latin typeface="나눔고딕OTF" panose="020D0604000000000000" pitchFamily="34" charset="-127"/>
-                <a:ea typeface="나눔고딕OTF" panose="020D0604000000000000" pitchFamily="34" charset="-127"/>
-              </a:rPr>
-              <a:t>성인물</a:t>
-            </a:r>
-            <a:r>
-              <a:rPr sz="1350" b="0" dirty="0">
-                <a:solidFill>
-                  <a:srgbClr val="1F2328"/>
-                </a:solidFill>
-                <a:latin typeface="나눔고딕OTF" panose="020D0604000000000000" pitchFamily="34" charset="-127"/>
-                <a:ea typeface="나눔고딕OTF" panose="020D0604000000000000" pitchFamily="34" charset="-127"/>
-              </a:rPr>
-              <a:t> </a:t>
-            </a:r>
-            <a:r>
-              <a:rPr sz="1350" b="0" dirty="0" err="1">
-                <a:solidFill>
-                  <a:srgbClr val="1F2328"/>
-                </a:solidFill>
-                <a:latin typeface="나눔고딕OTF" panose="020D0604000000000000" pitchFamily="34" charset="-127"/>
-                <a:ea typeface="나눔고딕OTF" panose="020D0604000000000000" pitchFamily="34" charset="-127"/>
-              </a:rPr>
-              <a:t>제외</a:t>
-            </a:r>
-            <a:endParaRPr sz="1350" b="0" dirty="0">
-              <a:solidFill>
-                <a:srgbClr val="1F2328"/>
-              </a:solidFill>
-              <a:latin typeface="나눔고딕OTF" panose="020D0604000000000000" pitchFamily="34" charset="-127"/>
-              <a:ea typeface="나눔고딕OTF" panose="020D0604000000000000" pitchFamily="34" charset="-127"/>
-            </a:endParaRPr>
-          </a:p>
-          <a:p>
-            <a:pPr algn="l">
-              <a:lnSpc>
-                <a:spcPct val="125000"/>
-              </a:lnSpc>
-              <a:spcAft>
-                <a:spcPts val="600"/>
-              </a:spcAft>
-            </a:pPr>
-            <a:endParaRPr sz="1350" b="0" dirty="0">
-              <a:solidFill>
-                <a:srgbClr val="1F2328"/>
-              </a:solidFill>
-              <a:latin typeface="나눔고딕OTF" panose="020D0604000000000000" pitchFamily="34" charset="-127"/>
-              <a:ea typeface="나눔고딕OTF" panose="020D0604000000000000" pitchFamily="34" charset="-127"/>
-            </a:endParaRPr>
-          </a:p>
-          <a:p>
-            <a:pPr algn="l">
-              <a:lnSpc>
-                <a:spcPct val="125000"/>
-              </a:lnSpc>
-              <a:spcAft>
-                <a:spcPts val="600"/>
-              </a:spcAft>
-            </a:pPr>
-            <a:r>
-              <a:rPr sz="1350" b="0" dirty="0" err="1">
-                <a:solidFill>
-                  <a:srgbClr val="1F2328"/>
-                </a:solidFill>
-                <a:latin typeface="나눔고딕OTF" panose="020D0604000000000000" pitchFamily="34" charset="-127"/>
-                <a:ea typeface="나눔고딕OTF" panose="020D0604000000000000" pitchFamily="34" charset="-127"/>
-              </a:rPr>
-              <a:t>필터 변경 시 화면의 해석 문장도</a:t>
-            </a:r>
-            <a:endParaRPr sz="1350" b="0" dirty="0">
-              <a:solidFill>
-                <a:srgbClr val="1F2328"/>
-              </a:solidFill>
-              <a:latin typeface="나눔고딕OTF" panose="020D0604000000000000" pitchFamily="34" charset="-127"/>
-              <a:ea typeface="나눔고딕OTF" panose="020D0604000000000000" pitchFamily="34" charset="-127"/>
-            </a:endParaRPr>
-          </a:p>
-          <a:p>
-            <a:pPr algn="l">
-              <a:lnSpc>
-                <a:spcPct val="125000"/>
-              </a:lnSpc>
-              <a:spcAft>
-                <a:spcPts val="600"/>
-              </a:spcAft>
-            </a:pPr>
-            <a:r>
-              <a:rPr sz="1350" b="0" dirty="0" err="1">
-                <a:solidFill>
-                  <a:srgbClr val="1F2328"/>
-                </a:solidFill>
-                <a:latin typeface="나눔고딕OTF" panose="020D0604000000000000" pitchFamily="34" charset="-127"/>
-                <a:ea typeface="나눔고딕OTF" panose="020D0604000000000000" pitchFamily="34" charset="-127"/>
-              </a:rPr>
-              <a:t>재산출됨</a:t>
-            </a:r>
-          </a:p>
-        </p:txBody>
-      </p:sp>
-      <p:sp>
-        <p:nvSpPr>
-          <p:cNvPr id="7" name="TextBox 6"/>
-          <p:cNvSpPr txBox="1"/>
-          <p:nvPr/>
-        </p:nvSpPr>
-        <p:spPr>
-          <a:xfrm>
-            <a:off x="4369904" y="5525297"/>
-            <a:ext cx="4419600" cy="361637"/>
-          </a:xfrm>
-          <a:prstGeom prst="rect">
-            <a:avLst/>
-          </a:prstGeom>
-          <a:noFill/>
-        </p:spPr>
-        <p:txBody>
-          <a:bodyPr wrap="square">
-            <a:spAutoFit/>
-          </a:bodyPr>
-          <a:lstStyle/>
-          <a:p>
-            <a:pPr algn="l">
-              <a:lnSpc>
-                <a:spcPct val="125000"/>
-              </a:lnSpc>
-              <a:spcAft>
-                <a:spcPts val="600"/>
-              </a:spcAft>
-            </a:pPr>
-            <a:r>
-              <a:rPr sz="1400" dirty="0">
-                <a:solidFill>
-                  <a:srgbClr val="1F3864"/>
-                </a:solidFill>
-                <a:latin typeface="나눔고딕OTF" panose="020D0604000000000000" pitchFamily="34" charset="-127"/>
-                <a:ea typeface="나눔고딕OTF" panose="020D0604000000000000" pitchFamily="34" charset="-127"/>
-                <a:hlinkClick r:id="rId4"/>
-              </a:rPr>
-              <a:t>https://</a:t>
-            </a:r>
-            <a:r>
-              <a:rPr sz="1400" dirty="0" smtClean="0">
-                <a:solidFill>
-                  <a:srgbClr val="1F3864"/>
-                </a:solidFill>
-                <a:latin typeface="나눔고딕OTF" panose="020D0604000000000000" pitchFamily="34" charset="-127"/>
-                <a:ea typeface="나눔고딕OTF" panose="020D0604000000000000" pitchFamily="34" charset="-127"/>
-                <a:hlinkClick r:id="rId4"/>
-              </a:rPr>
-              <a:t>rating-analysis-260910.streamlit.app/</a:t>
-            </a:r>
-            <a:endParaRPr lang="en-US" sz="1400" dirty="0" smtClean="0">
-              <a:solidFill>
-                <a:srgbClr val="1F3864"/>
-              </a:solidFill>
-              <a:latin typeface="나눔고딕OTF" panose="020D0604000000000000" pitchFamily="34" charset="-127"/>
-              <a:ea typeface="나눔고딕OTF" panose="020D0604000000000000" pitchFamily="34" charset="-127"/>
-            </a:endParaRPr>
-          </a:p>
-        </p:txBody>
-      </p:sp>
-    </p:spTree>
-  </p:cSld>
-  <p:clrMapOvr>
-    <a:masterClrMapping/>
-  </p:clrMapOvr>
-  <p:timing>
-    <p:tnLst>
-      <p:par>
-        <p:cTn id="1" dur="indefinite" restart="never" nodeType="tmRoot"/>
-      </p:par>
-    </p:tnLst>
-  </p:timing>
-</p:sld>
-</file>
-
-<file path=ppt/slides/slide16.xml><?xml version="1.0" encoding="utf-8"?>
-<p:sld xmlns:a="http://schemas.openxmlformats.org/drawingml/2006/main" xmlns:r="http://schemas.openxmlformats.org/officeDocument/2006/relationships" xmlns:p="http://schemas.openxmlformats.org/presentationml/2006/main">
-  <p:cSld>
-    <p:spTree>
-      <p:nvGrpSpPr>
-        <p:cNvPr id="1" name=""/>
-        <p:cNvGrpSpPr/>
-        <p:nvPr/>
-      </p:nvGrpSpPr>
-      <p:grpSpPr>
-        <a:xfrm>
-          <a:off x="0" y="0"/>
-          <a:ext cx="0" cy="0"/>
-          <a:chOff x="0" y="0"/>
-          <a:chExt cx="0" cy="0"/>
-        </a:xfrm>
-      </p:grpSpPr>
+      <p:grpSpPr/>
       <p:sp>
         <p:nvSpPr>
           <p:cNvPr id="2" name="TextBox 1"/>
@@ -12302,47 +12191,7 @@
                 <a:latin typeface="나눔고딕OTF" panose="020D0604000000000000" pitchFamily="34" charset="-127"/>
                 <a:ea typeface="나눔고딕OTF" panose="020D0604000000000000" pitchFamily="34" charset="-127"/>
               </a:rPr>
-              <a:t>7. </a:t>
-            </a:r>
-            <a:r>
-              <a:rPr sz="1100" b="0" dirty="0" err="1">
-                <a:solidFill>
-                  <a:srgbClr val="6B7280"/>
-                </a:solidFill>
-                <a:latin typeface="나눔고딕OTF" panose="020D0604000000000000" pitchFamily="34" charset="-127"/>
-                <a:ea typeface="나눔고딕OTF" panose="020D0604000000000000" pitchFamily="34" charset="-127"/>
-              </a:rPr>
-              <a:t>한계와</a:t>
-            </a:r>
-            <a:r>
-              <a:rPr sz="1100" b="0" dirty="0">
-                <a:solidFill>
-                  <a:srgbClr val="6B7280"/>
-                </a:solidFill>
-                <a:latin typeface="나눔고딕OTF" panose="020D0604000000000000" pitchFamily="34" charset="-127"/>
-                <a:ea typeface="나눔고딕OTF" panose="020D0604000000000000" pitchFamily="34" charset="-127"/>
-              </a:rPr>
-              <a:t> </a:t>
-            </a:r>
-            <a:r>
-              <a:rPr sz="1100" b="0" dirty="0" err="1">
-                <a:solidFill>
-                  <a:srgbClr val="6B7280"/>
-                </a:solidFill>
-                <a:latin typeface="나눔고딕OTF" panose="020D0604000000000000" pitchFamily="34" charset="-127"/>
-                <a:ea typeface="나눔고딕OTF" panose="020D0604000000000000" pitchFamily="34" charset="-127"/>
-              </a:rPr>
-              <a:t>배운</a:t>
-            </a:r>
-            <a:r>
-              <a:rPr sz="1100" b="0" dirty="0">
-                <a:solidFill>
-                  <a:srgbClr val="6B7280"/>
-                </a:solidFill>
-                <a:latin typeface="나눔고딕OTF" panose="020D0604000000000000" pitchFamily="34" charset="-127"/>
-                <a:ea typeface="나눔고딕OTF" panose="020D0604000000000000" pitchFamily="34" charset="-127"/>
-              </a:rPr>
-              <a:t> 것</a:t>
+              <a:t>6. 산출물</a:t>
             </a:r>
           </a:p>
         </p:txBody>
@@ -12385,7 +12234,7 @@
                 <a:latin typeface="경기천년제목 Bold" panose="02020803020101020101" pitchFamily="18" charset="-127"/>
                 <a:ea typeface="경기천년제목 Bold" panose="02020803020101020101" pitchFamily="18" charset="-127"/>
               </a:rPr>
-              <a:t>한계와 후속 과제</a:t>
+              <a:t>대시보드를 만든 이유</a:t>
             </a:r>
           </a:p>
         </p:txBody>
@@ -12560,6 +12409,1701 @@
                           <a:latin typeface="나눔고딕OTF" panose="020D0604000000000000" pitchFamily="34" charset="-127"/>
                           <a:ea typeface="나눔고딕OTF" panose="020D0604000000000000" pitchFamily="34" charset="-127"/>
                         </a:rPr>
+                        <a:t>만든 이유</a:t>
+                      </a:r>
+                    </a:p>
+                  </a:txBody>
+                  <a:tcPr>
+                    <a:solidFill>
+                      <a:srgbClr val="FFFFFF"/>
+                    </a:solidFill>
+                  </a:tcPr>
+                </a:tc>
+                <a:tc>
+                  <a:txBody>
+                    <a:bodyPr/>
+                    <a:lstStyle/>
+                    <a:p>
+                      <a:pPr algn="l">
+                        <a:lnSpc>
+                          <a:spcPct val="120000"/>
+                        </a:lnSpc>
+                      </a:pPr>
+                      <a:r>
+                        <a:rPr sz="1250" b="0">
+                          <a:solidFill>
+                            <a:srgbClr val="1F2328"/>
+                          </a:solidFill>
+                          <a:latin typeface="나눔고딕OTF" panose="020D0604000000000000" pitchFamily="34" charset="-127"/>
+                          <a:ea typeface="나눔고딕OTF" panose="020D0604000000000000" pitchFamily="34" charset="-127"/>
+                        </a:rPr>
+                        <a:t>리포트는 고정된 조건의 결과만 제시. 조건을 바꿔도 결론이 유지되는지 직접 확인할 필요가 있었음</a:t>
+                      </a:r>
+                    </a:p>
+                  </a:txBody>
+                  <a:tcPr>
+                    <a:solidFill>
+                      <a:srgbClr val="FFFFFF"/>
+                    </a:solidFill>
+                  </a:tcPr>
+                </a:tc>
+                <a:extLst>
+                  <a:ext uri="{0D108BD9-81ED-4DB2-BD59-A6C34878D82A}">
+                    <a16:rowId xmlns:a16="http://schemas.microsoft.com/office/drawing/2014/main" val="10001"/>
+                  </a:ext>
+                </a:extLst>
+              </a:tr>
+              <a:tr h="566928">
+                <a:tc>
+                  <a:txBody>
+                    <a:bodyPr/>
+                    <a:lstStyle/>
+                    <a:p>
+                      <a:pPr algn="l">
+                        <a:lnSpc>
+                          <a:spcPct val="120000"/>
+                        </a:lnSpc>
+                      </a:pPr>
+                      <a:r>
+                        <a:rPr sz="1250" b="0">
+                          <a:solidFill>
+                            <a:srgbClr val="1F2328"/>
+                          </a:solidFill>
+                          <a:latin typeface="나눔고딕OTF" panose="020D0604000000000000" pitchFamily="34" charset="-127"/>
+                          <a:ea typeface="나눔고딕OTF" panose="020D0604000000000000" pitchFamily="34" charset="-127"/>
+                        </a:rPr>
+                        <a:t>확인할 수 있는 것</a:t>
+                      </a:r>
+                    </a:p>
+                  </a:txBody>
+                  <a:tcPr>
+                    <a:solidFill>
+                      <a:srgbClr val="FAFAF8"/>
+                    </a:solidFill>
+                  </a:tcPr>
+                </a:tc>
+                <a:tc>
+                  <a:txBody>
+                    <a:bodyPr/>
+                    <a:lstStyle/>
+                    <a:p>
+                      <a:pPr algn="l">
+                        <a:lnSpc>
+                          <a:spcPct val="120000"/>
+                        </a:lnSpc>
+                      </a:pPr>
+                      <a:r>
+                        <a:rPr sz="1250" b="0">
+                          <a:solidFill>
+                            <a:srgbClr val="1F2328"/>
+                          </a:solidFill>
+                          <a:latin typeface="나눔고딕OTF" panose="020D0604000000000000" pitchFamily="34" charset="-127"/>
+                          <a:ea typeface="나눔고딕OTF" panose="020D0604000000000000" pitchFamily="34" charset="-127"/>
+                        </a:rPr>
+                        <a:t>등급 결정 규칙의 일치율, 등급을 올린 항목, 신청등급 대비 조정, 매체 간 판정 차이, 공개 데이터의 포괄 범위</a:t>
+                      </a:r>
+                    </a:p>
+                  </a:txBody>
+                  <a:tcPr>
+                    <a:solidFill>
+                      <a:srgbClr val="FAFAF8"/>
+                    </a:solidFill>
+                  </a:tcPr>
+                </a:tc>
+                <a:extLst>
+                  <a:ext uri="{0D108BD9-81ED-4DB2-BD59-A6C34878D82A}">
+                    <a16:rowId xmlns:a16="http://schemas.microsoft.com/office/drawing/2014/main" val="10002"/>
+                  </a:ext>
+                </a:extLst>
+              </a:tr>
+              <a:tr h="566928">
+                <a:tc>
+                  <a:txBody>
+                    <a:bodyPr/>
+                    <a:lstStyle/>
+                    <a:p>
+                      <a:pPr algn="l">
+                        <a:lnSpc>
+                          <a:spcPct val="120000"/>
+                        </a:lnSpc>
+                      </a:pPr>
+                      <a:r>
+                        <a:rPr sz="1250" b="0">
+                          <a:solidFill>
+                            <a:srgbClr val="1F2328"/>
+                          </a:solidFill>
+                          <a:latin typeface="나눔고딕OTF" panose="020D0604000000000000" pitchFamily="34" charset="-127"/>
+                          <a:ea typeface="나눔고딕OTF" panose="020D0604000000000000" pitchFamily="34" charset="-127"/>
+                        </a:rPr>
+                        <a:t>조건 변경</a:t>
+                      </a:r>
+                    </a:p>
+                  </a:txBody>
+                  <a:tcPr>
+                    <a:solidFill>
+                      <a:srgbClr val="FFFFFF"/>
+                    </a:solidFill>
+                  </a:tcPr>
+                </a:tc>
+                <a:tc>
+                  <a:txBody>
+                    <a:bodyPr/>
+                    <a:lstStyle/>
+                    <a:p>
+                      <a:pPr algn="l">
+                        <a:lnSpc>
+                          <a:spcPct val="120000"/>
+                        </a:lnSpc>
+                      </a:pPr>
+                      <a:r>
+                        <a:rPr sz="1250" b="0">
+                          <a:solidFill>
+                            <a:srgbClr val="1F2328"/>
+                          </a:solidFill>
+                          <a:latin typeface="나눔고딕OTF" panose="020D0604000000000000" pitchFamily="34" charset="-127"/>
+                          <a:ea typeface="나눔고딕OTF" panose="020D0604000000000000" pitchFamily="34" charset="-127"/>
+                        </a:rPr>
+                        <a:t>기간·영상물 종별·게임물 플랫폼·성인물 제외를 바꾸면 수치와 해석 문장이 함께 재산출</a:t>
+                      </a:r>
+                    </a:p>
+                  </a:txBody>
+                  <a:tcPr>
+                    <a:solidFill>
+                      <a:srgbClr val="FFFFFF"/>
+                    </a:solidFill>
+                  </a:tcPr>
+                </a:tc>
+                <a:extLst>
+                  <a:ext uri="{0D108BD9-81ED-4DB2-BD59-A6C34878D82A}">
+                    <a16:rowId xmlns:a16="http://schemas.microsoft.com/office/drawing/2014/main" val="10003"/>
+                  </a:ext>
+                </a:extLst>
+              </a:tr>
+              <a:tr h="566928">
+                <a:tc>
+                  <a:txBody>
+                    <a:bodyPr/>
+                    <a:lstStyle/>
+                    <a:p>
+                      <a:pPr algn="l">
+                        <a:lnSpc>
+                          <a:spcPct val="120000"/>
+                        </a:lnSpc>
+                      </a:pPr>
+                      <a:r>
+                        <a:rPr sz="1250" b="0">
+                          <a:solidFill>
+                            <a:srgbClr val="1F2328"/>
+                          </a:solidFill>
+                          <a:latin typeface="나눔고딕OTF" panose="020D0604000000000000" pitchFamily="34" charset="-127"/>
+                          <a:ea typeface="나눔고딕OTF" panose="020D0604000000000000" pitchFamily="34" charset="-127"/>
+                        </a:rPr>
+                        <a:t>한계의 내장</a:t>
+                      </a:r>
+                    </a:p>
+                  </a:txBody>
+                  <a:tcPr>
+                    <a:solidFill>
+                      <a:srgbClr val="FAFAF8"/>
+                    </a:solidFill>
+                  </a:tcPr>
+                </a:tc>
+                <a:tc>
+                  <a:txBody>
+                    <a:bodyPr/>
+                    <a:lstStyle/>
+                    <a:p>
+                      <a:pPr algn="l">
+                        <a:lnSpc>
+                          <a:spcPct val="120000"/>
+                        </a:lnSpc>
+                      </a:pPr>
+                      <a:r>
+                        <a:rPr sz="1250" b="0">
+                          <a:solidFill>
+                            <a:srgbClr val="1F2328"/>
+                          </a:solidFill>
+                          <a:latin typeface="나눔고딕OTF" panose="020D0604000000000000" pitchFamily="34" charset="-127"/>
+                          <a:ea typeface="나눔고딕OTF" panose="020D0604000000000000" pitchFamily="34" charset="-127"/>
+                        </a:rPr>
+                        <a:t>4단계 기준을 고르면 비교가 성립하지 않는다는 경고를 표시. 표본 미달 구간은 제시하지 않음</a:t>
+                      </a:r>
+                    </a:p>
+                  </a:txBody>
+                  <a:tcPr>
+                    <a:solidFill>
+                      <a:srgbClr val="FAFAF8"/>
+                    </a:solidFill>
+                  </a:tcPr>
+                </a:tc>
+                <a:extLst>
+                  <a:ext uri="{0D108BD9-81ED-4DB2-BD59-A6C34878D82A}">
+                    <a16:rowId xmlns:a16="http://schemas.microsoft.com/office/drawing/2014/main" val="10004"/>
+                  </a:ext>
+                </a:extLst>
+              </a:tr>
+              <a:tr h="566928">
+                <a:tc>
+                  <a:txBody>
+                    <a:bodyPr/>
+                    <a:lstStyle/>
+                    <a:p>
+                      <a:pPr algn="l">
+                        <a:lnSpc>
+                          <a:spcPct val="120000"/>
+                        </a:lnSpc>
+                      </a:pPr>
+                      <a:r>
+                        <a:rPr sz="1250" b="0" dirty="0" err="1">
+                          <a:solidFill>
+                            <a:srgbClr val="1F2328"/>
+                          </a:solidFill>
+                          <a:latin typeface="나눔고딕OTF" panose="020D0604000000000000" pitchFamily="34" charset="-127"/>
+                          <a:ea typeface="나눔고딕OTF" panose="020D0604000000000000" pitchFamily="34" charset="-127"/>
+                        </a:rPr>
+                        <a:t>개별 건 확인</a:t>
+                      </a:r>
+                      <a:endParaRPr sz="1250" b="0" dirty="0">
+                        <a:solidFill>
+                          <a:srgbClr val="1F2328"/>
+                        </a:solidFill>
+                        <a:latin typeface="나눔고딕OTF" panose="020D0604000000000000" pitchFamily="34" charset="-127"/>
+                        <a:ea typeface="나눔고딕OTF" panose="020D0604000000000000" pitchFamily="34" charset="-127"/>
+                      </a:endParaRPr>
+                    </a:p>
+                  </a:txBody>
+                  <a:tcPr>
+                    <a:solidFill>
+                      <a:srgbClr val="FFFFFF"/>
+                    </a:solidFill>
+                  </a:tcPr>
+                </a:tc>
+                <a:tc>
+                  <a:txBody>
+                    <a:bodyPr/>
+                    <a:lstStyle/>
+                    <a:p>
+                      <a:pPr algn="l">
+                        <a:lnSpc>
+                          <a:spcPct val="120000"/>
+                        </a:lnSpc>
+                      </a:pPr>
+                      <a:r>
+                        <a:rPr sz="1250" b="0" dirty="0">
+                          <a:solidFill>
+                            <a:srgbClr val="1F2328"/>
+                          </a:solidFill>
+                          <a:latin typeface="나눔고딕OTF" panose="020D0604000000000000" pitchFamily="34" charset="-127"/>
+                          <a:ea typeface="나눔고딕OTF" panose="020D0604000000000000" pitchFamily="34" charset="-127"/>
+                        </a:rPr>
+                        <a:t>조건에 맞는 원자료를 화면에서 조회하고 전건을 CSV 로 내려받기 가능</a:t>
+                      </a:r>
+                    </a:p>
+                  </a:txBody>
+                  <a:tcPr>
+                    <a:solidFill>
+                      <a:srgbClr val="FFFFFF"/>
+                    </a:solidFill>
+                  </a:tcPr>
+                </a:tc>
+                <a:extLst>
+                  <a:ext uri="{0D108BD9-81ED-4DB2-BD59-A6C34878D82A}">
+                    <a16:rowId xmlns:a16="http://schemas.microsoft.com/office/drawing/2014/main" val="10005"/>
+                  </a:ext>
+                </a:extLst>
+              </a:tr>
+            </a:tbl>
+          </a:graphicData>
+        </a:graphic>
+      </p:graphicFrame>
+      <p:sp>
+        <p:nvSpPr>
+          <p:cNvPr id="7" name="TextBox 6"/>
+          <p:cNvSpPr txBox="1"/>
+          <p:nvPr/>
+        </p:nvSpPr>
+        <p:spPr>
+          <a:xfrm>
+            <a:off x="548640" y="4892040"/>
+            <a:ext cx="11064240" cy="861774"/>
+          </a:xfrm>
+          <a:prstGeom prst="rect">
+            <a:avLst/>
+          </a:prstGeom>
+          <a:noFill/>
+        </p:spPr>
+        <p:txBody>
+          <a:bodyPr wrap="square">
+            <a:spAutoFit/>
+          </a:bodyPr>
+          <a:lstStyle/>
+          <a:p>
+            <a:pPr algn="l">
+              <a:lnSpc>
+                <a:spcPct val="125000"/>
+              </a:lnSpc>
+              <a:spcAft>
+                <a:spcPts val="600"/>
+              </a:spcAft>
+            </a:pPr>
+            <a:r>
+              <a:rPr sz="2000" b="1" dirty="0" err="1">
+                <a:solidFill>
+                  <a:srgbClr val="1F3864"/>
+                </a:solidFill>
+                <a:latin typeface="나눔고딕OTF" panose="020D0604000000000000" pitchFamily="34" charset="-127"/>
+                <a:ea typeface="나눔고딕OTF" panose="020D0604000000000000" pitchFamily="34" charset="-127"/>
+              </a:rPr>
+              <a:t>리포트가 '무엇을 확인했는가'라면, 대시보드는 '조건을 바꿔도 그러한가'를 직접 확인하는 도구</a:t>
+            </a:r>
+            <a:br>
+              <a:rPr sz="2000" b="1" dirty="0" err="1">
+                <a:solidFill>
+                  <a:srgbClr val="1F3864"/>
+                </a:solidFill>
+                <a:latin typeface="나눔고딕OTF" panose="020D0604000000000000" pitchFamily="34" charset="-127"/>
+                <a:ea typeface="나눔고딕OTF" panose="020D0604000000000000" pitchFamily="34" charset="-127"/>
+              </a:rPr>
+            </a:br>
+          </a:p>
+        </p:txBody>
+      </p:sp>
+    </p:spTree>
+  </p:cSld>
+  <p:clrMapOvr>
+    <a:masterClrMapping/>
+  </p:clrMapOvr>
+</p:sld>
+</file>
+
+<file path=ppt/slides/slide17.xml><?xml version="1.0" encoding="utf-8"?>
+<p:sld xmlns:a="http://schemas.openxmlformats.org/drawingml/2006/main" xmlns:r="http://schemas.openxmlformats.org/officeDocument/2006/relationships" xmlns:p="http://schemas.openxmlformats.org/presentationml/2006/main">
+  <p:cSld>
+    <p:spTree>
+      <p:nvGrpSpPr>
+        <p:cNvPr id="1" name=""/>
+        <p:cNvGrpSpPr/>
+        <p:nvPr/>
+      </p:nvGrpSpPr>
+      <p:grpSpPr>
+        <a:xfrm>
+          <a:off x="0" y="0"/>
+          <a:ext cx="0" cy="0"/>
+          <a:chOff x="0" y="0"/>
+          <a:chExt cx="0" cy="0"/>
+        </a:xfrm>
+      </p:grpSpPr>
+      <p:sp>
+        <p:nvSpPr>
+          <p:cNvPr id="2" name="TextBox 1"/>
+          <p:cNvSpPr txBox="1"/>
+          <p:nvPr/>
+        </p:nvSpPr>
+        <p:spPr>
+          <a:xfrm>
+            <a:off x="457200" y="310896"/>
+            <a:ext cx="5486400" cy="303929"/>
+          </a:xfrm>
+          <a:prstGeom prst="rect">
+            <a:avLst/>
+          </a:prstGeom>
+          <a:noFill/>
+        </p:spPr>
+        <p:txBody>
+          <a:bodyPr wrap="square">
+            <a:spAutoFit/>
+          </a:bodyPr>
+          <a:lstStyle/>
+          <a:p>
+            <a:pPr algn="l">
+              <a:lnSpc>
+                <a:spcPct val="125000"/>
+              </a:lnSpc>
+              <a:spcAft>
+                <a:spcPts val="600"/>
+              </a:spcAft>
+            </a:pPr>
+            <a:r>
+              <a:rPr sz="1100" b="0">
+                <a:solidFill>
+                  <a:srgbClr val="6B7280"/>
+                </a:solidFill>
+                <a:latin typeface="나눔고딕OTF" panose="020D0604000000000000" pitchFamily="34" charset="-127"/>
+                <a:ea typeface="나눔고딕OTF" panose="020D0604000000000000" pitchFamily="34" charset="-127"/>
+              </a:rPr>
+              <a:t>6. 산출물</a:t>
+            </a:r>
+          </a:p>
+        </p:txBody>
+      </p:sp>
+      <p:sp>
+        <p:nvSpPr>
+          <p:cNvPr id="3" name="TextBox 2"/>
+          <p:cNvSpPr txBox="1"/>
+          <p:nvPr/>
+        </p:nvSpPr>
+        <p:spPr>
+          <a:xfrm>
+            <a:off x="457200" y="530352"/>
+            <a:ext cx="11247120" cy="592470"/>
+          </a:xfrm>
+          <a:prstGeom prst="rect">
+            <a:avLst/>
+          </a:prstGeom>
+          <a:noFill/>
+        </p:spPr>
+        <p:txBody>
+          <a:bodyPr wrap="square">
+            <a:spAutoFit/>
+          </a:bodyPr>
+          <a:lstStyle/>
+          <a:p>
+            <a:pPr algn="l">
+              <a:lnSpc>
+                <a:spcPct val="125000"/>
+              </a:lnSpc>
+              <a:spcAft>
+                <a:spcPts val="600"/>
+              </a:spcAft>
+            </a:pPr>
+            <a:r>
+              <a:rPr sz="2600" b="1">
+                <a:solidFill>
+                  <a:srgbClr val="1F3864"/>
+                </a:solidFill>
+                <a:latin typeface="경기천년제목 Bold" panose="02020803020101020101" pitchFamily="18" charset="-127"/>
+                <a:ea typeface="경기천년제목 Bold" panose="02020803020101020101" pitchFamily="18" charset="-127"/>
+              </a:rPr>
+              <a:t>대시보드: 화면 하나당 분석 질문 하나</a:t>
+            </a:r>
+          </a:p>
+        </p:txBody>
+      </p:sp>
+      <p:sp>
+        <p:nvSpPr>
+          <p:cNvPr id="4" name="Rectangle 3"/>
+          <p:cNvSpPr/>
+          <p:nvPr/>
+        </p:nvSpPr>
+        <p:spPr>
+          <a:xfrm>
+            <a:off x="457200" y="1024128"/>
+            <a:ext cx="11274552" cy="32004"/>
+          </a:xfrm>
+          <a:prstGeom prst="rect">
+            <a:avLst/>
+          </a:prstGeom>
+          <a:solidFill>
+            <a:srgbClr val="1F3864"/>
+          </a:solidFill>
+          <a:ln>
+            <a:noFill/>
+          </a:ln>
+          <a:effectLst/>
+        </p:spPr>
+        <p:style>
+          <a:lnRef idx="1">
+            <a:schemeClr val="accent1"/>
+          </a:lnRef>
+          <a:fillRef idx="3">
+            <a:schemeClr val="accent1"/>
+          </a:fillRef>
+          <a:effectRef idx="2">
+            <a:schemeClr val="accent1"/>
+          </a:effectRef>
+          <a:fontRef idx="minor">
+            <a:schemeClr val="lt1"/>
+          </a:fontRef>
+        </p:style>
+        <p:txBody>
+          <a:bodyPr rtlCol="0" anchor="ctr"/>
+          <a:lstStyle/>
+          <a:p>
+            <a:pPr algn="ctr"/>
+            <a:endParaRPr>
+              <a:latin typeface="경기천년제목 Bold" panose="02020803020101020101" pitchFamily="18" charset="-127"/>
+              <a:ea typeface="경기천년제목 Bold" panose="02020803020101020101" pitchFamily="18" charset="-127"/>
+            </a:endParaRPr>
+          </a:p>
+        </p:txBody>
+      </p:sp>
+      <p:pic>
+        <p:nvPicPr>
+          <p:cNvPr id="5" name="Picture 4" descr="dashboard.jpg"/>
+          <p:cNvPicPr>
+            <a:picLocks noChangeAspect="1"/>
+          </p:cNvPicPr>
+          <p:nvPr/>
+        </p:nvPicPr>
+        <p:blipFill>
+          <a:blip r:embed="rId3"/>
+          <a:stretch>
+            <a:fillRect/>
+          </a:stretch>
+        </p:blipFill>
+        <p:spPr>
+          <a:xfrm>
+            <a:off x="548640" y="1371600"/>
+            <a:ext cx="7589520" cy="4209488"/>
+          </a:xfrm>
+          <a:prstGeom prst="rect">
+            <a:avLst/>
+          </a:prstGeom>
+        </p:spPr>
+      </p:pic>
+      <p:sp>
+        <p:nvSpPr>
+          <p:cNvPr id="6" name="TextBox 5"/>
+          <p:cNvSpPr txBox="1"/>
+          <p:nvPr/>
+        </p:nvSpPr>
+        <p:spPr>
+          <a:xfrm>
+            <a:off x="8412480" y="1463040"/>
+            <a:ext cx="3383280" cy="4054956"/>
+          </a:xfrm>
+          <a:prstGeom prst="rect">
+            <a:avLst/>
+          </a:prstGeom>
+          <a:noFill/>
+        </p:spPr>
+        <p:txBody>
+          <a:bodyPr wrap="square">
+            <a:spAutoFit/>
+          </a:bodyPr>
+          <a:lstStyle/>
+          <a:p>
+            <a:pPr algn="l">
+              <a:lnSpc>
+                <a:spcPct val="125000"/>
+              </a:lnSpc>
+              <a:spcAft>
+                <a:spcPts val="600"/>
+              </a:spcAft>
+            </a:pPr>
+            <a:r>
+              <a:rPr sz="1350" b="0" dirty="0">
+                <a:solidFill>
+                  <a:srgbClr val="1F2328"/>
+                </a:solidFill>
+                <a:latin typeface="나눔고딕OTF" panose="020D0604000000000000" pitchFamily="34" charset="-127"/>
+                <a:ea typeface="나눔고딕OTF" panose="020D0604000000000000" pitchFamily="34" charset="-127"/>
+              </a:rPr>
+              <a:t>① </a:t>
+            </a:r>
+            <a:r>
+              <a:rPr sz="1350" b="0" dirty="0" err="1">
+                <a:solidFill>
+                  <a:srgbClr val="1F2328"/>
+                </a:solidFill>
+                <a:latin typeface="나눔고딕OTF" panose="020D0604000000000000" pitchFamily="34" charset="-127"/>
+                <a:ea typeface="나눔고딕OTF" panose="020D0604000000000000" pitchFamily="34" charset="-127"/>
+              </a:rPr>
+              <a:t>등급</a:t>
+            </a:r>
+            <a:r>
+              <a:rPr sz="1350" b="0" dirty="0">
+                <a:solidFill>
+                  <a:srgbClr val="1F2328"/>
+                </a:solidFill>
+                <a:latin typeface="나눔고딕OTF" panose="020D0604000000000000" pitchFamily="34" charset="-127"/>
+                <a:ea typeface="나눔고딕OTF" panose="020D0604000000000000" pitchFamily="34" charset="-127"/>
+              </a:rPr>
+              <a:t> </a:t>
+            </a:r>
+            <a:r>
+              <a:rPr sz="1350" b="0" dirty="0" err="1">
+                <a:solidFill>
+                  <a:srgbClr val="1F2328"/>
+                </a:solidFill>
+                <a:latin typeface="나눔고딕OTF" panose="020D0604000000000000" pitchFamily="34" charset="-127"/>
+                <a:ea typeface="나눔고딕OTF" panose="020D0604000000000000" pitchFamily="34" charset="-127"/>
+              </a:rPr>
+              <a:t>결정</a:t>
+            </a:r>
+            <a:r>
+              <a:rPr sz="1350" b="0" dirty="0">
+                <a:solidFill>
+                  <a:srgbClr val="1F2328"/>
+                </a:solidFill>
+                <a:latin typeface="나눔고딕OTF" panose="020D0604000000000000" pitchFamily="34" charset="-127"/>
+                <a:ea typeface="나눔고딕OTF" panose="020D0604000000000000" pitchFamily="34" charset="-127"/>
+              </a:rPr>
+              <a:t> </a:t>
+            </a:r>
+            <a:r>
+              <a:rPr sz="1350" b="0" dirty="0" err="1">
+                <a:solidFill>
+                  <a:srgbClr val="1F2328"/>
+                </a:solidFill>
+                <a:latin typeface="나눔고딕OTF" panose="020D0604000000000000" pitchFamily="34" charset="-127"/>
+                <a:ea typeface="나눔고딕OTF" panose="020D0604000000000000" pitchFamily="34" charset="-127"/>
+              </a:rPr>
+              <a:t>기준</a:t>
+            </a:r>
+            <a:endParaRPr sz="1350" b="0" dirty="0">
+              <a:solidFill>
+                <a:srgbClr val="1F2328"/>
+              </a:solidFill>
+              <a:latin typeface="나눔고딕OTF" panose="020D0604000000000000" pitchFamily="34" charset="-127"/>
+              <a:ea typeface="나눔고딕OTF" panose="020D0604000000000000" pitchFamily="34" charset="-127"/>
+            </a:endParaRPr>
+          </a:p>
+          <a:p>
+            <a:pPr algn="l">
+              <a:lnSpc>
+                <a:spcPct val="125000"/>
+              </a:lnSpc>
+              <a:spcAft>
+                <a:spcPts val="600"/>
+              </a:spcAft>
+            </a:pPr>
+            <a:r>
+              <a:rPr sz="1350" b="0" dirty="0">
+                <a:solidFill>
+                  <a:srgbClr val="1F2328"/>
+                </a:solidFill>
+                <a:latin typeface="나눔고딕OTF" panose="020D0604000000000000" pitchFamily="34" charset="-127"/>
+                <a:ea typeface="나눔고딕OTF" panose="020D0604000000000000" pitchFamily="34" charset="-127"/>
+              </a:rPr>
+              <a:t>② </a:t>
+            </a:r>
+            <a:r>
+              <a:rPr sz="1350" b="0" dirty="0" err="1">
+                <a:solidFill>
+                  <a:srgbClr val="1F2328"/>
+                </a:solidFill>
+                <a:latin typeface="나눔고딕OTF" panose="020D0604000000000000" pitchFamily="34" charset="-127"/>
+                <a:ea typeface="나눔고딕OTF" panose="020D0604000000000000" pitchFamily="34" charset="-127"/>
+              </a:rPr>
+              <a:t>등급</a:t>
+            </a:r>
+            <a:r>
+              <a:rPr sz="1350" b="0" dirty="0">
+                <a:solidFill>
+                  <a:srgbClr val="1F2328"/>
+                </a:solidFill>
+                <a:latin typeface="나눔고딕OTF" panose="020D0604000000000000" pitchFamily="34" charset="-127"/>
+                <a:ea typeface="나눔고딕OTF" panose="020D0604000000000000" pitchFamily="34" charset="-127"/>
+              </a:rPr>
+              <a:t> </a:t>
+            </a:r>
+            <a:r>
+              <a:rPr sz="1350" b="0" dirty="0" err="1">
+                <a:solidFill>
+                  <a:srgbClr val="1F2328"/>
+                </a:solidFill>
+                <a:latin typeface="나눔고딕OTF" panose="020D0604000000000000" pitchFamily="34" charset="-127"/>
+                <a:ea typeface="나눔고딕OTF" panose="020D0604000000000000" pitchFamily="34" charset="-127"/>
+              </a:rPr>
+              <a:t>상향</a:t>
+            </a:r>
+            <a:r>
+              <a:rPr sz="1350" b="0" dirty="0">
+                <a:solidFill>
+                  <a:srgbClr val="1F2328"/>
+                </a:solidFill>
+                <a:latin typeface="나눔고딕OTF" panose="020D0604000000000000" pitchFamily="34" charset="-127"/>
+                <a:ea typeface="나눔고딕OTF" panose="020D0604000000000000" pitchFamily="34" charset="-127"/>
+              </a:rPr>
+              <a:t> </a:t>
+            </a:r>
+            <a:r>
+              <a:rPr sz="1350" b="0" dirty="0" err="1">
+                <a:solidFill>
+                  <a:srgbClr val="1F2328"/>
+                </a:solidFill>
+                <a:latin typeface="나눔고딕OTF" panose="020D0604000000000000" pitchFamily="34" charset="-127"/>
+                <a:ea typeface="나눔고딕OTF" panose="020D0604000000000000" pitchFamily="34" charset="-127"/>
+              </a:rPr>
+              <a:t>요인</a:t>
+            </a:r>
+            <a:endParaRPr sz="1350" b="0" dirty="0">
+              <a:solidFill>
+                <a:srgbClr val="1F2328"/>
+              </a:solidFill>
+              <a:latin typeface="나눔고딕OTF" panose="020D0604000000000000" pitchFamily="34" charset="-127"/>
+              <a:ea typeface="나눔고딕OTF" panose="020D0604000000000000" pitchFamily="34" charset="-127"/>
+            </a:endParaRPr>
+          </a:p>
+          <a:p>
+            <a:pPr algn="l">
+              <a:lnSpc>
+                <a:spcPct val="125000"/>
+              </a:lnSpc>
+              <a:spcAft>
+                <a:spcPts val="600"/>
+              </a:spcAft>
+            </a:pPr>
+            <a:r>
+              <a:rPr sz="1350" b="0" dirty="0">
+                <a:solidFill>
+                  <a:srgbClr val="1F2328"/>
+                </a:solidFill>
+                <a:latin typeface="나눔고딕OTF" panose="020D0604000000000000" pitchFamily="34" charset="-127"/>
+                <a:ea typeface="나눔고딕OTF" panose="020D0604000000000000" pitchFamily="34" charset="-127"/>
+              </a:rPr>
+              <a:t>③ </a:t>
+            </a:r>
+            <a:r>
+              <a:rPr sz="1350" b="0" dirty="0" err="1">
+                <a:solidFill>
+                  <a:srgbClr val="1F2328"/>
+                </a:solidFill>
+                <a:latin typeface="나눔고딕OTF" panose="020D0604000000000000" pitchFamily="34" charset="-127"/>
+                <a:ea typeface="나눔고딕OTF" panose="020D0604000000000000" pitchFamily="34" charset="-127"/>
+              </a:rPr>
+              <a:t>신청등급</a:t>
+            </a:r>
+            <a:r>
+              <a:rPr sz="1350" b="0" dirty="0">
+                <a:solidFill>
+                  <a:srgbClr val="1F2328"/>
+                </a:solidFill>
+                <a:latin typeface="나눔고딕OTF" panose="020D0604000000000000" pitchFamily="34" charset="-127"/>
+                <a:ea typeface="나눔고딕OTF" panose="020D0604000000000000" pitchFamily="34" charset="-127"/>
+              </a:rPr>
+              <a:t> </a:t>
+            </a:r>
+            <a:r>
+              <a:rPr sz="1350" b="0" dirty="0" err="1">
+                <a:solidFill>
+                  <a:srgbClr val="1F2328"/>
+                </a:solidFill>
+                <a:latin typeface="나눔고딕OTF" panose="020D0604000000000000" pitchFamily="34" charset="-127"/>
+                <a:ea typeface="나눔고딕OTF" panose="020D0604000000000000" pitchFamily="34" charset="-127"/>
+              </a:rPr>
+              <a:t>대비</a:t>
+            </a:r>
+            <a:r>
+              <a:rPr sz="1350" b="0" dirty="0">
+                <a:solidFill>
+                  <a:srgbClr val="1F2328"/>
+                </a:solidFill>
+                <a:latin typeface="나눔고딕OTF" panose="020D0604000000000000" pitchFamily="34" charset="-127"/>
+                <a:ea typeface="나눔고딕OTF" panose="020D0604000000000000" pitchFamily="34" charset="-127"/>
+              </a:rPr>
+              <a:t> </a:t>
+            </a:r>
+            <a:r>
+              <a:rPr sz="1350" b="0" dirty="0" err="1">
+                <a:solidFill>
+                  <a:srgbClr val="1F2328"/>
+                </a:solidFill>
+                <a:latin typeface="나눔고딕OTF" panose="020D0604000000000000" pitchFamily="34" charset="-127"/>
+                <a:ea typeface="나눔고딕OTF" panose="020D0604000000000000" pitchFamily="34" charset="-127"/>
+              </a:rPr>
+              <a:t>조정</a:t>
+            </a:r>
+            <a:endParaRPr sz="1350" b="0" dirty="0">
+              <a:solidFill>
+                <a:srgbClr val="1F2328"/>
+              </a:solidFill>
+              <a:latin typeface="나눔고딕OTF" panose="020D0604000000000000" pitchFamily="34" charset="-127"/>
+              <a:ea typeface="나눔고딕OTF" panose="020D0604000000000000" pitchFamily="34" charset="-127"/>
+            </a:endParaRPr>
+          </a:p>
+          <a:p>
+            <a:pPr algn="l">
+              <a:lnSpc>
+                <a:spcPct val="125000"/>
+              </a:lnSpc>
+              <a:spcAft>
+                <a:spcPts val="600"/>
+              </a:spcAft>
+            </a:pPr>
+            <a:r>
+              <a:rPr sz="1350" b="0" dirty="0">
+                <a:solidFill>
+                  <a:srgbClr val="1F2328"/>
+                </a:solidFill>
+                <a:latin typeface="나눔고딕OTF" panose="020D0604000000000000" pitchFamily="34" charset="-127"/>
+                <a:ea typeface="나눔고딕OTF" panose="020D0604000000000000" pitchFamily="34" charset="-127"/>
+              </a:rPr>
+              <a:t>④ </a:t>
+            </a:r>
+            <a:r>
+              <a:rPr sz="1350" b="0" dirty="0" err="1">
+                <a:solidFill>
+                  <a:srgbClr val="1F2328"/>
+                </a:solidFill>
+                <a:latin typeface="나눔고딕OTF" panose="020D0604000000000000" pitchFamily="34" charset="-127"/>
+                <a:ea typeface="나눔고딕OTF" panose="020D0604000000000000" pitchFamily="34" charset="-127"/>
+              </a:rPr>
+              <a:t>매체</a:t>
+            </a:r>
+            <a:r>
+              <a:rPr sz="1350" b="0" dirty="0">
+                <a:solidFill>
+                  <a:srgbClr val="1F2328"/>
+                </a:solidFill>
+                <a:latin typeface="나눔고딕OTF" panose="020D0604000000000000" pitchFamily="34" charset="-127"/>
+                <a:ea typeface="나눔고딕OTF" panose="020D0604000000000000" pitchFamily="34" charset="-127"/>
+              </a:rPr>
+              <a:t> 간 </a:t>
+            </a:r>
+            <a:r>
+              <a:rPr sz="1350" b="0" dirty="0" err="1">
+                <a:solidFill>
+                  <a:srgbClr val="1F2328"/>
+                </a:solidFill>
+                <a:latin typeface="나눔고딕OTF" panose="020D0604000000000000" pitchFamily="34" charset="-127"/>
+                <a:ea typeface="나눔고딕OTF" panose="020D0604000000000000" pitchFamily="34" charset="-127"/>
+              </a:rPr>
+              <a:t>판정</a:t>
+            </a:r>
+            <a:r>
+              <a:rPr sz="1350" b="0" dirty="0">
+                <a:solidFill>
+                  <a:srgbClr val="1F2328"/>
+                </a:solidFill>
+                <a:latin typeface="나눔고딕OTF" panose="020D0604000000000000" pitchFamily="34" charset="-127"/>
+                <a:ea typeface="나눔고딕OTF" panose="020D0604000000000000" pitchFamily="34" charset="-127"/>
+              </a:rPr>
+              <a:t> </a:t>
+            </a:r>
+            <a:r>
+              <a:rPr sz="1350" b="0" dirty="0" err="1">
+                <a:solidFill>
+                  <a:srgbClr val="1F2328"/>
+                </a:solidFill>
+                <a:latin typeface="나눔고딕OTF" panose="020D0604000000000000" pitchFamily="34" charset="-127"/>
+                <a:ea typeface="나눔고딕OTF" panose="020D0604000000000000" pitchFamily="34" charset="-127"/>
+              </a:rPr>
+              <a:t>차이</a:t>
+            </a:r>
+            <a:endParaRPr sz="1350" b="0" dirty="0">
+              <a:solidFill>
+                <a:srgbClr val="1F2328"/>
+              </a:solidFill>
+              <a:latin typeface="나눔고딕OTF" panose="020D0604000000000000" pitchFamily="34" charset="-127"/>
+              <a:ea typeface="나눔고딕OTF" panose="020D0604000000000000" pitchFamily="34" charset="-127"/>
+            </a:endParaRPr>
+          </a:p>
+          <a:p>
+            <a:pPr algn="l">
+              <a:lnSpc>
+                <a:spcPct val="125000"/>
+              </a:lnSpc>
+              <a:spcAft>
+                <a:spcPts val="600"/>
+              </a:spcAft>
+            </a:pPr>
+            <a:r>
+              <a:rPr sz="1350" b="0" dirty="0">
+                <a:solidFill>
+                  <a:srgbClr val="1F2328"/>
+                </a:solidFill>
+                <a:latin typeface="나눔고딕OTF" panose="020D0604000000000000" pitchFamily="34" charset="-127"/>
+                <a:ea typeface="나눔고딕OTF" panose="020D0604000000000000" pitchFamily="34" charset="-127"/>
+              </a:rPr>
+              <a:t>⑤ </a:t>
+            </a:r>
+            <a:r>
+              <a:rPr sz="1350" b="0" dirty="0" err="1">
+                <a:solidFill>
+                  <a:srgbClr val="1F2328"/>
+                </a:solidFill>
+                <a:latin typeface="나눔고딕OTF" panose="020D0604000000000000" pitchFamily="34" charset="-127"/>
+                <a:ea typeface="나눔고딕OTF" panose="020D0604000000000000" pitchFamily="34" charset="-127"/>
+              </a:rPr>
+              <a:t>공개</a:t>
+            </a:r>
+            <a:r>
+              <a:rPr sz="1350" b="0" dirty="0">
+                <a:solidFill>
+                  <a:srgbClr val="1F2328"/>
+                </a:solidFill>
+                <a:latin typeface="나눔고딕OTF" panose="020D0604000000000000" pitchFamily="34" charset="-127"/>
+                <a:ea typeface="나눔고딕OTF" panose="020D0604000000000000" pitchFamily="34" charset="-127"/>
+              </a:rPr>
+              <a:t> </a:t>
+            </a:r>
+            <a:r>
+              <a:rPr sz="1350" b="0" dirty="0" err="1">
+                <a:solidFill>
+                  <a:srgbClr val="1F2328"/>
+                </a:solidFill>
+                <a:latin typeface="나눔고딕OTF" panose="020D0604000000000000" pitchFamily="34" charset="-127"/>
+                <a:ea typeface="나눔고딕OTF" panose="020D0604000000000000" pitchFamily="34" charset="-127"/>
+              </a:rPr>
+              <a:t>데이터</a:t>
+            </a:r>
+            <a:r>
+              <a:rPr sz="1350" b="0" dirty="0">
+                <a:solidFill>
+                  <a:srgbClr val="1F2328"/>
+                </a:solidFill>
+                <a:latin typeface="나눔고딕OTF" panose="020D0604000000000000" pitchFamily="34" charset="-127"/>
+                <a:ea typeface="나눔고딕OTF" panose="020D0604000000000000" pitchFamily="34" charset="-127"/>
+              </a:rPr>
+              <a:t> </a:t>
+            </a:r>
+            <a:r>
+              <a:rPr sz="1350" b="0" dirty="0" err="1">
+                <a:solidFill>
+                  <a:srgbClr val="1F2328"/>
+                </a:solidFill>
+                <a:latin typeface="나눔고딕OTF" panose="020D0604000000000000" pitchFamily="34" charset="-127"/>
+                <a:ea typeface="나눔고딕OTF" panose="020D0604000000000000" pitchFamily="34" charset="-127"/>
+              </a:rPr>
+              <a:t>포괄</a:t>
+            </a:r>
+            <a:r>
+              <a:rPr sz="1350" b="0" dirty="0">
+                <a:solidFill>
+                  <a:srgbClr val="1F2328"/>
+                </a:solidFill>
+                <a:latin typeface="나눔고딕OTF" panose="020D0604000000000000" pitchFamily="34" charset="-127"/>
+                <a:ea typeface="나눔고딕OTF" panose="020D0604000000000000" pitchFamily="34" charset="-127"/>
+              </a:rPr>
+              <a:t> </a:t>
+            </a:r>
+            <a:r>
+              <a:rPr sz="1350" b="0" dirty="0" err="1">
+                <a:solidFill>
+                  <a:srgbClr val="1F2328"/>
+                </a:solidFill>
+                <a:latin typeface="나눔고딕OTF" panose="020D0604000000000000" pitchFamily="34" charset="-127"/>
+                <a:ea typeface="나눔고딕OTF" panose="020D0604000000000000" pitchFamily="34" charset="-127"/>
+              </a:rPr>
+              <a:t>범위</a:t>
+            </a:r>
+            <a:endParaRPr sz="1350" b="0" dirty="0">
+              <a:solidFill>
+                <a:srgbClr val="1F2328"/>
+              </a:solidFill>
+              <a:latin typeface="나눔고딕OTF" panose="020D0604000000000000" pitchFamily="34" charset="-127"/>
+              <a:ea typeface="나눔고딕OTF" panose="020D0604000000000000" pitchFamily="34" charset="-127"/>
+            </a:endParaRPr>
+          </a:p>
+          <a:p>
+            <a:pPr algn="l">
+              <a:lnSpc>
+                <a:spcPct val="125000"/>
+              </a:lnSpc>
+              <a:spcAft>
+                <a:spcPts val="600"/>
+              </a:spcAft>
+            </a:pPr>
+            <a:r>
+              <a:rPr sz="1350" b="0" dirty="0">
+                <a:solidFill>
+                  <a:srgbClr val="1F2328"/>
+                </a:solidFill>
+                <a:latin typeface="나눔고딕OTF" panose="020D0604000000000000" pitchFamily="34" charset="-127"/>
+                <a:ea typeface="나눔고딕OTF" panose="020D0604000000000000" pitchFamily="34" charset="-127"/>
+              </a:rPr>
+              <a:t>⑥ </a:t>
+            </a:r>
+            <a:r>
+              <a:rPr sz="1350" b="0" dirty="0" err="1">
+                <a:solidFill>
+                  <a:srgbClr val="1F2328"/>
+                </a:solidFill>
+                <a:latin typeface="나눔고딕OTF" panose="020D0604000000000000" pitchFamily="34" charset="-127"/>
+                <a:ea typeface="나눔고딕OTF" panose="020D0604000000000000" pitchFamily="34" charset="-127"/>
+              </a:rPr>
+              <a:t>개별</a:t>
+            </a:r>
+            <a:r>
+              <a:rPr sz="1350" b="0" dirty="0">
+                <a:solidFill>
+                  <a:srgbClr val="1F2328"/>
+                </a:solidFill>
+                <a:latin typeface="나눔고딕OTF" panose="020D0604000000000000" pitchFamily="34" charset="-127"/>
+                <a:ea typeface="나눔고딕OTF" panose="020D0604000000000000" pitchFamily="34" charset="-127"/>
+              </a:rPr>
+              <a:t> 건 </a:t>
+            </a:r>
+            <a:r>
+              <a:rPr sz="1350" b="0" dirty="0" err="1">
+                <a:solidFill>
+                  <a:srgbClr val="1F2328"/>
+                </a:solidFill>
+                <a:latin typeface="나눔고딕OTF" panose="020D0604000000000000" pitchFamily="34" charset="-127"/>
+                <a:ea typeface="나눔고딕OTF" panose="020D0604000000000000" pitchFamily="34" charset="-127"/>
+              </a:rPr>
+              <a:t>조회</a:t>
+            </a:r>
+            <a:endParaRPr sz="1350" b="0" dirty="0">
+              <a:solidFill>
+                <a:srgbClr val="1F2328"/>
+              </a:solidFill>
+              <a:latin typeface="나눔고딕OTF" panose="020D0604000000000000" pitchFamily="34" charset="-127"/>
+              <a:ea typeface="나눔고딕OTF" panose="020D0604000000000000" pitchFamily="34" charset="-127"/>
+            </a:endParaRPr>
+          </a:p>
+          <a:p>
+            <a:pPr algn="l">
+              <a:lnSpc>
+                <a:spcPct val="125000"/>
+              </a:lnSpc>
+              <a:spcAft>
+                <a:spcPts val="600"/>
+              </a:spcAft>
+            </a:pPr>
+            <a:endParaRPr sz="1350" b="0" dirty="0">
+              <a:solidFill>
+                <a:srgbClr val="1F2328"/>
+              </a:solidFill>
+              <a:latin typeface="나눔고딕OTF" panose="020D0604000000000000" pitchFamily="34" charset="-127"/>
+              <a:ea typeface="나눔고딕OTF" panose="020D0604000000000000" pitchFamily="34" charset="-127"/>
+            </a:endParaRPr>
+          </a:p>
+          <a:p>
+            <a:pPr algn="l">
+              <a:lnSpc>
+                <a:spcPct val="125000"/>
+              </a:lnSpc>
+              <a:spcAft>
+                <a:spcPts val="600"/>
+              </a:spcAft>
+            </a:pPr>
+            <a:r>
+              <a:rPr sz="1350" b="0" dirty="0" err="1">
+                <a:solidFill>
+                  <a:srgbClr val="1F2328"/>
+                </a:solidFill>
+                <a:latin typeface="나눔고딕OTF" panose="020D0604000000000000" pitchFamily="34" charset="-127"/>
+                <a:ea typeface="나눔고딕OTF" panose="020D0604000000000000" pitchFamily="34" charset="-127"/>
+              </a:rPr>
+              <a:t>공통</a:t>
+            </a:r>
+            <a:r>
+              <a:rPr sz="1350" b="0" dirty="0">
+                <a:solidFill>
+                  <a:srgbClr val="1F2328"/>
+                </a:solidFill>
+                <a:latin typeface="나눔고딕OTF" panose="020D0604000000000000" pitchFamily="34" charset="-127"/>
+                <a:ea typeface="나눔고딕OTF" panose="020D0604000000000000" pitchFamily="34" charset="-127"/>
+              </a:rPr>
+              <a:t> </a:t>
+            </a:r>
+            <a:r>
+              <a:rPr sz="1350" b="0" dirty="0" err="1">
+                <a:solidFill>
+                  <a:srgbClr val="1F2328"/>
+                </a:solidFill>
+                <a:latin typeface="나눔고딕OTF" panose="020D0604000000000000" pitchFamily="34" charset="-127"/>
+                <a:ea typeface="나눔고딕OTF" panose="020D0604000000000000" pitchFamily="34" charset="-127"/>
+              </a:rPr>
+              <a:t>필터</a:t>
+            </a:r>
+            <a:r>
+              <a:rPr sz="1350" b="0" dirty="0">
+                <a:solidFill>
+                  <a:srgbClr val="1F2328"/>
+                </a:solidFill>
+                <a:latin typeface="나눔고딕OTF" panose="020D0604000000000000" pitchFamily="34" charset="-127"/>
+                <a:ea typeface="나눔고딕OTF" panose="020D0604000000000000" pitchFamily="34" charset="-127"/>
+              </a:rPr>
+              <a:t>: </a:t>
+            </a:r>
+            <a:r>
+              <a:rPr sz="1350" b="0" dirty="0" err="1">
+                <a:solidFill>
+                  <a:srgbClr val="1F2328"/>
+                </a:solidFill>
+                <a:latin typeface="나눔고딕OTF" panose="020D0604000000000000" pitchFamily="34" charset="-127"/>
+                <a:ea typeface="나눔고딕OTF" panose="020D0604000000000000" pitchFamily="34" charset="-127"/>
+              </a:rPr>
+              <a:t>기간</a:t>
+            </a:r>
+            <a:r>
+              <a:rPr sz="1350" b="0" dirty="0">
+                <a:solidFill>
+                  <a:srgbClr val="1F2328"/>
+                </a:solidFill>
+                <a:latin typeface="나눔고딕OTF" panose="020D0604000000000000" pitchFamily="34" charset="-127"/>
+                <a:ea typeface="나눔고딕OTF" panose="020D0604000000000000" pitchFamily="34" charset="-127"/>
+              </a:rPr>
+              <a:t> · </a:t>
+            </a:r>
+            <a:r>
+              <a:rPr sz="1350" b="0" dirty="0" err="1">
+                <a:solidFill>
+                  <a:srgbClr val="1F2328"/>
+                </a:solidFill>
+                <a:latin typeface="나눔고딕OTF" panose="020D0604000000000000" pitchFamily="34" charset="-127"/>
+                <a:ea typeface="나눔고딕OTF" panose="020D0604000000000000" pitchFamily="34" charset="-127"/>
+              </a:rPr>
+              <a:t>영상물</a:t>
+            </a:r>
+            <a:r>
+              <a:rPr sz="1350" b="0" dirty="0">
+                <a:solidFill>
+                  <a:srgbClr val="1F2328"/>
+                </a:solidFill>
+                <a:latin typeface="나눔고딕OTF" panose="020D0604000000000000" pitchFamily="34" charset="-127"/>
+                <a:ea typeface="나눔고딕OTF" panose="020D0604000000000000" pitchFamily="34" charset="-127"/>
+              </a:rPr>
+              <a:t> </a:t>
+            </a:r>
+            <a:r>
+              <a:rPr sz="1350" b="0" dirty="0" err="1">
+                <a:solidFill>
+                  <a:srgbClr val="1F2328"/>
+                </a:solidFill>
+                <a:latin typeface="나눔고딕OTF" panose="020D0604000000000000" pitchFamily="34" charset="-127"/>
+                <a:ea typeface="나눔고딕OTF" panose="020D0604000000000000" pitchFamily="34" charset="-127"/>
+              </a:rPr>
+              <a:t>종별</a:t>
+            </a:r>
+            <a:r>
+              <a:rPr sz="1350" b="0" dirty="0">
+                <a:solidFill>
+                  <a:srgbClr val="1F2328"/>
+                </a:solidFill>
+                <a:latin typeface="나눔고딕OTF" panose="020D0604000000000000" pitchFamily="34" charset="-127"/>
+                <a:ea typeface="나눔고딕OTF" panose="020D0604000000000000" pitchFamily="34" charset="-127"/>
+              </a:rPr>
+              <a:t> ·</a:t>
+            </a:r>
+          </a:p>
+          <a:p>
+            <a:pPr algn="l">
+              <a:lnSpc>
+                <a:spcPct val="125000"/>
+              </a:lnSpc>
+              <a:spcAft>
+                <a:spcPts val="600"/>
+              </a:spcAft>
+            </a:pPr>
+            <a:r>
+              <a:rPr sz="1350" b="0" dirty="0" err="1">
+                <a:solidFill>
+                  <a:srgbClr val="1F2328"/>
+                </a:solidFill>
+                <a:latin typeface="나눔고딕OTF" panose="020D0604000000000000" pitchFamily="34" charset="-127"/>
+                <a:ea typeface="나눔고딕OTF" panose="020D0604000000000000" pitchFamily="34" charset="-127"/>
+              </a:rPr>
+              <a:t>게임물</a:t>
+            </a:r>
+            <a:r>
+              <a:rPr sz="1350" b="0" dirty="0">
+                <a:solidFill>
+                  <a:srgbClr val="1F2328"/>
+                </a:solidFill>
+                <a:latin typeface="나눔고딕OTF" panose="020D0604000000000000" pitchFamily="34" charset="-127"/>
+                <a:ea typeface="나눔고딕OTF" panose="020D0604000000000000" pitchFamily="34" charset="-127"/>
+              </a:rPr>
+              <a:t> </a:t>
+            </a:r>
+            <a:r>
+              <a:rPr sz="1350" b="0" dirty="0" err="1">
+                <a:solidFill>
+                  <a:srgbClr val="1F2328"/>
+                </a:solidFill>
+                <a:latin typeface="나눔고딕OTF" panose="020D0604000000000000" pitchFamily="34" charset="-127"/>
+                <a:ea typeface="나눔고딕OTF" panose="020D0604000000000000" pitchFamily="34" charset="-127"/>
+              </a:rPr>
+              <a:t>플랫폼</a:t>
+            </a:r>
+            <a:r>
+              <a:rPr sz="1350" b="0" dirty="0">
+                <a:solidFill>
+                  <a:srgbClr val="1F2328"/>
+                </a:solidFill>
+                <a:latin typeface="나눔고딕OTF" panose="020D0604000000000000" pitchFamily="34" charset="-127"/>
+                <a:ea typeface="나눔고딕OTF" panose="020D0604000000000000" pitchFamily="34" charset="-127"/>
+              </a:rPr>
+              <a:t> · </a:t>
+            </a:r>
+            <a:r>
+              <a:rPr sz="1350" b="0" dirty="0" err="1">
+                <a:solidFill>
+                  <a:srgbClr val="1F2328"/>
+                </a:solidFill>
+                <a:latin typeface="나눔고딕OTF" panose="020D0604000000000000" pitchFamily="34" charset="-127"/>
+                <a:ea typeface="나눔고딕OTF" panose="020D0604000000000000" pitchFamily="34" charset="-127"/>
+              </a:rPr>
+              <a:t>성인물</a:t>
+            </a:r>
+            <a:r>
+              <a:rPr sz="1350" b="0" dirty="0">
+                <a:solidFill>
+                  <a:srgbClr val="1F2328"/>
+                </a:solidFill>
+                <a:latin typeface="나눔고딕OTF" panose="020D0604000000000000" pitchFamily="34" charset="-127"/>
+                <a:ea typeface="나눔고딕OTF" panose="020D0604000000000000" pitchFamily="34" charset="-127"/>
+              </a:rPr>
+              <a:t> </a:t>
+            </a:r>
+            <a:r>
+              <a:rPr sz="1350" b="0" dirty="0" err="1">
+                <a:solidFill>
+                  <a:srgbClr val="1F2328"/>
+                </a:solidFill>
+                <a:latin typeface="나눔고딕OTF" panose="020D0604000000000000" pitchFamily="34" charset="-127"/>
+                <a:ea typeface="나눔고딕OTF" panose="020D0604000000000000" pitchFamily="34" charset="-127"/>
+              </a:rPr>
+              <a:t>제외</a:t>
+            </a:r>
+            <a:endParaRPr sz="1350" b="0" dirty="0">
+              <a:solidFill>
+                <a:srgbClr val="1F2328"/>
+              </a:solidFill>
+              <a:latin typeface="나눔고딕OTF" panose="020D0604000000000000" pitchFamily="34" charset="-127"/>
+              <a:ea typeface="나눔고딕OTF" panose="020D0604000000000000" pitchFamily="34" charset="-127"/>
+            </a:endParaRPr>
+          </a:p>
+          <a:p>
+            <a:pPr algn="l">
+              <a:lnSpc>
+                <a:spcPct val="125000"/>
+              </a:lnSpc>
+              <a:spcAft>
+                <a:spcPts val="600"/>
+              </a:spcAft>
+            </a:pPr>
+            <a:endParaRPr sz="1350" b="0" dirty="0">
+              <a:solidFill>
+                <a:srgbClr val="1F2328"/>
+              </a:solidFill>
+              <a:latin typeface="나눔고딕OTF" panose="020D0604000000000000" pitchFamily="34" charset="-127"/>
+              <a:ea typeface="나눔고딕OTF" panose="020D0604000000000000" pitchFamily="34" charset="-127"/>
+            </a:endParaRPr>
+          </a:p>
+          <a:p>
+            <a:pPr algn="l">
+              <a:lnSpc>
+                <a:spcPct val="125000"/>
+              </a:lnSpc>
+              <a:spcAft>
+                <a:spcPts val="600"/>
+              </a:spcAft>
+            </a:pPr>
+            <a:r>
+              <a:rPr sz="1350" b="0" dirty="0" err="1">
+                <a:solidFill>
+                  <a:srgbClr val="1F2328"/>
+                </a:solidFill>
+                <a:latin typeface="나눔고딕OTF" panose="020D0604000000000000" pitchFamily="34" charset="-127"/>
+                <a:ea typeface="나눔고딕OTF" panose="020D0604000000000000" pitchFamily="34" charset="-127"/>
+              </a:rPr>
+              <a:t>필터 변경 시 화면의 해석 문장도</a:t>
+            </a:r>
+            <a:endParaRPr sz="1350" b="0" dirty="0">
+              <a:solidFill>
+                <a:srgbClr val="1F2328"/>
+              </a:solidFill>
+              <a:latin typeface="나눔고딕OTF" panose="020D0604000000000000" pitchFamily="34" charset="-127"/>
+              <a:ea typeface="나눔고딕OTF" panose="020D0604000000000000" pitchFamily="34" charset="-127"/>
+            </a:endParaRPr>
+          </a:p>
+          <a:p>
+            <a:pPr algn="l">
+              <a:lnSpc>
+                <a:spcPct val="125000"/>
+              </a:lnSpc>
+              <a:spcAft>
+                <a:spcPts val="600"/>
+              </a:spcAft>
+            </a:pPr>
+            <a:r>
+              <a:rPr sz="1350" b="0" dirty="0" err="1">
+                <a:solidFill>
+                  <a:srgbClr val="1F2328"/>
+                </a:solidFill>
+                <a:latin typeface="나눔고딕OTF" panose="020D0604000000000000" pitchFamily="34" charset="-127"/>
+                <a:ea typeface="나눔고딕OTF" panose="020D0604000000000000" pitchFamily="34" charset="-127"/>
+              </a:rPr>
+              <a:t>재산출됨</a:t>
+            </a:r>
+          </a:p>
+        </p:txBody>
+      </p:sp>
+      <p:sp>
+        <p:nvSpPr>
+          <p:cNvPr id="7" name="TextBox 6"/>
+          <p:cNvSpPr txBox="1"/>
+          <p:nvPr/>
+        </p:nvSpPr>
+        <p:spPr>
+          <a:xfrm>
+            <a:off x="4369904" y="5525297"/>
+            <a:ext cx="4419600" cy="361637"/>
+          </a:xfrm>
+          <a:prstGeom prst="rect">
+            <a:avLst/>
+          </a:prstGeom>
+          <a:noFill/>
+        </p:spPr>
+        <p:txBody>
+          <a:bodyPr wrap="square">
+            <a:spAutoFit/>
+          </a:bodyPr>
+          <a:lstStyle/>
+          <a:p>
+            <a:pPr algn="l">
+              <a:lnSpc>
+                <a:spcPct val="125000"/>
+              </a:lnSpc>
+              <a:spcAft>
+                <a:spcPts val="600"/>
+              </a:spcAft>
+            </a:pPr>
+            <a:r>
+              <a:rPr sz="1400" dirty="0">
+                <a:solidFill>
+                  <a:srgbClr val="1F3864"/>
+                </a:solidFill>
+                <a:latin typeface="나눔고딕OTF" panose="020D0604000000000000" pitchFamily="34" charset="-127"/>
+                <a:ea typeface="나눔고딕OTF" panose="020D0604000000000000" pitchFamily="34" charset="-127"/>
+                <a:hlinkClick r:id="rId4"/>
+              </a:rPr>
+              <a:t>https://</a:t>
+            </a:r>
+            <a:r>
+              <a:rPr sz="1400" dirty="0" smtClean="0">
+                <a:solidFill>
+                  <a:srgbClr val="1F3864"/>
+                </a:solidFill>
+                <a:latin typeface="나눔고딕OTF" panose="020D0604000000000000" pitchFamily="34" charset="-127"/>
+                <a:ea typeface="나눔고딕OTF" panose="020D0604000000000000" pitchFamily="34" charset="-127"/>
+                <a:hlinkClick r:id="rId4"/>
+              </a:rPr>
+              <a:t>rating-analysis-260910.streamlit.app/</a:t>
+            </a:r>
+            <a:endParaRPr lang="en-US" sz="1400" dirty="0" smtClean="0">
+              <a:solidFill>
+                <a:srgbClr val="1F3864"/>
+              </a:solidFill>
+              <a:latin typeface="나눔고딕OTF" panose="020D0604000000000000" pitchFamily="34" charset="-127"/>
+              <a:ea typeface="나눔고딕OTF" panose="020D0604000000000000" pitchFamily="34" charset="-127"/>
+            </a:endParaRPr>
+          </a:p>
+        </p:txBody>
+      </p:sp>
+    </p:spTree>
+  </p:cSld>
+  <p:clrMapOvr>
+    <a:masterClrMapping/>
+  </p:clrMapOvr>
+  <p:timing>
+    <p:tnLst>
+      <p:par>
+        <p:cTn id="1" dur="indefinite" restart="never" nodeType="tmRoot"/>
+      </p:par>
+    </p:tnLst>
+  </p:timing>
+</p:sld>
+</file>
+
+<file path=ppt/slides/slide18.xml><?xml version="1.0" encoding="utf-8"?>
+<p:sld xmlns:a="http://schemas.openxmlformats.org/drawingml/2006/main" xmlns:r="http://schemas.openxmlformats.org/officeDocument/2006/relationships" xmlns:p="http://schemas.openxmlformats.org/presentationml/2006/main">
+  <p:cSld>
+    <p:spTree>
+      <p:nvGrpSpPr>
+        <p:cNvPr id="1" name=""/>
+        <p:cNvGrpSpPr/>
+        <p:nvPr/>
+      </p:nvGrpSpPr>
+      <p:grpSpPr>
+        <a:xfrm>
+          <a:off x="0" y="0"/>
+          <a:ext cx="0" cy="0"/>
+          <a:chOff x="0" y="0"/>
+          <a:chExt cx="0" cy="0"/>
+        </a:xfrm>
+      </p:grpSpPr>
+      <p:sp>
+        <p:nvSpPr>
+          <p:cNvPr id="2" name="TextBox 1"/>
+          <p:cNvSpPr txBox="1"/>
+          <p:nvPr/>
+        </p:nvSpPr>
+        <p:spPr>
+          <a:xfrm>
+            <a:off x="457200" y="310896"/>
+            <a:ext cx="5486400" cy="293350"/>
+          </a:xfrm>
+          <a:prstGeom prst="rect">
+            <a:avLst/>
+          </a:prstGeom>
+          <a:noFill/>
+        </p:spPr>
+        <p:txBody>
+          <a:bodyPr wrap="square">
+            <a:spAutoFit/>
+          </a:bodyPr>
+          <a:lstStyle/>
+          <a:p>
+            <a:pPr algn="l">
+              <a:lnSpc>
+                <a:spcPct val="125000"/>
+              </a:lnSpc>
+              <a:spcAft>
+                <a:spcPts val="600"/>
+              </a:spcAft>
+            </a:pPr>
+            <a:r>
+              <a:rPr sz="1100" b="0" dirty="0">
+                <a:solidFill>
+                  <a:srgbClr val="6B7280"/>
+                </a:solidFill>
+                <a:latin typeface="나눔고딕OTF" panose="020D0604000000000000" pitchFamily="34" charset="-127"/>
+                <a:ea typeface="나눔고딕OTF" panose="020D0604000000000000" pitchFamily="34" charset="-127"/>
+              </a:rPr>
+              <a:t>7. </a:t>
+            </a:r>
+            <a:r>
+              <a:rPr sz="1100" b="0" dirty="0" err="1">
+                <a:solidFill>
+                  <a:srgbClr val="6B7280"/>
+                </a:solidFill>
+                <a:latin typeface="나눔고딕OTF" panose="020D0604000000000000" pitchFamily="34" charset="-127"/>
+                <a:ea typeface="나눔고딕OTF" panose="020D0604000000000000" pitchFamily="34" charset="-127"/>
+              </a:rPr>
+              <a:t>한계와</a:t>
+            </a:r>
+            <a:r>
+              <a:rPr sz="1100" b="0" dirty="0">
+                <a:solidFill>
+                  <a:srgbClr val="6B7280"/>
+                </a:solidFill>
+                <a:latin typeface="나눔고딕OTF" panose="020D0604000000000000" pitchFamily="34" charset="-127"/>
+                <a:ea typeface="나눔고딕OTF" panose="020D0604000000000000" pitchFamily="34" charset="-127"/>
+              </a:rPr>
+              <a:t> </a:t>
+            </a:r>
+            <a:r>
+              <a:rPr sz="1100" b="0" dirty="0" err="1">
+                <a:solidFill>
+                  <a:srgbClr val="6B7280"/>
+                </a:solidFill>
+                <a:latin typeface="나눔고딕OTF" panose="020D0604000000000000" pitchFamily="34" charset="-127"/>
+                <a:ea typeface="나눔고딕OTF" panose="020D0604000000000000" pitchFamily="34" charset="-127"/>
+              </a:rPr>
+              <a:t>배운</a:t>
+            </a:r>
+            <a:r>
+              <a:rPr sz="1100" b="0" dirty="0">
+                <a:solidFill>
+                  <a:srgbClr val="6B7280"/>
+                </a:solidFill>
+                <a:latin typeface="나눔고딕OTF" panose="020D0604000000000000" pitchFamily="34" charset="-127"/>
+                <a:ea typeface="나눔고딕OTF" panose="020D0604000000000000" pitchFamily="34" charset="-127"/>
+              </a:rPr>
+              <a:t> 것</a:t>
+            </a:r>
+          </a:p>
+        </p:txBody>
+      </p:sp>
+      <p:sp>
+        <p:nvSpPr>
+          <p:cNvPr id="3" name="TextBox 2"/>
+          <p:cNvSpPr txBox="1"/>
+          <p:nvPr/>
+        </p:nvSpPr>
+        <p:spPr>
+          <a:xfrm>
+            <a:off x="457200" y="530352"/>
+            <a:ext cx="11247120" cy="547458"/>
+          </a:xfrm>
+          <a:prstGeom prst="rect">
+            <a:avLst/>
+          </a:prstGeom>
+          <a:noFill/>
+        </p:spPr>
+        <p:txBody>
+          <a:bodyPr wrap="square">
+            <a:spAutoFit/>
+          </a:bodyPr>
+          <a:lstStyle/>
+          <a:p>
+            <a:pPr algn="l">
+              <a:lnSpc>
+                <a:spcPct val="125000"/>
+              </a:lnSpc>
+              <a:spcAft>
+                <a:spcPts val="600"/>
+              </a:spcAft>
+            </a:pPr>
+            <a:r>
+              <a:rPr sz="2600" b="1">
+                <a:solidFill>
+                  <a:srgbClr val="1F3864"/>
+                </a:solidFill>
+                <a:latin typeface="경기천년제목 Bold" panose="02020803020101020101" pitchFamily="18" charset="-127"/>
+                <a:ea typeface="경기천년제목 Bold" panose="02020803020101020101" pitchFamily="18" charset="-127"/>
+              </a:rPr>
+              <a:t>한계와 후속 과제</a:t>
+            </a:r>
+          </a:p>
+        </p:txBody>
+      </p:sp>
+      <p:sp>
+        <p:nvSpPr>
+          <p:cNvPr id="4" name="Rectangle 3"/>
+          <p:cNvSpPr/>
+          <p:nvPr/>
+        </p:nvSpPr>
+        <p:spPr>
+          <a:xfrm>
+            <a:off x="457200" y="1024128"/>
+            <a:ext cx="11274552" cy="32004"/>
+          </a:xfrm>
+          <a:prstGeom prst="rect">
+            <a:avLst/>
+          </a:prstGeom>
+          <a:solidFill>
+            <a:srgbClr val="1F3864"/>
+          </a:solidFill>
+          <a:ln>
+            <a:noFill/>
+          </a:ln>
+          <a:effectLst/>
+        </p:spPr>
+        <p:style>
+          <a:lnRef idx="1">
+            <a:schemeClr val="accent1"/>
+          </a:lnRef>
+          <a:fillRef idx="3">
+            <a:schemeClr val="accent1"/>
+          </a:fillRef>
+          <a:effectRef idx="2">
+            <a:schemeClr val="accent1"/>
+          </a:effectRef>
+          <a:fontRef idx="minor">
+            <a:schemeClr val="lt1"/>
+          </a:fontRef>
+        </p:style>
+        <p:txBody>
+          <a:bodyPr rtlCol="0" anchor="ctr"/>
+          <a:lstStyle/>
+          <a:p>
+            <a:pPr algn="ctr"/>
+            <a:endParaRPr>
+              <a:latin typeface="경기천년제목 Bold" panose="02020803020101020101" pitchFamily="18" charset="-127"/>
+              <a:ea typeface="경기천년제목 Bold" panose="02020803020101020101" pitchFamily="18" charset="-127"/>
+            </a:endParaRPr>
+          </a:p>
+        </p:txBody>
+      </p:sp>
+      <p:graphicFrame>
+        <p:nvGraphicFramePr>
+          <p:cNvPr id="5" name="Table 4"/>
+          <p:cNvGraphicFramePr>
+            <a:graphicFrameLocks noGrp="1"/>
+          </p:cNvGraphicFramePr>
+          <p:nvPr>
+            <p:extLst>
+              <p:ext uri="{D42A27DB-BD31-4B8C-83A1-F6EECF244321}">
+                <p14:modId xmlns:p14="http://schemas.microsoft.com/office/powerpoint/2010/main" val="745327631"/>
+              </p:ext>
+            </p:extLst>
+          </p:nvPr>
+        </p:nvGraphicFramePr>
+        <p:xfrm>
+          <a:off x="548640" y="1417320"/>
+          <a:ext cx="11064239" cy="3218688"/>
+        </p:xfrm>
+        <a:graphic>
+          <a:graphicData uri="http://schemas.openxmlformats.org/drawingml/2006/table">
+            <a:tbl>
+              <a:tblPr>
+                <a:tableStyleId>{5C22544A-7EE6-4342-B048-85BDC9FD1C3A}</a:tableStyleId>
+              </a:tblPr>
+              <a:tblGrid>
+                <a:gridCol w="2194560">
+                  <a:extLst>
+                    <a:ext uri="{9D8B030D-6E8A-4147-A177-3AD203B41FA5}">
+                      <a16:colId xmlns:a16="http://schemas.microsoft.com/office/drawing/2014/main" val="20000"/>
+                    </a:ext>
+                  </a:extLst>
+                </a:gridCol>
+                <a:gridCol w="8869679">
+                  <a:extLst>
+                    <a:ext uri="{9D8B030D-6E8A-4147-A177-3AD203B41FA5}">
+                      <a16:colId xmlns:a16="http://schemas.microsoft.com/office/drawing/2014/main" val="20001"/>
+                    </a:ext>
+                  </a:extLst>
+                </a:gridCol>
+              </a:tblGrid>
+              <a:tr h="384048">
+                <a:tc>
+                  <a:txBody>
+                    <a:bodyPr/>
+                    <a:lstStyle/>
+                    <a:p>
+                      <a:pPr algn="l">
+                        <a:lnSpc>
+                          <a:spcPct val="120000"/>
+                        </a:lnSpc>
+                      </a:pPr>
+                      <a:r>
+                        <a:rPr sz="1250" b="1">
+                          <a:solidFill>
+                            <a:srgbClr val="1F3864"/>
+                          </a:solidFill>
+                          <a:latin typeface="나눔고딕OTF" panose="020D0604000000000000" pitchFamily="34" charset="-127"/>
+                          <a:ea typeface="나눔고딕OTF" panose="020D0604000000000000" pitchFamily="34" charset="-127"/>
+                        </a:rPr>
+                        <a:t>구분</a:t>
+                      </a:r>
+                    </a:p>
+                  </a:txBody>
+                  <a:tcPr>
+                    <a:solidFill>
+                      <a:srgbClr val="EEF1F6"/>
+                    </a:solidFill>
+                  </a:tcPr>
+                </a:tc>
+                <a:tc>
+                  <a:txBody>
+                    <a:bodyPr/>
+                    <a:lstStyle/>
+                    <a:p>
+                      <a:pPr algn="l">
+                        <a:lnSpc>
+                          <a:spcPct val="120000"/>
+                        </a:lnSpc>
+                      </a:pPr>
+                      <a:r>
+                        <a:rPr sz="1250" b="1">
+                          <a:solidFill>
+                            <a:srgbClr val="1F3864"/>
+                          </a:solidFill>
+                          <a:latin typeface="나눔고딕OTF" panose="020D0604000000000000" pitchFamily="34" charset="-127"/>
+                          <a:ea typeface="나눔고딕OTF" panose="020D0604000000000000" pitchFamily="34" charset="-127"/>
+                        </a:rPr>
+                        <a:t>내용</a:t>
+                      </a:r>
+                    </a:p>
+                  </a:txBody>
+                  <a:tcPr>
+                    <a:solidFill>
+                      <a:srgbClr val="EEF1F6"/>
+                    </a:solidFill>
+                  </a:tcPr>
+                </a:tc>
+                <a:extLst>
+                  <a:ext uri="{0D108BD9-81ED-4DB2-BD59-A6C34878D82A}">
+                    <a16:rowId xmlns:a16="http://schemas.microsoft.com/office/drawing/2014/main" val="10000"/>
+                  </a:ext>
+                </a:extLst>
+              </a:tr>
+              <a:tr h="566928">
+                <a:tc>
+                  <a:txBody>
+                    <a:bodyPr/>
+                    <a:lstStyle/>
+                    <a:p>
+                      <a:pPr algn="l">
+                        <a:lnSpc>
+                          <a:spcPct val="120000"/>
+                        </a:lnSpc>
+                      </a:pPr>
+                      <a:r>
+                        <a:rPr sz="1250" b="0">
+                          <a:solidFill>
+                            <a:srgbClr val="1F2328"/>
+                          </a:solidFill>
+                          <a:latin typeface="나눔고딕OTF" panose="020D0604000000000000" pitchFamily="34" charset="-127"/>
+                          <a:ea typeface="나눔고딕OTF" panose="020D0604000000000000" pitchFamily="34" charset="-127"/>
+                        </a:rPr>
                         <a:t>표본의 범위</a:t>
                       </a:r>
                     </a:p>
@@ -12992,7 +14536,7 @@
 </p:sld>
 </file>
 
-<file path=ppt/slides/slide17.xml><?xml version="1.0" encoding="utf-8"?>
+<file path=ppt/slides/slide19.xml><?xml version="1.0" encoding="utf-8"?>
 <p:sld xmlns:a="http://schemas.openxmlformats.org/drawingml/2006/main" xmlns:r="http://schemas.openxmlformats.org/officeDocument/2006/relationships" xmlns:p="http://schemas.openxmlformats.org/presentationml/2006/main">
   <p:cSld>
     <p:spTree>
@@ -13705,679 +15249,6 @@
                 <a:ea typeface="나눔고딕OTF" panose="020D0604000000000000" pitchFamily="34" charset="-127"/>
               </a:rPr>
               <a:t>비율 비교에 앞서 대상 집단의 구성을 먼저 통제할 필요</a:t>
-            </a:r>
-          </a:p>
-        </p:txBody>
-      </p:sp>
-    </p:spTree>
-  </p:cSld>
-  <p:clrMapOvr>
-    <a:masterClrMapping/>
-  </p:clrMapOvr>
-  <p:timing>
-    <p:tnLst>
-      <p:par>
-        <p:cTn id="1" dur="indefinite" restart="never" nodeType="tmRoot"/>
-      </p:par>
-    </p:tnLst>
-  </p:timing>
-</p:sld>
-</file>
-
-<file path=ppt/slides/slide18.xml><?xml version="1.0" encoding="utf-8"?>
-<p:sld xmlns:a="http://schemas.openxmlformats.org/drawingml/2006/main" xmlns:r="http://schemas.openxmlformats.org/officeDocument/2006/relationships" xmlns:p="http://schemas.openxmlformats.org/presentationml/2006/main">
-  <p:cSld>
-    <p:spTree>
-      <p:nvGrpSpPr>
-        <p:cNvPr id="1" name=""/>
-        <p:cNvGrpSpPr/>
-        <p:nvPr/>
-      </p:nvGrpSpPr>
-      <p:grpSpPr>
-        <a:xfrm>
-          <a:off x="0" y="0"/>
-          <a:ext cx="0" cy="0"/>
-          <a:chOff x="0" y="0"/>
-          <a:chExt cx="0" cy="0"/>
-        </a:xfrm>
-      </p:grpSpPr>
-      <p:sp>
-        <p:nvSpPr>
-          <p:cNvPr id="2" name="TextBox 1"/>
-          <p:cNvSpPr txBox="1"/>
-          <p:nvPr/>
-        </p:nvSpPr>
-        <p:spPr>
-          <a:xfrm>
-            <a:off x="457200" y="530352"/>
-            <a:ext cx="11247120" cy="592470"/>
-          </a:xfrm>
-          <a:prstGeom prst="rect">
-            <a:avLst/>
-          </a:prstGeom>
-          <a:noFill/>
-        </p:spPr>
-        <p:txBody>
-          <a:bodyPr wrap="square">
-            <a:spAutoFit/>
-          </a:bodyPr>
-          <a:lstStyle/>
-          <a:p>
-            <a:pPr algn="l">
-              <a:lnSpc>
-                <a:spcPct val="125000"/>
-              </a:lnSpc>
-              <a:spcAft>
-                <a:spcPts val="600"/>
-              </a:spcAft>
-            </a:pPr>
-            <a:r>
-              <a:rPr sz="2600" b="1">
-                <a:solidFill>
-                  <a:srgbClr val="1F3864"/>
-                </a:solidFill>
-                <a:latin typeface="경기천년제목 Bold" panose="02020803020101020101" pitchFamily="18" charset="-127"/>
-                <a:ea typeface="경기천년제목 Bold" panose="02020803020101020101" pitchFamily="18" charset="-127"/>
-              </a:rPr>
-              <a:t>정리</a:t>
-            </a:r>
-          </a:p>
-        </p:txBody>
-      </p:sp>
-      <p:sp>
-        <p:nvSpPr>
-          <p:cNvPr id="3" name="Rectangle 2"/>
-          <p:cNvSpPr/>
-          <p:nvPr/>
-        </p:nvSpPr>
-        <p:spPr>
-          <a:xfrm>
-            <a:off x="457200" y="1024128"/>
-            <a:ext cx="11274552" cy="32004"/>
-          </a:xfrm>
-          <a:prstGeom prst="rect">
-            <a:avLst/>
-          </a:prstGeom>
-          <a:solidFill>
-            <a:srgbClr val="1F3864"/>
-          </a:solidFill>
-          <a:ln>
-            <a:noFill/>
-          </a:ln>
-          <a:effectLst/>
-        </p:spPr>
-        <p:style>
-          <a:lnRef idx="1">
-            <a:schemeClr val="accent1"/>
-          </a:lnRef>
-          <a:fillRef idx="3">
-            <a:schemeClr val="accent1"/>
-          </a:fillRef>
-          <a:effectRef idx="2">
-            <a:schemeClr val="accent1"/>
-          </a:effectRef>
-          <a:fontRef idx="minor">
-            <a:schemeClr val="lt1"/>
-          </a:fontRef>
-        </p:style>
-        <p:txBody>
-          <a:bodyPr rtlCol="0" anchor="ctr"/>
-          <a:lstStyle/>
-          <a:p>
-            <a:pPr algn="ctr"/>
-            <a:endParaRPr>
-              <a:latin typeface="경기천년제목 Bold" panose="02020803020101020101" pitchFamily="18" charset="-127"/>
-              <a:ea typeface="경기천년제목 Bold" panose="02020803020101020101" pitchFamily="18" charset="-127"/>
-            </a:endParaRPr>
-          </a:p>
-        </p:txBody>
-      </p:sp>
-      <p:sp>
-        <p:nvSpPr>
-          <p:cNvPr id="4" name="TextBox 3"/>
-          <p:cNvSpPr txBox="1"/>
-          <p:nvPr/>
-        </p:nvSpPr>
-        <p:spPr>
-          <a:xfrm>
-            <a:off x="640080" y="1463040"/>
-            <a:ext cx="10972800" cy="1997470"/>
-          </a:xfrm>
-          <a:prstGeom prst="rect">
-            <a:avLst/>
-          </a:prstGeom>
-          <a:noFill/>
-        </p:spPr>
-        <p:txBody>
-          <a:bodyPr wrap="square">
-            <a:spAutoFit/>
-          </a:bodyPr>
-          <a:lstStyle/>
-          <a:p>
-            <a:pPr algn="l">
-              <a:lnSpc>
-                <a:spcPct val="160000"/>
-              </a:lnSpc>
-              <a:spcAft>
-                <a:spcPts val="600"/>
-              </a:spcAft>
-            </a:pPr>
-            <a:r>
-              <a:rPr sz="1700" b="0">
-                <a:solidFill>
-                  <a:srgbClr val="1F2328"/>
-                </a:solidFill>
-                <a:latin typeface="경기천년제목 Bold" panose="02020803020101020101" pitchFamily="18" charset="-127"/>
-                <a:ea typeface="경기천년제목 Bold" panose="02020803020101020101" pitchFamily="18" charset="-127"/>
-              </a:rPr>
-              <a:t>1.  게임물의 청소년이용불가를 결정하는 요인은 폭력성·선정성이 아닌 사행성</a:t>
-            </a:r>
-          </a:p>
-          <a:p>
-            <a:pPr algn="l">
-              <a:lnSpc>
-                <a:spcPct val="160000"/>
-              </a:lnSpc>
-              <a:spcAft>
-                <a:spcPts val="600"/>
-              </a:spcAft>
-            </a:pPr>
-            <a:r>
-              <a:rPr sz="1700" b="0">
-                <a:solidFill>
-                  <a:srgbClr val="1F2328"/>
-                </a:solidFill>
-                <a:latin typeface="경기천년제목 Bold" panose="02020803020101020101" pitchFamily="18" charset="-127"/>
-                <a:ea typeface="경기천년제목 Bold" panose="02020803020101020101" pitchFamily="18" charset="-127"/>
-              </a:rPr>
-              <a:t>2.  단, 공개 데이터로 확인 가능한 범위는 게임물 등급분류 전체의 0.27%</a:t>
-            </a:r>
-          </a:p>
-          <a:p>
-            <a:pPr algn="l">
-              <a:lnSpc>
-                <a:spcPct val="160000"/>
-              </a:lnSpc>
-              <a:spcAft>
-                <a:spcPts val="600"/>
-              </a:spcAft>
-            </a:pPr>
-            <a:r>
-              <a:rPr sz="1700" b="0">
-                <a:solidFill>
-                  <a:srgbClr val="1F2328"/>
-                </a:solidFill>
-                <a:latin typeface="경기천년제목 Bold" panose="02020803020101020101" pitchFamily="18" charset="-127"/>
-                <a:ea typeface="경기천년제목 Bold" panose="02020803020101020101" pitchFamily="18" charset="-127"/>
-              </a:rPr>
-              <a:t>3.  영상물의 등급은 내용정보의 최고값과 동일하며, 판단이 개입하는 영역은 12.2%에 한정</a:t>
-            </a:r>
-          </a:p>
-          <a:p>
-            <a:pPr algn="l">
-              <a:lnSpc>
-                <a:spcPct val="160000"/>
-              </a:lnSpc>
-              <a:spcAft>
-                <a:spcPts val="600"/>
-              </a:spcAft>
-            </a:pPr>
-            <a:r>
-              <a:rPr sz="1700" b="0">
-                <a:solidFill>
-                  <a:srgbClr val="1F2328"/>
-                </a:solidFill>
-                <a:latin typeface="경기천년제목 Bold" panose="02020803020101020101" pitchFamily="18" charset="-127"/>
-                <a:ea typeface="경기천년제목 Bold" panose="02020803020101020101" pitchFamily="18" charset="-127"/>
-              </a:rPr>
-              <a:t>4.  동일 조건 비교 시 게임물의 판정이 더 엄격. 단, 절단 기준을 전제로 함</a:t>
-            </a:r>
-          </a:p>
-        </p:txBody>
-      </p:sp>
-      <p:sp>
-        <p:nvSpPr>
-          <p:cNvPr id="5" name="TextBox 4"/>
-          <p:cNvSpPr txBox="1"/>
-          <p:nvPr/>
-        </p:nvSpPr>
-        <p:spPr>
-          <a:xfrm>
-            <a:off x="565435" y="3800728"/>
-            <a:ext cx="10972800" cy="342401"/>
-          </a:xfrm>
-          <a:prstGeom prst="rect">
-            <a:avLst/>
-          </a:prstGeom>
-          <a:noFill/>
-        </p:spPr>
-        <p:txBody>
-          <a:bodyPr wrap="square">
-            <a:spAutoFit/>
-          </a:bodyPr>
-          <a:lstStyle/>
-          <a:p>
-            <a:pPr algn="l">
-              <a:lnSpc>
-                <a:spcPct val="125000"/>
-              </a:lnSpc>
-              <a:spcAft>
-                <a:spcPts val="600"/>
-              </a:spcAft>
-            </a:pPr>
-            <a:r>
-              <a:rPr sz="1300" b="1">
-                <a:solidFill>
-                  <a:srgbClr val="1F3864"/>
-                </a:solidFill>
-                <a:latin typeface="나눔고딕OTF" panose="020D0604000000000000" pitchFamily="34" charset="-127"/>
-                <a:ea typeface="나눔고딕OTF" panose="020D0604000000000000" pitchFamily="34" charset="-127"/>
-              </a:rPr>
-              <a:t>산출물</a:t>
-            </a:r>
-          </a:p>
-        </p:txBody>
-      </p:sp>
-      <p:sp>
-        <p:nvSpPr>
-          <p:cNvPr id="6" name="TextBox 5"/>
-          <p:cNvSpPr txBox="1"/>
-          <p:nvPr/>
-        </p:nvSpPr>
-        <p:spPr>
-          <a:xfrm>
-            <a:off x="565435" y="4143129"/>
-            <a:ext cx="10972800" cy="1698542"/>
-          </a:xfrm>
-          <a:prstGeom prst="rect">
-            <a:avLst/>
-          </a:prstGeom>
-          <a:noFill/>
-        </p:spPr>
-        <p:txBody>
-          <a:bodyPr wrap="square">
-            <a:spAutoFit/>
-          </a:bodyPr>
-          <a:lstStyle/>
-          <a:p>
-            <a:pPr>
-              <a:lnSpc>
-                <a:spcPct val="125000"/>
-              </a:lnSpc>
-              <a:spcAft>
-                <a:spcPts val="600"/>
-              </a:spcAft>
-            </a:pPr>
-            <a:r>
-              <a:rPr lang="en-US" altLang="ko-KR" sz="1350" dirty="0">
-                <a:solidFill>
-                  <a:srgbClr val="1F2328"/>
-                </a:solidFill>
-                <a:latin typeface="나눔고딕OTF" panose="020D0604000000000000" pitchFamily="34" charset="-127"/>
-                <a:ea typeface="나눔고딕OTF" panose="020D0604000000000000" pitchFamily="34" charset="-127"/>
-              </a:rPr>
-              <a:t>· </a:t>
-            </a:r>
-            <a:r>
-              <a:rPr sz="1350" b="0" dirty="0" err="1" smtClean="0">
-                <a:solidFill>
-                  <a:srgbClr val="1F2328"/>
-                </a:solidFill>
-                <a:latin typeface="나눔고딕OTF" panose="020D0604000000000000" pitchFamily="34" charset="-127"/>
-                <a:ea typeface="나눔고딕OTF" panose="020D0604000000000000" pitchFamily="34" charset="-127"/>
-              </a:rPr>
-              <a:t>대시보드</a:t>
-            </a:r>
-            <a:r>
-              <a:rPr sz="1350" b="0" dirty="0" smtClean="0">
-                <a:solidFill>
-                  <a:srgbClr val="1F2328"/>
-                </a:solidFill>
-                <a:latin typeface="나눔고딕OTF" panose="020D0604000000000000" pitchFamily="34" charset="-127"/>
-                <a:ea typeface="나눔고딕OTF" panose="020D0604000000000000" pitchFamily="34" charset="-127"/>
-              </a:rPr>
-              <a:t> </a:t>
-            </a:r>
-            <a:r>
-              <a:rPr sz="1350" b="0" dirty="0">
-                <a:solidFill>
-                  <a:srgbClr val="1F2328"/>
-                </a:solidFill>
-                <a:latin typeface="나눔고딕OTF" panose="020D0604000000000000" pitchFamily="34" charset="-127"/>
-                <a:ea typeface="나눔고딕OTF" panose="020D0604000000000000" pitchFamily="34" charset="-127"/>
-              </a:rPr>
-              <a:t>https://rating-analysis-260910.streamlit.app/</a:t>
-            </a:r>
-          </a:p>
-          <a:p>
-            <a:pPr>
-              <a:lnSpc>
-                <a:spcPct val="125000"/>
-              </a:lnSpc>
-              <a:spcAft>
-                <a:spcPts val="600"/>
-              </a:spcAft>
-            </a:pPr>
-            <a:r>
-              <a:rPr lang="en-US" altLang="ko-KR" sz="1350" dirty="0">
-                <a:solidFill>
-                  <a:srgbClr val="1F2328"/>
-                </a:solidFill>
-                <a:latin typeface="나눔고딕OTF" panose="020D0604000000000000" pitchFamily="34" charset="-127"/>
-                <a:ea typeface="나눔고딕OTF" panose="020D0604000000000000" pitchFamily="34" charset="-127"/>
-              </a:rPr>
-              <a:t>· </a:t>
-            </a:r>
-            <a:r>
-              <a:rPr sz="1350" b="0" dirty="0" err="1" smtClean="0">
-                <a:solidFill>
-                  <a:srgbClr val="1F2328"/>
-                </a:solidFill>
-                <a:latin typeface="나눔고딕OTF" panose="020D0604000000000000" pitchFamily="34" charset="-127"/>
-                <a:ea typeface="나눔고딕OTF" panose="020D0604000000000000" pitchFamily="34" charset="-127"/>
-              </a:rPr>
-              <a:t>통합</a:t>
-            </a:r>
-            <a:r>
-              <a:rPr sz="1350" b="0" dirty="0" smtClean="0">
-                <a:solidFill>
-                  <a:srgbClr val="1F2328"/>
-                </a:solidFill>
-                <a:latin typeface="나눔고딕OTF" panose="020D0604000000000000" pitchFamily="34" charset="-127"/>
-                <a:ea typeface="나눔고딕OTF" panose="020D0604000000000000" pitchFamily="34" charset="-127"/>
-              </a:rPr>
-              <a:t> </a:t>
-            </a:r>
-            <a:r>
-              <a:rPr sz="1350" b="0" dirty="0">
-                <a:solidFill>
-                  <a:srgbClr val="1F2328"/>
-                </a:solidFill>
-                <a:latin typeface="나눔고딕OTF" panose="020D0604000000000000" pitchFamily="34" charset="-127"/>
-                <a:ea typeface="나눔고딕OTF" panose="020D0604000000000000" pitchFamily="34" charset="-127"/>
-              </a:rPr>
-              <a:t>Dataset </a:t>
-            </a:r>
-            <a:endParaRPr lang="en-US" sz="1350" b="0" dirty="0" smtClean="0">
-              <a:solidFill>
-                <a:srgbClr val="1F2328"/>
-              </a:solidFill>
-              <a:latin typeface="나눔고딕OTF" panose="020D0604000000000000" pitchFamily="34" charset="-127"/>
-              <a:ea typeface="나눔고딕OTF" panose="020D0604000000000000" pitchFamily="34" charset="-127"/>
-            </a:endParaRPr>
-          </a:p>
-          <a:p>
-            <a:pPr algn="l">
-              <a:lnSpc>
-                <a:spcPct val="125000"/>
-              </a:lnSpc>
-              <a:spcAft>
-                <a:spcPts val="600"/>
-              </a:spcAft>
-            </a:pPr>
-            <a:r>
-              <a:rPr sz="1350" b="0" dirty="0" smtClean="0">
-                <a:solidFill>
-                  <a:srgbClr val="1F2328"/>
-                </a:solidFill>
-                <a:latin typeface="나눔고딕OTF" panose="020D0604000000000000" pitchFamily="34" charset="-127"/>
-                <a:ea typeface="나눔고딕OTF" panose="020D0604000000000000" pitchFamily="34" charset="-127"/>
-              </a:rPr>
-              <a:t>· </a:t>
-            </a:r>
-            <a:r>
-              <a:rPr sz="1350" b="0" dirty="0">
-                <a:solidFill>
-                  <a:srgbClr val="1F2328"/>
-                </a:solidFill>
-                <a:latin typeface="나눔고딕OTF" panose="020D0604000000000000" pitchFamily="34" charset="-127"/>
-                <a:ea typeface="나눔고딕OTF" panose="020D0604000000000000" pitchFamily="34" charset="-127"/>
-              </a:rPr>
-              <a:t>EDA 2종 </a:t>
-            </a:r>
-            <a:endParaRPr lang="en-US" sz="1350" b="0" dirty="0" smtClean="0">
-              <a:solidFill>
-                <a:srgbClr val="1F2328"/>
-              </a:solidFill>
-              <a:latin typeface="나눔고딕OTF" panose="020D0604000000000000" pitchFamily="34" charset="-127"/>
-              <a:ea typeface="나눔고딕OTF" panose="020D0604000000000000" pitchFamily="34" charset="-127"/>
-            </a:endParaRPr>
-          </a:p>
-          <a:p>
-            <a:pPr algn="l">
-              <a:lnSpc>
-                <a:spcPct val="125000"/>
-              </a:lnSpc>
-              <a:spcAft>
-                <a:spcPts val="600"/>
-              </a:spcAft>
-            </a:pPr>
-            <a:r>
-              <a:rPr sz="1350" b="0" dirty="0" smtClean="0">
-                <a:solidFill>
-                  <a:srgbClr val="1F2328"/>
-                </a:solidFill>
-                <a:latin typeface="나눔고딕OTF" panose="020D0604000000000000" pitchFamily="34" charset="-127"/>
-                <a:ea typeface="나눔고딕OTF" panose="020D0604000000000000" pitchFamily="34" charset="-127"/>
-              </a:rPr>
-              <a:t>· </a:t>
-            </a:r>
-            <a:r>
-              <a:rPr sz="1350" b="0" dirty="0" err="1">
-                <a:solidFill>
-                  <a:srgbClr val="1F2328"/>
-                </a:solidFill>
-                <a:latin typeface="나눔고딕OTF" panose="020D0604000000000000" pitchFamily="34" charset="-127"/>
-                <a:ea typeface="나눔고딕OTF" panose="020D0604000000000000" pitchFamily="34" charset="-127"/>
-              </a:rPr>
-              <a:t>청소년</a:t>
-            </a:r>
-            <a:r>
-              <a:rPr sz="1350" b="0" dirty="0">
-                <a:solidFill>
-                  <a:srgbClr val="1F2328"/>
-                </a:solidFill>
-                <a:latin typeface="나눔고딕OTF" panose="020D0604000000000000" pitchFamily="34" charset="-127"/>
-                <a:ea typeface="나눔고딕OTF" panose="020D0604000000000000" pitchFamily="34" charset="-127"/>
-              </a:rPr>
-              <a:t> </a:t>
-            </a:r>
-            <a:r>
-              <a:rPr sz="1350" b="0" dirty="0" err="1">
-                <a:solidFill>
-                  <a:srgbClr val="1F2328"/>
-                </a:solidFill>
-                <a:latin typeface="나눔고딕OTF" panose="020D0604000000000000" pitchFamily="34" charset="-127"/>
-                <a:ea typeface="나눔고딕OTF" panose="020D0604000000000000" pitchFamily="34" charset="-127"/>
-              </a:rPr>
-              <a:t>이용</a:t>
-            </a:r>
-            <a:r>
-              <a:rPr sz="1350" b="0" dirty="0">
-                <a:solidFill>
-                  <a:srgbClr val="1F2328"/>
-                </a:solidFill>
-                <a:latin typeface="나눔고딕OTF" panose="020D0604000000000000" pitchFamily="34" charset="-127"/>
-                <a:ea typeface="나눔고딕OTF" panose="020D0604000000000000" pitchFamily="34" charset="-127"/>
-              </a:rPr>
-              <a:t> </a:t>
-            </a:r>
-            <a:r>
-              <a:rPr sz="1350" b="0" dirty="0" err="1">
-                <a:solidFill>
-                  <a:srgbClr val="1F2328"/>
-                </a:solidFill>
-                <a:latin typeface="나눔고딕OTF" panose="020D0604000000000000" pitchFamily="34" charset="-127"/>
-                <a:ea typeface="나눔고딕OTF" panose="020D0604000000000000" pitchFamily="34" charset="-127"/>
-              </a:rPr>
-              <a:t>제한</a:t>
-            </a:r>
-            <a:r>
-              <a:rPr sz="1350" b="0" dirty="0">
-                <a:solidFill>
-                  <a:srgbClr val="1F2328"/>
-                </a:solidFill>
-                <a:latin typeface="나눔고딕OTF" panose="020D0604000000000000" pitchFamily="34" charset="-127"/>
-                <a:ea typeface="나눔고딕OTF" panose="020D0604000000000000" pitchFamily="34" charset="-127"/>
-              </a:rPr>
-              <a:t> </a:t>
-            </a:r>
-            <a:r>
-              <a:rPr sz="1350" b="0" dirty="0" err="1">
-                <a:solidFill>
-                  <a:srgbClr val="1F2328"/>
-                </a:solidFill>
-                <a:latin typeface="나눔고딕OTF" panose="020D0604000000000000" pitchFamily="34" charset="-127"/>
-                <a:ea typeface="나눔고딕OTF" panose="020D0604000000000000" pitchFamily="34" charset="-127"/>
-              </a:rPr>
-              <a:t>특성</a:t>
-            </a:r>
-            <a:r>
-              <a:rPr sz="1350" b="0" dirty="0">
-                <a:solidFill>
-                  <a:srgbClr val="1F2328"/>
-                </a:solidFill>
-                <a:latin typeface="나눔고딕OTF" panose="020D0604000000000000" pitchFamily="34" charset="-127"/>
-                <a:ea typeface="나눔고딕OTF" panose="020D0604000000000000" pitchFamily="34" charset="-127"/>
-              </a:rPr>
-              <a:t> </a:t>
-            </a:r>
-            <a:r>
-              <a:rPr sz="1350" b="0" dirty="0" err="1">
-                <a:solidFill>
-                  <a:srgbClr val="1F2328"/>
-                </a:solidFill>
-                <a:latin typeface="나눔고딕OTF" panose="020D0604000000000000" pitchFamily="34" charset="-127"/>
-                <a:ea typeface="나눔고딕OTF" panose="020D0604000000000000" pitchFamily="34" charset="-127"/>
-              </a:rPr>
-              <a:t>분석</a:t>
-            </a:r>
-            <a:r>
-              <a:rPr sz="1350" b="0" dirty="0">
-                <a:solidFill>
-                  <a:srgbClr val="1F2328"/>
-                </a:solidFill>
-                <a:latin typeface="나눔고딕OTF" panose="020D0604000000000000" pitchFamily="34" charset="-127"/>
-                <a:ea typeface="나눔고딕OTF" panose="020D0604000000000000" pitchFamily="34" charset="-127"/>
-              </a:rPr>
-              <a:t> </a:t>
-            </a:r>
-            <a:endParaRPr lang="en-US" sz="1350" b="0" dirty="0" smtClean="0">
-              <a:solidFill>
-                <a:srgbClr val="1F2328"/>
-              </a:solidFill>
-              <a:latin typeface="나눔고딕OTF" panose="020D0604000000000000" pitchFamily="34" charset="-127"/>
-              <a:ea typeface="나눔고딕OTF" panose="020D0604000000000000" pitchFamily="34" charset="-127"/>
-            </a:endParaRPr>
-          </a:p>
-          <a:p>
-            <a:pPr algn="l">
-              <a:lnSpc>
-                <a:spcPct val="125000"/>
-              </a:lnSpc>
-              <a:spcAft>
-                <a:spcPts val="600"/>
-              </a:spcAft>
-            </a:pPr>
-            <a:r>
-              <a:rPr sz="1350" b="0" dirty="0" smtClean="0">
-                <a:solidFill>
-                  <a:srgbClr val="1F2328"/>
-                </a:solidFill>
-                <a:latin typeface="나눔고딕OTF" panose="020D0604000000000000" pitchFamily="34" charset="-127"/>
-                <a:ea typeface="나눔고딕OTF" panose="020D0604000000000000" pitchFamily="34" charset="-127"/>
-              </a:rPr>
-              <a:t>· </a:t>
-            </a:r>
-            <a:r>
-              <a:rPr sz="1350" b="0" dirty="0" err="1">
-                <a:solidFill>
-                  <a:srgbClr val="1F2328"/>
-                </a:solidFill>
-                <a:latin typeface="나눔고딕OTF" panose="020D0604000000000000" pitchFamily="34" charset="-127"/>
-                <a:ea typeface="나눔고딕OTF" panose="020D0604000000000000" pitchFamily="34" charset="-127"/>
-              </a:rPr>
-              <a:t>인사이트</a:t>
-            </a:r>
-            <a:r>
-              <a:rPr sz="1350" b="0" dirty="0">
-                <a:solidFill>
-                  <a:srgbClr val="1F2328"/>
-                </a:solidFill>
-                <a:latin typeface="나눔고딕OTF" panose="020D0604000000000000" pitchFamily="34" charset="-127"/>
-                <a:ea typeface="나눔고딕OTF" panose="020D0604000000000000" pitchFamily="34" charset="-127"/>
-              </a:rPr>
-              <a:t> </a:t>
-            </a:r>
-            <a:r>
-              <a:rPr sz="1350" b="0" dirty="0" err="1">
-                <a:solidFill>
-                  <a:srgbClr val="1F2328"/>
-                </a:solidFill>
-                <a:latin typeface="나눔고딕OTF" panose="020D0604000000000000" pitchFamily="34" charset="-127"/>
-                <a:ea typeface="나눔고딕OTF" panose="020D0604000000000000" pitchFamily="34" charset="-127"/>
-              </a:rPr>
-              <a:t>리포트</a:t>
-            </a:r>
-            <a:endParaRPr sz="1350" b="0" dirty="0">
-              <a:solidFill>
-                <a:srgbClr val="1F2328"/>
-              </a:solidFill>
-              <a:latin typeface="나눔고딕OTF" panose="020D0604000000000000" pitchFamily="34" charset="-127"/>
-              <a:ea typeface="나눔고딕OTF" panose="020D0604000000000000" pitchFamily="34" charset="-127"/>
-            </a:endParaRPr>
-          </a:p>
-        </p:txBody>
-      </p:sp>
-      <p:sp>
-        <p:nvSpPr>
-          <p:cNvPr id="7" name="TextBox 6"/>
-          <p:cNvSpPr txBox="1"/>
-          <p:nvPr/>
-        </p:nvSpPr>
-        <p:spPr>
-          <a:xfrm>
-            <a:off x="9397793" y="5550437"/>
-            <a:ext cx="2140442" cy="582467"/>
-          </a:xfrm>
-          <a:prstGeom prst="rect">
-            <a:avLst/>
-          </a:prstGeom>
-          <a:noFill/>
-        </p:spPr>
-        <p:txBody>
-          <a:bodyPr wrap="square">
-            <a:spAutoFit/>
-          </a:bodyPr>
-          <a:lstStyle/>
-          <a:p>
-            <a:pPr algn="l">
-              <a:lnSpc>
-                <a:spcPct val="125000"/>
-              </a:lnSpc>
-              <a:spcAft>
-                <a:spcPts val="600"/>
-              </a:spcAft>
-            </a:pPr>
-            <a:r>
-              <a:rPr sz="2800" b="1" dirty="0" err="1">
-                <a:solidFill>
-                  <a:srgbClr val="1F3864"/>
-                </a:solidFill>
-                <a:latin typeface="경기천년제목 Bold" panose="02020803020101020101" pitchFamily="18" charset="-127"/>
-                <a:ea typeface="경기천년제목 Bold" panose="02020803020101020101" pitchFamily="18" charset="-127"/>
-              </a:rPr>
-              <a:t>감사합니다</a:t>
-            </a:r>
-            <a:r>
-              <a:rPr sz="2800" b="1" dirty="0">
-                <a:solidFill>
-                  <a:srgbClr val="1F3864"/>
-                </a:solidFill>
-                <a:latin typeface="경기천년제목 Bold" panose="02020803020101020101" pitchFamily="18" charset="-127"/>
-                <a:ea typeface="경기천년제목 Bold" panose="02020803020101020101" pitchFamily="18" charset="-127"/>
-              </a:rPr>
-              <a:t>.</a:t>
             </a:r>
           </a:p>
         </p:txBody>
@@ -15631,6 +16502,679 @@
           </a:graphicData>
         </a:graphic>
       </p:graphicFrame>
+    </p:spTree>
+  </p:cSld>
+  <p:clrMapOvr>
+    <a:masterClrMapping/>
+  </p:clrMapOvr>
+  <p:timing>
+    <p:tnLst>
+      <p:par>
+        <p:cTn id="1" dur="indefinite" restart="never" nodeType="tmRoot"/>
+      </p:par>
+    </p:tnLst>
+  </p:timing>
+</p:sld>
+</file>
+
+<file path=ppt/slides/slide20.xml><?xml version="1.0" encoding="utf-8"?>
+<p:sld xmlns:a="http://schemas.openxmlformats.org/drawingml/2006/main" xmlns:r="http://schemas.openxmlformats.org/officeDocument/2006/relationships" xmlns:p="http://schemas.openxmlformats.org/presentationml/2006/main">
+  <p:cSld>
+    <p:spTree>
+      <p:nvGrpSpPr>
+        <p:cNvPr id="1" name=""/>
+        <p:cNvGrpSpPr/>
+        <p:nvPr/>
+      </p:nvGrpSpPr>
+      <p:grpSpPr>
+        <a:xfrm>
+          <a:off x="0" y="0"/>
+          <a:ext cx="0" cy="0"/>
+          <a:chOff x="0" y="0"/>
+          <a:chExt cx="0" cy="0"/>
+        </a:xfrm>
+      </p:grpSpPr>
+      <p:sp>
+        <p:nvSpPr>
+          <p:cNvPr id="2" name="TextBox 1"/>
+          <p:cNvSpPr txBox="1"/>
+          <p:nvPr/>
+        </p:nvSpPr>
+        <p:spPr>
+          <a:xfrm>
+            <a:off x="457200" y="530352"/>
+            <a:ext cx="11247120" cy="592470"/>
+          </a:xfrm>
+          <a:prstGeom prst="rect">
+            <a:avLst/>
+          </a:prstGeom>
+          <a:noFill/>
+        </p:spPr>
+        <p:txBody>
+          <a:bodyPr wrap="square">
+            <a:spAutoFit/>
+          </a:bodyPr>
+          <a:lstStyle/>
+          <a:p>
+            <a:pPr algn="l">
+              <a:lnSpc>
+                <a:spcPct val="125000"/>
+              </a:lnSpc>
+              <a:spcAft>
+                <a:spcPts val="600"/>
+              </a:spcAft>
+            </a:pPr>
+            <a:r>
+              <a:rPr sz="2600" b="1">
+                <a:solidFill>
+                  <a:srgbClr val="1F3864"/>
+                </a:solidFill>
+                <a:latin typeface="경기천년제목 Bold" panose="02020803020101020101" pitchFamily="18" charset="-127"/>
+                <a:ea typeface="경기천년제목 Bold" panose="02020803020101020101" pitchFamily="18" charset="-127"/>
+              </a:rPr>
+              <a:t>정리</a:t>
+            </a:r>
+          </a:p>
+        </p:txBody>
+      </p:sp>
+      <p:sp>
+        <p:nvSpPr>
+          <p:cNvPr id="3" name="Rectangle 2"/>
+          <p:cNvSpPr/>
+          <p:nvPr/>
+        </p:nvSpPr>
+        <p:spPr>
+          <a:xfrm>
+            <a:off x="457200" y="1024128"/>
+            <a:ext cx="11274552" cy="32004"/>
+          </a:xfrm>
+          <a:prstGeom prst="rect">
+            <a:avLst/>
+          </a:prstGeom>
+          <a:solidFill>
+            <a:srgbClr val="1F3864"/>
+          </a:solidFill>
+          <a:ln>
+            <a:noFill/>
+          </a:ln>
+          <a:effectLst/>
+        </p:spPr>
+        <p:style>
+          <a:lnRef idx="1">
+            <a:schemeClr val="accent1"/>
+          </a:lnRef>
+          <a:fillRef idx="3">
+            <a:schemeClr val="accent1"/>
+          </a:fillRef>
+          <a:effectRef idx="2">
+            <a:schemeClr val="accent1"/>
+          </a:effectRef>
+          <a:fontRef idx="minor">
+            <a:schemeClr val="lt1"/>
+          </a:fontRef>
+        </p:style>
+        <p:txBody>
+          <a:bodyPr rtlCol="0" anchor="ctr"/>
+          <a:lstStyle/>
+          <a:p>
+            <a:pPr algn="ctr"/>
+            <a:endParaRPr>
+              <a:latin typeface="경기천년제목 Bold" panose="02020803020101020101" pitchFamily="18" charset="-127"/>
+              <a:ea typeface="경기천년제목 Bold" panose="02020803020101020101" pitchFamily="18" charset="-127"/>
+            </a:endParaRPr>
+          </a:p>
+        </p:txBody>
+      </p:sp>
+      <p:sp>
+        <p:nvSpPr>
+          <p:cNvPr id="4" name="TextBox 3"/>
+          <p:cNvSpPr txBox="1"/>
+          <p:nvPr/>
+        </p:nvSpPr>
+        <p:spPr>
+          <a:xfrm>
+            <a:off x="640080" y="1463040"/>
+            <a:ext cx="10972800" cy="1997470"/>
+          </a:xfrm>
+          <a:prstGeom prst="rect">
+            <a:avLst/>
+          </a:prstGeom>
+          <a:noFill/>
+        </p:spPr>
+        <p:txBody>
+          <a:bodyPr wrap="square">
+            <a:spAutoFit/>
+          </a:bodyPr>
+          <a:lstStyle/>
+          <a:p>
+            <a:pPr algn="l">
+              <a:lnSpc>
+                <a:spcPct val="160000"/>
+              </a:lnSpc>
+              <a:spcAft>
+                <a:spcPts val="600"/>
+              </a:spcAft>
+            </a:pPr>
+            <a:r>
+              <a:rPr sz="1700" b="0">
+                <a:solidFill>
+                  <a:srgbClr val="1F2328"/>
+                </a:solidFill>
+                <a:latin typeface="경기천년제목 Bold" panose="02020803020101020101" pitchFamily="18" charset="-127"/>
+                <a:ea typeface="경기천년제목 Bold" panose="02020803020101020101" pitchFamily="18" charset="-127"/>
+              </a:rPr>
+              <a:t>1.  게임물의 청소년이용불가를 결정하는 요인은 폭력성·선정성이 아닌 사행성</a:t>
+            </a:r>
+          </a:p>
+          <a:p>
+            <a:pPr algn="l">
+              <a:lnSpc>
+                <a:spcPct val="160000"/>
+              </a:lnSpc>
+              <a:spcAft>
+                <a:spcPts val="600"/>
+              </a:spcAft>
+            </a:pPr>
+            <a:r>
+              <a:rPr sz="1700" b="0">
+                <a:solidFill>
+                  <a:srgbClr val="1F2328"/>
+                </a:solidFill>
+                <a:latin typeface="경기천년제목 Bold" panose="02020803020101020101" pitchFamily="18" charset="-127"/>
+                <a:ea typeface="경기천년제목 Bold" panose="02020803020101020101" pitchFamily="18" charset="-127"/>
+              </a:rPr>
+              <a:t>2.  단, 공개 데이터로 확인 가능한 범위는 게임물 등급분류 전체의 0.27%</a:t>
+            </a:r>
+          </a:p>
+          <a:p>
+            <a:pPr algn="l">
+              <a:lnSpc>
+                <a:spcPct val="160000"/>
+              </a:lnSpc>
+              <a:spcAft>
+                <a:spcPts val="600"/>
+              </a:spcAft>
+            </a:pPr>
+            <a:r>
+              <a:rPr sz="1700" b="0">
+                <a:solidFill>
+                  <a:srgbClr val="1F2328"/>
+                </a:solidFill>
+                <a:latin typeface="경기천년제목 Bold" panose="02020803020101020101" pitchFamily="18" charset="-127"/>
+                <a:ea typeface="경기천년제목 Bold" panose="02020803020101020101" pitchFamily="18" charset="-127"/>
+              </a:rPr>
+              <a:t>3.  영상물의 등급은 내용정보의 최고값과 동일하며, 판단이 개입하는 영역은 12.2%에 한정</a:t>
+            </a:r>
+          </a:p>
+          <a:p>
+            <a:pPr algn="l">
+              <a:lnSpc>
+                <a:spcPct val="160000"/>
+              </a:lnSpc>
+              <a:spcAft>
+                <a:spcPts val="600"/>
+              </a:spcAft>
+            </a:pPr>
+            <a:r>
+              <a:rPr sz="1700" b="0">
+                <a:solidFill>
+                  <a:srgbClr val="1F2328"/>
+                </a:solidFill>
+                <a:latin typeface="경기천년제목 Bold" panose="02020803020101020101" pitchFamily="18" charset="-127"/>
+                <a:ea typeface="경기천년제목 Bold" panose="02020803020101020101" pitchFamily="18" charset="-127"/>
+              </a:rPr>
+              <a:t>4.  동일 조건 비교 시 게임물의 판정이 더 엄격. 단, 절단 기준을 전제로 함</a:t>
+            </a:r>
+          </a:p>
+        </p:txBody>
+      </p:sp>
+      <p:sp>
+        <p:nvSpPr>
+          <p:cNvPr id="5" name="TextBox 4"/>
+          <p:cNvSpPr txBox="1"/>
+          <p:nvPr/>
+        </p:nvSpPr>
+        <p:spPr>
+          <a:xfrm>
+            <a:off x="565435" y="3800728"/>
+            <a:ext cx="10972800" cy="342401"/>
+          </a:xfrm>
+          <a:prstGeom prst="rect">
+            <a:avLst/>
+          </a:prstGeom>
+          <a:noFill/>
+        </p:spPr>
+        <p:txBody>
+          <a:bodyPr wrap="square">
+            <a:spAutoFit/>
+          </a:bodyPr>
+          <a:lstStyle/>
+          <a:p>
+            <a:pPr algn="l">
+              <a:lnSpc>
+                <a:spcPct val="125000"/>
+              </a:lnSpc>
+              <a:spcAft>
+                <a:spcPts val="600"/>
+              </a:spcAft>
+            </a:pPr>
+            <a:r>
+              <a:rPr sz="1300" b="1">
+                <a:solidFill>
+                  <a:srgbClr val="1F3864"/>
+                </a:solidFill>
+                <a:latin typeface="나눔고딕OTF" panose="020D0604000000000000" pitchFamily="34" charset="-127"/>
+                <a:ea typeface="나눔고딕OTF" panose="020D0604000000000000" pitchFamily="34" charset="-127"/>
+              </a:rPr>
+              <a:t>산출물</a:t>
+            </a:r>
+          </a:p>
+        </p:txBody>
+      </p:sp>
+      <p:sp>
+        <p:nvSpPr>
+          <p:cNvPr id="6" name="TextBox 5"/>
+          <p:cNvSpPr txBox="1"/>
+          <p:nvPr/>
+        </p:nvSpPr>
+        <p:spPr>
+          <a:xfrm>
+            <a:off x="565435" y="4143129"/>
+            <a:ext cx="10972800" cy="1698542"/>
+          </a:xfrm>
+          <a:prstGeom prst="rect">
+            <a:avLst/>
+          </a:prstGeom>
+          <a:noFill/>
+        </p:spPr>
+        <p:txBody>
+          <a:bodyPr wrap="square">
+            <a:spAutoFit/>
+          </a:bodyPr>
+          <a:lstStyle/>
+          <a:p>
+            <a:pPr>
+              <a:lnSpc>
+                <a:spcPct val="125000"/>
+              </a:lnSpc>
+              <a:spcAft>
+                <a:spcPts val="600"/>
+              </a:spcAft>
+            </a:pPr>
+            <a:r>
+              <a:rPr lang="en-US" altLang="ko-KR" sz="1350" dirty="0">
+                <a:solidFill>
+                  <a:srgbClr val="1F2328"/>
+                </a:solidFill>
+                <a:latin typeface="나눔고딕OTF" panose="020D0604000000000000" pitchFamily="34" charset="-127"/>
+                <a:ea typeface="나눔고딕OTF" panose="020D0604000000000000" pitchFamily="34" charset="-127"/>
+              </a:rPr>
+              <a:t>· </a:t>
+            </a:r>
+            <a:r>
+              <a:rPr sz="1350" b="0" dirty="0" err="1" smtClean="0">
+                <a:solidFill>
+                  <a:srgbClr val="1F2328"/>
+                </a:solidFill>
+                <a:latin typeface="나눔고딕OTF" panose="020D0604000000000000" pitchFamily="34" charset="-127"/>
+                <a:ea typeface="나눔고딕OTF" panose="020D0604000000000000" pitchFamily="34" charset="-127"/>
+              </a:rPr>
+              <a:t>대시보드</a:t>
+            </a:r>
+            <a:r>
+              <a:rPr sz="1350" b="0" dirty="0" smtClean="0">
+                <a:solidFill>
+                  <a:srgbClr val="1F2328"/>
+                </a:solidFill>
+                <a:latin typeface="나눔고딕OTF" panose="020D0604000000000000" pitchFamily="34" charset="-127"/>
+                <a:ea typeface="나눔고딕OTF" panose="020D0604000000000000" pitchFamily="34" charset="-127"/>
+              </a:rPr>
+              <a:t> </a:t>
+            </a:r>
+            <a:r>
+              <a:rPr sz="1350" b="0" dirty="0">
+                <a:solidFill>
+                  <a:srgbClr val="1F2328"/>
+                </a:solidFill>
+                <a:latin typeface="나눔고딕OTF" panose="020D0604000000000000" pitchFamily="34" charset="-127"/>
+                <a:ea typeface="나눔고딕OTF" panose="020D0604000000000000" pitchFamily="34" charset="-127"/>
+              </a:rPr>
+              <a:t>https://rating-analysis-260910.streamlit.app/</a:t>
+            </a:r>
+          </a:p>
+          <a:p>
+            <a:pPr>
+              <a:lnSpc>
+                <a:spcPct val="125000"/>
+              </a:lnSpc>
+              <a:spcAft>
+                <a:spcPts val="600"/>
+              </a:spcAft>
+            </a:pPr>
+            <a:r>
+              <a:rPr lang="en-US" altLang="ko-KR" sz="1350" dirty="0">
+                <a:solidFill>
+                  <a:srgbClr val="1F2328"/>
+                </a:solidFill>
+                <a:latin typeface="나눔고딕OTF" panose="020D0604000000000000" pitchFamily="34" charset="-127"/>
+                <a:ea typeface="나눔고딕OTF" panose="020D0604000000000000" pitchFamily="34" charset="-127"/>
+              </a:rPr>
+              <a:t>· </a:t>
+            </a:r>
+            <a:r>
+              <a:rPr sz="1350" b="0" dirty="0" err="1" smtClean="0">
+                <a:solidFill>
+                  <a:srgbClr val="1F2328"/>
+                </a:solidFill>
+                <a:latin typeface="나눔고딕OTF" panose="020D0604000000000000" pitchFamily="34" charset="-127"/>
+                <a:ea typeface="나눔고딕OTF" panose="020D0604000000000000" pitchFamily="34" charset="-127"/>
+              </a:rPr>
+              <a:t>통합</a:t>
+            </a:r>
+            <a:r>
+              <a:rPr sz="1350" b="0" dirty="0" smtClean="0">
+                <a:solidFill>
+                  <a:srgbClr val="1F2328"/>
+                </a:solidFill>
+                <a:latin typeface="나눔고딕OTF" panose="020D0604000000000000" pitchFamily="34" charset="-127"/>
+                <a:ea typeface="나눔고딕OTF" panose="020D0604000000000000" pitchFamily="34" charset="-127"/>
+              </a:rPr>
+              <a:t> </a:t>
+            </a:r>
+            <a:r>
+              <a:rPr sz="1350" b="0" dirty="0">
+                <a:solidFill>
+                  <a:srgbClr val="1F2328"/>
+                </a:solidFill>
+                <a:latin typeface="나눔고딕OTF" panose="020D0604000000000000" pitchFamily="34" charset="-127"/>
+                <a:ea typeface="나눔고딕OTF" panose="020D0604000000000000" pitchFamily="34" charset="-127"/>
+              </a:rPr>
+              <a:t>Dataset </a:t>
+            </a:r>
+            <a:endParaRPr lang="en-US" sz="1350" b="0" dirty="0" smtClean="0">
+              <a:solidFill>
+                <a:srgbClr val="1F2328"/>
+              </a:solidFill>
+              <a:latin typeface="나눔고딕OTF" panose="020D0604000000000000" pitchFamily="34" charset="-127"/>
+              <a:ea typeface="나눔고딕OTF" panose="020D0604000000000000" pitchFamily="34" charset="-127"/>
+            </a:endParaRPr>
+          </a:p>
+          <a:p>
+            <a:pPr algn="l">
+              <a:lnSpc>
+                <a:spcPct val="125000"/>
+              </a:lnSpc>
+              <a:spcAft>
+                <a:spcPts val="600"/>
+              </a:spcAft>
+            </a:pPr>
+            <a:r>
+              <a:rPr sz="1350" b="0" dirty="0" smtClean="0">
+                <a:solidFill>
+                  <a:srgbClr val="1F2328"/>
+                </a:solidFill>
+                <a:latin typeface="나눔고딕OTF" panose="020D0604000000000000" pitchFamily="34" charset="-127"/>
+                <a:ea typeface="나눔고딕OTF" panose="020D0604000000000000" pitchFamily="34" charset="-127"/>
+              </a:rPr>
+              <a:t>· </a:t>
+            </a:r>
+            <a:r>
+              <a:rPr sz="1350" b="0" dirty="0">
+                <a:solidFill>
+                  <a:srgbClr val="1F2328"/>
+                </a:solidFill>
+                <a:latin typeface="나눔고딕OTF" panose="020D0604000000000000" pitchFamily="34" charset="-127"/>
+                <a:ea typeface="나눔고딕OTF" panose="020D0604000000000000" pitchFamily="34" charset="-127"/>
+              </a:rPr>
+              <a:t>EDA 2종 </a:t>
+            </a:r>
+            <a:endParaRPr lang="en-US" sz="1350" b="0" dirty="0" smtClean="0">
+              <a:solidFill>
+                <a:srgbClr val="1F2328"/>
+              </a:solidFill>
+              <a:latin typeface="나눔고딕OTF" panose="020D0604000000000000" pitchFamily="34" charset="-127"/>
+              <a:ea typeface="나눔고딕OTF" panose="020D0604000000000000" pitchFamily="34" charset="-127"/>
+            </a:endParaRPr>
+          </a:p>
+          <a:p>
+            <a:pPr algn="l">
+              <a:lnSpc>
+                <a:spcPct val="125000"/>
+              </a:lnSpc>
+              <a:spcAft>
+                <a:spcPts val="600"/>
+              </a:spcAft>
+            </a:pPr>
+            <a:r>
+              <a:rPr sz="1350" b="0" dirty="0" smtClean="0">
+                <a:solidFill>
+                  <a:srgbClr val="1F2328"/>
+                </a:solidFill>
+                <a:latin typeface="나눔고딕OTF" panose="020D0604000000000000" pitchFamily="34" charset="-127"/>
+                <a:ea typeface="나눔고딕OTF" panose="020D0604000000000000" pitchFamily="34" charset="-127"/>
+              </a:rPr>
+              <a:t>· </a:t>
+            </a:r>
+            <a:r>
+              <a:rPr sz="1350" b="0" dirty="0" err="1">
+                <a:solidFill>
+                  <a:srgbClr val="1F2328"/>
+                </a:solidFill>
+                <a:latin typeface="나눔고딕OTF" panose="020D0604000000000000" pitchFamily="34" charset="-127"/>
+                <a:ea typeface="나눔고딕OTF" panose="020D0604000000000000" pitchFamily="34" charset="-127"/>
+              </a:rPr>
+              <a:t>청소년</a:t>
+            </a:r>
+            <a:r>
+              <a:rPr sz="1350" b="0" dirty="0">
+                <a:solidFill>
+                  <a:srgbClr val="1F2328"/>
+                </a:solidFill>
+                <a:latin typeface="나눔고딕OTF" panose="020D0604000000000000" pitchFamily="34" charset="-127"/>
+                <a:ea typeface="나눔고딕OTF" panose="020D0604000000000000" pitchFamily="34" charset="-127"/>
+              </a:rPr>
+              <a:t> </a:t>
+            </a:r>
+            <a:r>
+              <a:rPr sz="1350" b="0" dirty="0" err="1">
+                <a:solidFill>
+                  <a:srgbClr val="1F2328"/>
+                </a:solidFill>
+                <a:latin typeface="나눔고딕OTF" panose="020D0604000000000000" pitchFamily="34" charset="-127"/>
+                <a:ea typeface="나눔고딕OTF" panose="020D0604000000000000" pitchFamily="34" charset="-127"/>
+              </a:rPr>
+              <a:t>이용</a:t>
+            </a:r>
+            <a:r>
+              <a:rPr sz="1350" b="0" dirty="0">
+                <a:solidFill>
+                  <a:srgbClr val="1F2328"/>
+                </a:solidFill>
+                <a:latin typeface="나눔고딕OTF" panose="020D0604000000000000" pitchFamily="34" charset="-127"/>
+                <a:ea typeface="나눔고딕OTF" panose="020D0604000000000000" pitchFamily="34" charset="-127"/>
+              </a:rPr>
+              <a:t> </a:t>
+            </a:r>
+            <a:r>
+              <a:rPr sz="1350" b="0" dirty="0" err="1">
+                <a:solidFill>
+                  <a:srgbClr val="1F2328"/>
+                </a:solidFill>
+                <a:latin typeface="나눔고딕OTF" panose="020D0604000000000000" pitchFamily="34" charset="-127"/>
+                <a:ea typeface="나눔고딕OTF" panose="020D0604000000000000" pitchFamily="34" charset="-127"/>
+              </a:rPr>
+              <a:t>제한</a:t>
+            </a:r>
+            <a:r>
+              <a:rPr sz="1350" b="0" dirty="0">
+                <a:solidFill>
+                  <a:srgbClr val="1F2328"/>
+                </a:solidFill>
+                <a:latin typeface="나눔고딕OTF" panose="020D0604000000000000" pitchFamily="34" charset="-127"/>
+                <a:ea typeface="나눔고딕OTF" panose="020D0604000000000000" pitchFamily="34" charset="-127"/>
+              </a:rPr>
+              <a:t> </a:t>
+            </a:r>
+            <a:r>
+              <a:rPr sz="1350" b="0" dirty="0" err="1">
+                <a:solidFill>
+                  <a:srgbClr val="1F2328"/>
+                </a:solidFill>
+                <a:latin typeface="나눔고딕OTF" panose="020D0604000000000000" pitchFamily="34" charset="-127"/>
+                <a:ea typeface="나눔고딕OTF" panose="020D0604000000000000" pitchFamily="34" charset="-127"/>
+              </a:rPr>
+              <a:t>특성</a:t>
+            </a:r>
+            <a:r>
+              <a:rPr sz="1350" b="0" dirty="0">
+                <a:solidFill>
+                  <a:srgbClr val="1F2328"/>
+                </a:solidFill>
+                <a:latin typeface="나눔고딕OTF" panose="020D0604000000000000" pitchFamily="34" charset="-127"/>
+                <a:ea typeface="나눔고딕OTF" panose="020D0604000000000000" pitchFamily="34" charset="-127"/>
+              </a:rPr>
+              <a:t> </a:t>
+            </a:r>
+            <a:r>
+              <a:rPr sz="1350" b="0" dirty="0" err="1">
+                <a:solidFill>
+                  <a:srgbClr val="1F2328"/>
+                </a:solidFill>
+                <a:latin typeface="나눔고딕OTF" panose="020D0604000000000000" pitchFamily="34" charset="-127"/>
+                <a:ea typeface="나눔고딕OTF" panose="020D0604000000000000" pitchFamily="34" charset="-127"/>
+              </a:rPr>
+              <a:t>분석</a:t>
+            </a:r>
+            <a:r>
+              <a:rPr sz="1350" b="0" dirty="0">
+                <a:solidFill>
+                  <a:srgbClr val="1F2328"/>
+                </a:solidFill>
+                <a:latin typeface="나눔고딕OTF" panose="020D0604000000000000" pitchFamily="34" charset="-127"/>
+                <a:ea typeface="나눔고딕OTF" panose="020D0604000000000000" pitchFamily="34" charset="-127"/>
+              </a:rPr>
+              <a:t> </a:t>
+            </a:r>
+            <a:endParaRPr lang="en-US" sz="1350" b="0" dirty="0" smtClean="0">
+              <a:solidFill>
+                <a:srgbClr val="1F2328"/>
+              </a:solidFill>
+              <a:latin typeface="나눔고딕OTF" panose="020D0604000000000000" pitchFamily="34" charset="-127"/>
+              <a:ea typeface="나눔고딕OTF" panose="020D0604000000000000" pitchFamily="34" charset="-127"/>
+            </a:endParaRPr>
+          </a:p>
+          <a:p>
+            <a:pPr algn="l">
+              <a:lnSpc>
+                <a:spcPct val="125000"/>
+              </a:lnSpc>
+              <a:spcAft>
+                <a:spcPts val="600"/>
+              </a:spcAft>
+            </a:pPr>
+            <a:r>
+              <a:rPr sz="1350" b="0" dirty="0" smtClean="0">
+                <a:solidFill>
+                  <a:srgbClr val="1F2328"/>
+                </a:solidFill>
+                <a:latin typeface="나눔고딕OTF" panose="020D0604000000000000" pitchFamily="34" charset="-127"/>
+                <a:ea typeface="나눔고딕OTF" panose="020D0604000000000000" pitchFamily="34" charset="-127"/>
+              </a:rPr>
+              <a:t>· </a:t>
+            </a:r>
+            <a:r>
+              <a:rPr sz="1350" b="0" dirty="0" err="1">
+                <a:solidFill>
+                  <a:srgbClr val="1F2328"/>
+                </a:solidFill>
+                <a:latin typeface="나눔고딕OTF" panose="020D0604000000000000" pitchFamily="34" charset="-127"/>
+                <a:ea typeface="나눔고딕OTF" panose="020D0604000000000000" pitchFamily="34" charset="-127"/>
+              </a:rPr>
+              <a:t>인사이트</a:t>
+            </a:r>
+            <a:r>
+              <a:rPr sz="1350" b="0" dirty="0">
+                <a:solidFill>
+                  <a:srgbClr val="1F2328"/>
+                </a:solidFill>
+                <a:latin typeface="나눔고딕OTF" panose="020D0604000000000000" pitchFamily="34" charset="-127"/>
+                <a:ea typeface="나눔고딕OTF" panose="020D0604000000000000" pitchFamily="34" charset="-127"/>
+              </a:rPr>
+              <a:t> </a:t>
+            </a:r>
+            <a:r>
+              <a:rPr sz="1350" b="0" dirty="0" err="1">
+                <a:solidFill>
+                  <a:srgbClr val="1F2328"/>
+                </a:solidFill>
+                <a:latin typeface="나눔고딕OTF" panose="020D0604000000000000" pitchFamily="34" charset="-127"/>
+                <a:ea typeface="나눔고딕OTF" panose="020D0604000000000000" pitchFamily="34" charset="-127"/>
+              </a:rPr>
+              <a:t>리포트</a:t>
+            </a:r>
+            <a:endParaRPr sz="1350" b="0" dirty="0">
+              <a:solidFill>
+                <a:srgbClr val="1F2328"/>
+              </a:solidFill>
+              <a:latin typeface="나눔고딕OTF" panose="020D0604000000000000" pitchFamily="34" charset="-127"/>
+              <a:ea typeface="나눔고딕OTF" panose="020D0604000000000000" pitchFamily="34" charset="-127"/>
+            </a:endParaRPr>
+          </a:p>
+        </p:txBody>
+      </p:sp>
+      <p:sp>
+        <p:nvSpPr>
+          <p:cNvPr id="7" name="TextBox 6"/>
+          <p:cNvSpPr txBox="1"/>
+          <p:nvPr/>
+        </p:nvSpPr>
+        <p:spPr>
+          <a:xfrm>
+            <a:off x="9397793" y="5550437"/>
+            <a:ext cx="2140442" cy="582467"/>
+          </a:xfrm>
+          <a:prstGeom prst="rect">
+            <a:avLst/>
+          </a:prstGeom>
+          <a:noFill/>
+        </p:spPr>
+        <p:txBody>
+          <a:bodyPr wrap="square">
+            <a:spAutoFit/>
+          </a:bodyPr>
+          <a:lstStyle/>
+          <a:p>
+            <a:pPr algn="l">
+              <a:lnSpc>
+                <a:spcPct val="125000"/>
+              </a:lnSpc>
+              <a:spcAft>
+                <a:spcPts val="600"/>
+              </a:spcAft>
+            </a:pPr>
+            <a:r>
+              <a:rPr sz="2800" b="1" dirty="0" err="1">
+                <a:solidFill>
+                  <a:srgbClr val="1F3864"/>
+                </a:solidFill>
+                <a:latin typeface="경기천년제목 Bold" panose="02020803020101020101" pitchFamily="18" charset="-127"/>
+                <a:ea typeface="경기천년제목 Bold" panose="02020803020101020101" pitchFamily="18" charset="-127"/>
+              </a:rPr>
+              <a:t>감사합니다</a:t>
+            </a:r>
+            <a:r>
+              <a:rPr sz="2800" b="1" dirty="0">
+                <a:solidFill>
+                  <a:srgbClr val="1F3864"/>
+                </a:solidFill>
+                <a:latin typeface="경기천년제목 Bold" panose="02020803020101020101" pitchFamily="18" charset="-127"/>
+                <a:ea typeface="경기천년제목 Bold" panose="02020803020101020101" pitchFamily="18" charset="-127"/>
+              </a:rPr>
+              <a:t>.</a:t>
+            </a:r>
+          </a:p>
+        </p:txBody>
+      </p:sp>
     </p:spTree>
   </p:cSld>
   <p:clrMapOvr>
